--- a/Team11_RL_End_Project.pptx
+++ b/Team11_RL_End_Project.pptx
@@ -5,31 +5,30 @@
     <p:sldMasterId id="2147483648" r:id="rId1"/>
   </p:sldMasterIdLst>
   <p:notesMasterIdLst>
-    <p:notesMasterId r:id="rId24"/>
+    <p:notesMasterId r:id="rId23"/>
   </p:notesMasterIdLst>
   <p:sldIdLst>
     <p:sldId id="256" r:id="rId2"/>
     <p:sldId id="257" r:id="rId3"/>
     <p:sldId id="258" r:id="rId4"/>
-    <p:sldId id="259" r:id="rId5"/>
-    <p:sldId id="260" r:id="rId6"/>
-    <p:sldId id="261" r:id="rId7"/>
-    <p:sldId id="262" r:id="rId8"/>
-    <p:sldId id="263" r:id="rId9"/>
-    <p:sldId id="264" r:id="rId10"/>
-    <p:sldId id="265" r:id="rId11"/>
-    <p:sldId id="266" r:id="rId12"/>
-    <p:sldId id="267" r:id="rId13"/>
-    <p:sldId id="275" r:id="rId14"/>
-    <p:sldId id="268" r:id="rId15"/>
-    <p:sldId id="277" r:id="rId16"/>
-    <p:sldId id="269" r:id="rId17"/>
-    <p:sldId id="276" r:id="rId18"/>
-    <p:sldId id="270" r:id="rId19"/>
-    <p:sldId id="271" r:id="rId20"/>
-    <p:sldId id="272" r:id="rId21"/>
-    <p:sldId id="273" r:id="rId22"/>
-    <p:sldId id="274" r:id="rId23"/>
+    <p:sldId id="260" r:id="rId5"/>
+    <p:sldId id="261" r:id="rId6"/>
+    <p:sldId id="262" r:id="rId7"/>
+    <p:sldId id="263" r:id="rId8"/>
+    <p:sldId id="264" r:id="rId9"/>
+    <p:sldId id="265" r:id="rId10"/>
+    <p:sldId id="266" r:id="rId11"/>
+    <p:sldId id="267" r:id="rId12"/>
+    <p:sldId id="275" r:id="rId13"/>
+    <p:sldId id="268" r:id="rId14"/>
+    <p:sldId id="277" r:id="rId15"/>
+    <p:sldId id="269" r:id="rId16"/>
+    <p:sldId id="276" r:id="rId17"/>
+    <p:sldId id="270" r:id="rId18"/>
+    <p:sldId id="271" r:id="rId19"/>
+    <p:sldId id="272" r:id="rId20"/>
+    <p:sldId id="273" r:id="rId21"/>
+    <p:sldId id="274" r:id="rId22"/>
   </p:sldIdLst>
   <p:sldSz cx="9144000" cy="5143500" type="screen16x9"/>
   <p:notesSz cx="5143500" cy="9144000"/>
@@ -1907,7 +1906,7 @@
     </p:spTree>
     <p:extLst>
       <p:ext uri="{BB962C8B-B14F-4D97-AF65-F5344CB8AC3E}">
-        <p14:creationId xmlns:p14="http://schemas.microsoft.com/office/powerpoint/2010/main" val="1024086991"/>
+        <p14:creationId xmlns:p14="http://schemas.microsoft.com/office/powerpoint/2010/main" val="2954709342"/>
       </p:ext>
     </p:extLst>
   </p:cSld>
@@ -1991,7 +1990,7 @@
     </p:spTree>
     <p:extLst>
       <p:ext uri="{BB962C8B-B14F-4D97-AF65-F5344CB8AC3E}">
-        <p14:creationId xmlns:p14="http://schemas.microsoft.com/office/powerpoint/2010/main" val="2954709342"/>
+        <p14:creationId xmlns:p14="http://schemas.microsoft.com/office/powerpoint/2010/main" val="1024086991"/>
       </p:ext>
     </p:extLst>
   </p:cSld>
@@ -2066,7 +2065,7 @@
           <a:p>
             <a:fld id="{F7021451-1387-4CA6-816F-3879F97B5CBC}" type="slidenum">
               <a:rPr lang="en-US"/>
-              <a:t>14</a:t>
+              <a:t>15</a:t>
             </a:fld>
             <a:endParaRPr lang="en-US"/>
           </a:p>
@@ -2150,7 +2149,7 @@
           <a:p>
             <a:fld id="{F7021451-1387-4CA6-816F-3879F97B5CBC}" type="slidenum">
               <a:rPr lang="en-US"/>
-              <a:t>16</a:t>
+              <a:t>17</a:t>
             </a:fld>
             <a:endParaRPr lang="en-US"/>
           </a:p>
@@ -2571,90 +2570,6 @@
             <a:fld id="{F7021451-1387-4CA6-816F-3879F97B5CBC}" type="slidenum">
               <a:rPr lang="en-US"/>
               <a:t>2</a:t>
-            </a:fld>
-            <a:endParaRPr lang="en-US"/>
-          </a:p>
-        </p:txBody>
-      </p:sp>
-    </p:spTree>
-    <p:extLst>
-      <p:ext uri="{BB962C8B-B14F-4D97-AF65-F5344CB8AC3E}">
-        <p14:creationId xmlns:p14="http://schemas.microsoft.com/office/powerpoint/2010/main" val="1024086991"/>
-      </p:ext>
-    </p:extLst>
-  </p:cSld>
-  <p:clrMapOvr>
-    <a:masterClrMapping/>
-  </p:clrMapOvr>
-</p:notes>
-</file>
-
-<file path=ppt/notesSlides/notesSlide20.xml><?xml version="1.0" encoding="utf-8"?>
-<p:notes xmlns:a="http://schemas.openxmlformats.org/drawingml/2006/main" xmlns:r="http://schemas.openxmlformats.org/officeDocument/2006/relationships" xmlns:p="http://schemas.openxmlformats.org/presentationml/2006/main">
-  <p:cSld>
-    <p:spTree>
-      <p:nvGrpSpPr>
-        <p:cNvPr id="1" name=""/>
-        <p:cNvGrpSpPr/>
-        <p:nvPr/>
-      </p:nvGrpSpPr>
-      <p:grpSpPr>
-        <a:xfrm>
-          <a:off x="0" y="0"/>
-          <a:ext cx="0" cy="0"/>
-          <a:chOff x="0" y="0"/>
-          <a:chExt cx="0" cy="0"/>
-        </a:xfrm>
-      </p:grpSpPr>
-      <p:sp>
-        <p:nvSpPr>
-          <p:cNvPr id="2" name="Slide Image Placeholder 1"/>
-          <p:cNvSpPr>
-            <a:spLocks noGrp="1" noRot="1" noChangeAspect="1"/>
-          </p:cNvSpPr>
-          <p:nvPr>
-            <p:ph type="sldImg"/>
-          </p:nvPr>
-        </p:nvSpPr>
-        <p:spPr/>
-      </p:sp>
-      <p:sp>
-        <p:nvSpPr>
-          <p:cNvPr id="3" name="Notes Placeholder 2"/>
-          <p:cNvSpPr>
-            <a:spLocks noGrp="1"/>
-          </p:cNvSpPr>
-          <p:nvPr>
-            <p:ph type="body" idx="1"/>
-          </p:nvPr>
-        </p:nvSpPr>
-        <p:spPr/>
-        <p:txBody>
-          <a:bodyPr/>
-          <a:lstStyle/>
-          <a:p>
-            <a:endParaRPr lang="en-US" dirty="0"/>
-          </a:p>
-        </p:txBody>
-      </p:sp>
-      <p:sp>
-        <p:nvSpPr>
-          <p:cNvPr id="4" name="Slide Number Placeholder 3"/>
-          <p:cNvSpPr>
-            <a:spLocks noGrp="1"/>
-          </p:cNvSpPr>
-          <p:nvPr>
-            <p:ph type="sldNum" sz="quarter" idx="10"/>
-          </p:nvPr>
-        </p:nvSpPr>
-        <p:spPr/>
-        <p:txBody>
-          <a:bodyPr/>
-          <a:lstStyle/>
-          <a:p>
-            <a:fld id="{F7021451-1387-4CA6-816F-3879F97B5CBC}" type="slidenum">
-              <a:rPr lang="en-US"/>
-              <a:t>22</a:t>
             </a:fld>
             <a:endParaRPr lang="en-US"/>
           </a:p>
@@ -4009,7 +3924,7 @@
         </p:nvSpPr>
         <p:spPr>
           <a:xfrm>
-            <a:off x="457200" y="4526280"/>
+            <a:off x="512297" y="4722173"/>
             <a:ext cx="8229600" cy="274320"/>
           </a:xfrm>
           <a:prstGeom prst="rect">
@@ -4045,1078 +3960,25 @@
   <p:clrMapOvr>
     <a:masterClrMapping/>
   </p:clrMapOvr>
+  <mc:AlternateContent xmlns:mc="http://schemas.openxmlformats.org/markup-compatibility/2006">
+    <mc:Choice xmlns:p14="http://schemas.microsoft.com/office/powerpoint/2010/main" Requires="p14">
+      <p:transition spd="slow" p14:dur="2000" advTm="5764"/>
+    </mc:Choice>
+    <mc:Fallback>
+      <p:transition spd="slow" advTm="5764"/>
+    </mc:Fallback>
+  </mc:AlternateContent>
+  <p:timing>
+    <p:tnLst>
+      <p:par>
+        <p:cTn id="1" dur="indefinite" restart="never" nodeType="tmRoot"/>
+      </p:par>
+    </p:tnLst>
+  </p:timing>
 </p:sld>
 </file>
 
 <file path=ppt/slides/slide10.xml><?xml version="1.0" encoding="utf-8"?>
-<p:sld xmlns:a="http://schemas.openxmlformats.org/drawingml/2006/main" xmlns:r="http://schemas.openxmlformats.org/officeDocument/2006/relationships" xmlns:p="http://schemas.openxmlformats.org/presentationml/2006/main">
-  <p:cSld name="Slide 10">
-    <p:bg>
-      <p:bgPr>
-        <a:solidFill>
-          <a:srgbClr val="FFFFFF"/>
-        </a:solidFill>
-        <a:effectLst/>
-      </p:bgPr>
-    </p:bg>
-    <p:spTree>
-      <p:nvGrpSpPr>
-        <p:cNvPr id="1" name=""/>
-        <p:cNvGrpSpPr/>
-        <p:nvPr/>
-      </p:nvGrpSpPr>
-      <p:grpSpPr>
-        <a:xfrm>
-          <a:off x="0" y="0"/>
-          <a:ext cx="0" cy="0"/>
-          <a:chOff x="0" y="0"/>
-          <a:chExt cx="0" cy="0"/>
-        </a:xfrm>
-      </p:grpSpPr>
-      <p:sp>
-        <p:nvSpPr>
-          <p:cNvPr id="2" name="Shape 0"/>
-          <p:cNvSpPr/>
-          <p:nvPr/>
-        </p:nvSpPr>
-        <p:spPr>
-          <a:xfrm>
-            <a:off x="0" y="0"/>
-            <a:ext cx="9144000" cy="658368"/>
-          </a:xfrm>
-          <a:prstGeom prst="rect">
-            <a:avLst/>
-          </a:prstGeom>
-          <a:solidFill>
-            <a:srgbClr val="1F3864"/>
-          </a:solidFill>
-          <a:ln w="12700">
-            <a:solidFill>
-              <a:srgbClr val="1F3864"/>
-            </a:solidFill>
-            <a:prstDash val="solid"/>
-          </a:ln>
-        </p:spPr>
-        <p:txBody>
-          <a:bodyPr/>
-          <a:lstStyle/>
-          <a:p>
-            <a:endParaRPr lang="en-IN"/>
-          </a:p>
-        </p:txBody>
-      </p:sp>
-      <p:sp>
-        <p:nvSpPr>
-          <p:cNvPr id="3" name="Text 1"/>
-          <p:cNvSpPr/>
-          <p:nvPr/>
-        </p:nvSpPr>
-        <p:spPr>
-          <a:xfrm>
-            <a:off x="320040" y="0"/>
-            <a:ext cx="8503920" cy="658368"/>
-          </a:xfrm>
-          <a:prstGeom prst="rect">
-            <a:avLst/>
-          </a:prstGeom>
-          <a:noFill/>
-          <a:ln/>
-        </p:spPr>
-        <p:txBody>
-          <a:bodyPr wrap="square" lIns="0" tIns="0" rIns="0" bIns="0" rtlCol="0" anchor="ctr"/>
-          <a:lstStyle/>
-          <a:p>
-            <a:pPr marL="0" indent="0">
-              <a:buNone/>
-            </a:pPr>
-            <a:r>
-              <a:rPr lang="en-US" sz="2200" b="1" dirty="0">
-                <a:solidFill>
-                  <a:srgbClr val="FFFFFF"/>
-                </a:solidFill>
-                <a:latin typeface="Garamond" pitchFamily="34" charset="0"/>
-                <a:ea typeface="Garamond" pitchFamily="34" charset="-122"/>
-                <a:cs typeface="Garamond" pitchFamily="34" charset="-120"/>
-              </a:rPr>
-              <a:t>Implementation Details</a:t>
-            </a:r>
-            <a:endParaRPr lang="en-US" sz="2200" dirty="0"/>
-          </a:p>
-        </p:txBody>
-      </p:sp>
-      <p:sp>
-        <p:nvSpPr>
-          <p:cNvPr id="4" name="Shape 2"/>
-          <p:cNvSpPr/>
-          <p:nvPr/>
-        </p:nvSpPr>
-        <p:spPr>
-          <a:xfrm>
-            <a:off x="0" y="658368"/>
-            <a:ext cx="9144000" cy="50292"/>
-          </a:xfrm>
-          <a:prstGeom prst="rect">
-            <a:avLst/>
-          </a:prstGeom>
-          <a:solidFill>
-            <a:srgbClr val="C00000"/>
-          </a:solidFill>
-          <a:ln w="12700">
-            <a:solidFill>
-              <a:srgbClr val="C00000"/>
-            </a:solidFill>
-            <a:prstDash val="solid"/>
-          </a:ln>
-        </p:spPr>
-        <p:txBody>
-          <a:bodyPr/>
-          <a:lstStyle/>
-          <a:p>
-            <a:endParaRPr lang="en-IN"/>
-          </a:p>
-        </p:txBody>
-      </p:sp>
-      <p:sp>
-        <p:nvSpPr>
-          <p:cNvPr id="5" name="Shape 3"/>
-          <p:cNvSpPr/>
-          <p:nvPr/>
-        </p:nvSpPr>
-        <p:spPr>
-          <a:xfrm>
-            <a:off x="274320" y="822960"/>
-            <a:ext cx="4251960" cy="1965960"/>
-          </a:xfrm>
-          <a:prstGeom prst="rect">
-            <a:avLst/>
-          </a:prstGeom>
-          <a:solidFill>
-            <a:srgbClr val="FFFFFF"/>
-          </a:solidFill>
-          <a:ln w="12700">
-            <a:solidFill>
-              <a:srgbClr val="CCCCCC"/>
-            </a:solidFill>
-            <a:prstDash val="solid"/>
-          </a:ln>
-        </p:spPr>
-        <p:txBody>
-          <a:bodyPr/>
-          <a:lstStyle/>
-          <a:p>
-            <a:endParaRPr lang="en-IN"/>
-          </a:p>
-        </p:txBody>
-      </p:sp>
-      <p:sp>
-        <p:nvSpPr>
-          <p:cNvPr id="6" name="Shape 4"/>
-          <p:cNvSpPr/>
-          <p:nvPr/>
-        </p:nvSpPr>
-        <p:spPr>
-          <a:xfrm>
-            <a:off x="274320" y="822960"/>
-            <a:ext cx="4251960" cy="274320"/>
-          </a:xfrm>
-          <a:prstGeom prst="rect">
-            <a:avLst/>
-          </a:prstGeom>
-          <a:solidFill>
-            <a:srgbClr val="1A6B3A"/>
-          </a:solidFill>
-          <a:ln w="12700">
-            <a:solidFill>
-              <a:srgbClr val="1A6B3A"/>
-            </a:solidFill>
-            <a:prstDash val="solid"/>
-          </a:ln>
-        </p:spPr>
-        <p:txBody>
-          <a:bodyPr/>
-          <a:lstStyle/>
-          <a:p>
-            <a:endParaRPr lang="en-IN"/>
-          </a:p>
-        </p:txBody>
-      </p:sp>
-      <p:sp>
-        <p:nvSpPr>
-          <p:cNvPr id="7" name="Text 5"/>
-          <p:cNvSpPr/>
-          <p:nvPr/>
-        </p:nvSpPr>
-        <p:spPr>
-          <a:xfrm>
-            <a:off x="274320" y="822960"/>
-            <a:ext cx="4251960" cy="274320"/>
-          </a:xfrm>
-          <a:prstGeom prst="rect">
-            <a:avLst/>
-          </a:prstGeom>
-          <a:noFill/>
-          <a:ln/>
-        </p:spPr>
-        <p:txBody>
-          <a:bodyPr wrap="square" lIns="0" tIns="0" rIns="0" bIns="0" rtlCol="0" anchor="ctr"/>
-          <a:lstStyle/>
-          <a:p>
-            <a:pPr marL="0" indent="0" algn="ctr">
-              <a:buNone/>
-            </a:pPr>
-            <a:r>
-              <a:rPr lang="en-US" sz="1100" b="1" dirty="0">
-                <a:solidFill>
-                  <a:srgbClr val="FFFFFF"/>
-                </a:solidFill>
-                <a:latin typeface="Calibri" pitchFamily="34" charset="0"/>
-                <a:ea typeface="Calibri" pitchFamily="34" charset="-122"/>
-                <a:cs typeface="Calibri" pitchFamily="34" charset="-120"/>
-              </a:rPr>
-              <a:t>Environment Setup</a:t>
-            </a:r>
-            <a:endParaRPr lang="en-US" sz="1100" dirty="0"/>
-          </a:p>
-        </p:txBody>
-      </p:sp>
-      <p:sp>
-        <p:nvSpPr>
-          <p:cNvPr id="8" name="Text 6"/>
-          <p:cNvSpPr/>
-          <p:nvPr/>
-        </p:nvSpPr>
-        <p:spPr>
-          <a:xfrm>
-            <a:off x="384048" y="1124712"/>
-            <a:ext cx="4032504" cy="1600200"/>
-          </a:xfrm>
-          <a:prstGeom prst="rect">
-            <a:avLst/>
-          </a:prstGeom>
-          <a:noFill/>
-          <a:ln/>
-        </p:spPr>
-        <p:txBody>
-          <a:bodyPr wrap="square" rtlCol="0" anchor="t"/>
-          <a:lstStyle/>
-          <a:p>
-            <a:pPr marL="342900" indent="-342900">
-              <a:buSzPct val="100000"/>
-              <a:buChar char="•"/>
-            </a:pPr>
-            <a:r>
-              <a:rPr lang="en-US" sz="950" dirty="0">
-                <a:solidFill>
-                  <a:srgbClr val="1C2120"/>
-                </a:solidFill>
-                <a:latin typeface="Calibri" pitchFamily="34" charset="0"/>
-                <a:ea typeface="Calibri" pitchFamily="34" charset="-122"/>
-                <a:cs typeface="Calibri" pitchFamily="34" charset="-120"/>
-              </a:rPr>
-              <a:t>Gymnasium-compatible custom env (CropIrrigationEnv)</a:t>
-            </a:r>
-            <a:endParaRPr lang="en-US" sz="950" dirty="0"/>
-          </a:p>
-          <a:p>
-            <a:pPr marL="342900" indent="-342900">
-              <a:buSzPct val="100000"/>
-              <a:buChar char="•"/>
-            </a:pPr>
-            <a:r>
-              <a:rPr lang="en-US" sz="950" dirty="0">
-                <a:solidFill>
-                  <a:srgbClr val="1C2120"/>
-                </a:solidFill>
-                <a:latin typeface="Calibri" pitchFamily="34" charset="0"/>
-                <a:ea typeface="Calibri" pitchFamily="34" charset="-122"/>
-                <a:cs typeface="Calibri" pitchFamily="34" charset="-120"/>
-              </a:rPr>
-              <a:t>FAO-56 soil water balance: θ_{t+1} = θ_t + (rain+irr)/rd − ET_c/rd</a:t>
-            </a:r>
-            <a:endParaRPr lang="en-US" sz="950" dirty="0"/>
-          </a:p>
-          <a:p>
-            <a:pPr marL="342900" indent="-342900">
-              <a:buSzPct val="100000"/>
-              <a:buChar char="•"/>
-            </a:pPr>
-            <a:r>
-              <a:rPr lang="en-US" sz="950" dirty="0">
-                <a:solidFill>
-                  <a:srgbClr val="1C2120"/>
-                </a:solidFill>
-                <a:latin typeface="Calibri" pitchFamily="34" charset="0"/>
-                <a:ea typeface="Calibri" pitchFamily="34" charset="-122"/>
-                <a:cs typeface="Calibri" pitchFamily="34" charset="-120"/>
-              </a:rPr>
-              <a:t>Radiation-Use Efficiency (RUE) crop growth model</a:t>
-            </a:r>
-            <a:endParaRPr lang="en-US" sz="950" dirty="0"/>
-          </a:p>
-          <a:p>
-            <a:pPr marL="342900" indent="-342900">
-              <a:buSzPct val="100000"/>
-              <a:buChar char="•"/>
-            </a:pPr>
-            <a:r>
-              <a:rPr lang="en-US" sz="950" dirty="0">
-                <a:solidFill>
-                  <a:srgbClr val="1C2120"/>
-                </a:solidFill>
-                <a:latin typeface="Calibri" pitchFamily="34" charset="0"/>
-                <a:ea typeface="Calibri" pitchFamily="34" charset="-122"/>
-                <a:cs typeface="Calibri" pitchFamily="34" charset="-120"/>
-              </a:rPr>
-              <a:t>Stochastic 2-state Markov weather + NASA POWER real data</a:t>
-            </a:r>
-            <a:endParaRPr lang="en-US" sz="950" dirty="0"/>
-          </a:p>
-          <a:p>
-            <a:pPr marL="342900" indent="-342900">
-              <a:buSzPct val="100000"/>
-              <a:buChar char="•"/>
-            </a:pPr>
-            <a:r>
-              <a:rPr lang="en-US" sz="950" dirty="0">
-                <a:solidFill>
-                  <a:srgbClr val="1C2120"/>
-                </a:solidFill>
-                <a:latin typeface="Calibri" pitchFamily="34" charset="0"/>
-                <a:ea typeface="Calibri" pitchFamily="34" charset="-122"/>
-                <a:cs typeface="Calibri" pitchFamily="34" charset="-120"/>
-              </a:rPr>
-              <a:t>Crop: Cotton (170 days growing season)</a:t>
-            </a:r>
-            <a:endParaRPr lang="en-US" sz="950" dirty="0"/>
-          </a:p>
-          <a:p>
-            <a:pPr marL="342900" indent="-342900">
-              <a:buSzPct val="100000"/>
-              <a:buChar char="•"/>
-            </a:pPr>
-            <a:r>
-              <a:rPr lang="en-US" sz="950" dirty="0">
-                <a:solidFill>
-                  <a:srgbClr val="1C2120"/>
-                </a:solidFill>
-                <a:latin typeface="Calibri" pitchFamily="34" charset="0"/>
-                <a:ea typeface="Calibri" pitchFamily="34" charset="-122"/>
-                <a:cs typeface="Calibri" pitchFamily="34" charset="-120"/>
-              </a:rPr>
-              <a:t>Water budgets: Generous (1500mm) / Moderate (400mm) / Scarce (250mm)</a:t>
-            </a:r>
-            <a:endParaRPr lang="en-US" sz="950" dirty="0"/>
-          </a:p>
-        </p:txBody>
-      </p:sp>
-      <p:sp>
-        <p:nvSpPr>
-          <p:cNvPr id="9" name="Shape 7"/>
-          <p:cNvSpPr/>
-          <p:nvPr/>
-        </p:nvSpPr>
-        <p:spPr>
-          <a:xfrm>
-            <a:off x="4754880" y="822960"/>
-            <a:ext cx="4251960" cy="1965960"/>
-          </a:xfrm>
-          <a:prstGeom prst="rect">
-            <a:avLst/>
-          </a:prstGeom>
-          <a:solidFill>
-            <a:srgbClr val="FFFFFF"/>
-          </a:solidFill>
-          <a:ln w="12700">
-            <a:solidFill>
-              <a:srgbClr val="CCCCCC"/>
-            </a:solidFill>
-            <a:prstDash val="solid"/>
-          </a:ln>
-        </p:spPr>
-        <p:txBody>
-          <a:bodyPr/>
-          <a:lstStyle/>
-          <a:p>
-            <a:endParaRPr lang="en-IN"/>
-          </a:p>
-        </p:txBody>
-      </p:sp>
-      <p:sp>
-        <p:nvSpPr>
-          <p:cNvPr id="10" name="Shape 8"/>
-          <p:cNvSpPr/>
-          <p:nvPr/>
-        </p:nvSpPr>
-        <p:spPr>
-          <a:xfrm>
-            <a:off x="4754880" y="822960"/>
-            <a:ext cx="4251960" cy="274320"/>
-          </a:xfrm>
-          <a:prstGeom prst="rect">
-            <a:avLst/>
-          </a:prstGeom>
-          <a:solidFill>
-            <a:srgbClr val="1F3864"/>
-          </a:solidFill>
-          <a:ln w="12700">
-            <a:solidFill>
-              <a:srgbClr val="1F3864"/>
-            </a:solidFill>
-            <a:prstDash val="solid"/>
-          </a:ln>
-        </p:spPr>
-        <p:txBody>
-          <a:bodyPr/>
-          <a:lstStyle/>
-          <a:p>
-            <a:endParaRPr lang="en-IN"/>
-          </a:p>
-        </p:txBody>
-      </p:sp>
-      <p:sp>
-        <p:nvSpPr>
-          <p:cNvPr id="11" name="Text 9"/>
-          <p:cNvSpPr/>
-          <p:nvPr/>
-        </p:nvSpPr>
-        <p:spPr>
-          <a:xfrm>
-            <a:off x="4754880" y="822960"/>
-            <a:ext cx="4251960" cy="274320"/>
-          </a:xfrm>
-          <a:prstGeom prst="rect">
-            <a:avLst/>
-          </a:prstGeom>
-          <a:noFill/>
-          <a:ln/>
-        </p:spPr>
-        <p:txBody>
-          <a:bodyPr wrap="square" lIns="0" tIns="0" rIns="0" bIns="0" rtlCol="0" anchor="ctr"/>
-          <a:lstStyle/>
-          <a:p>
-            <a:pPr marL="0" indent="0" algn="ctr">
-              <a:buNone/>
-            </a:pPr>
-            <a:r>
-              <a:rPr lang="en-US" sz="1100" b="1" dirty="0">
-                <a:solidFill>
-                  <a:srgbClr val="FFFFFF"/>
-                </a:solidFill>
-                <a:latin typeface="Calibri" pitchFamily="34" charset="0"/>
-                <a:ea typeface="Calibri" pitchFamily="34" charset="-122"/>
-                <a:cs typeface="Calibri" pitchFamily="34" charset="-120"/>
-              </a:rPr>
-              <a:t>Agent Training Pipeline</a:t>
-            </a:r>
-            <a:endParaRPr lang="en-US" sz="1100" dirty="0"/>
-          </a:p>
-        </p:txBody>
-      </p:sp>
-      <p:sp>
-        <p:nvSpPr>
-          <p:cNvPr id="12" name="Text 10"/>
-          <p:cNvSpPr/>
-          <p:nvPr/>
-        </p:nvSpPr>
-        <p:spPr>
-          <a:xfrm>
-            <a:off x="4864608" y="1124712"/>
-            <a:ext cx="4032504" cy="1600200"/>
-          </a:xfrm>
-          <a:prstGeom prst="rect">
-            <a:avLst/>
-          </a:prstGeom>
-          <a:noFill/>
-          <a:ln/>
-        </p:spPr>
-        <p:txBody>
-          <a:bodyPr wrap="square" rtlCol="0" anchor="t"/>
-          <a:lstStyle/>
-          <a:p>
-            <a:pPr marL="342900" indent="-342900">
-              <a:buSzPct val="100000"/>
-              <a:buChar char="•"/>
-            </a:pPr>
-            <a:r>
-              <a:rPr lang="en-US" sz="950" dirty="0">
-                <a:solidFill>
-                  <a:srgbClr val="1C2120"/>
-                </a:solidFill>
-                <a:latin typeface="Calibri" pitchFamily="34" charset="0"/>
-                <a:ea typeface="Calibri" pitchFamily="34" charset="-122"/>
-                <a:cs typeface="Calibri" pitchFamily="34" charset="-120"/>
-              </a:rPr>
-              <a:t>Sequence replay buffer stores (seq_t, a_t, r_t, seq_{t+1}, done)</a:t>
-            </a:r>
-            <a:endParaRPr lang="en-US" sz="950" dirty="0"/>
-          </a:p>
-          <a:p>
-            <a:pPr marL="342900" indent="-342900">
-              <a:buSzPct val="100000"/>
-              <a:buChar char="•"/>
-            </a:pPr>
-            <a:r>
-              <a:rPr lang="en-US" sz="950" dirty="0">
-                <a:solidFill>
-                  <a:srgbClr val="1C2120"/>
-                </a:solidFill>
-                <a:latin typeface="Calibri" pitchFamily="34" charset="0"/>
-                <a:ea typeface="Calibri" pitchFamily="34" charset="-122"/>
-                <a:cs typeface="Calibri" pitchFamily="34" charset="-120"/>
-              </a:rPr>
-              <a:t>Batch size: 64, warm-up: 1000 steps before first update</a:t>
-            </a:r>
-            <a:endParaRPr lang="en-US" sz="950" dirty="0"/>
-          </a:p>
-          <a:p>
-            <a:pPr marL="342900" indent="-342900">
-              <a:buSzPct val="100000"/>
-              <a:buChar char="•"/>
-            </a:pPr>
-            <a:r>
-              <a:rPr lang="en-US" sz="950" dirty="0">
-                <a:solidFill>
-                  <a:srgbClr val="1C2120"/>
-                </a:solidFill>
-                <a:latin typeface="Calibri" pitchFamily="34" charset="0"/>
-                <a:ea typeface="Calibri" pitchFamily="34" charset="-122"/>
-                <a:cs typeface="Calibri" pitchFamily="34" charset="-120"/>
-              </a:rPr>
-              <a:t>Soft target update: τ=0.005 every step</a:t>
-            </a:r>
-            <a:endParaRPr lang="en-US" sz="950" dirty="0"/>
-          </a:p>
-          <a:p>
-            <a:pPr marL="342900" indent="-342900">
-              <a:buSzPct val="100000"/>
-              <a:buChar char="•"/>
-            </a:pPr>
-            <a:r>
-              <a:rPr lang="en-US" sz="950" dirty="0">
-                <a:solidFill>
-                  <a:srgbClr val="1C2120"/>
-                </a:solidFill>
-                <a:latin typeface="Calibri" pitchFamily="34" charset="0"/>
-                <a:ea typeface="Calibri" pitchFamily="34" charset="-122"/>
-                <a:cs typeface="Calibri" pitchFamily="34" charset="-120"/>
-              </a:rPr>
-              <a:t>Gradient clipping: max_norm=1.0 on actor and critics</a:t>
-            </a:r>
-            <a:endParaRPr lang="en-US" sz="950" dirty="0"/>
-          </a:p>
-          <a:p>
-            <a:pPr marL="342900" indent="-342900">
-              <a:buSzPct val="100000"/>
-              <a:buChar char="•"/>
-            </a:pPr>
-            <a:r>
-              <a:rPr lang="en-US" sz="950" dirty="0">
-                <a:solidFill>
-                  <a:srgbClr val="1C2120"/>
-                </a:solidFill>
-                <a:latin typeface="Calibri" pitchFamily="34" charset="0"/>
-                <a:ea typeface="Calibri" pitchFamily="34" charset="-122"/>
-                <a:cs typeface="Calibri" pitchFamily="34" charset="-120"/>
-              </a:rPr>
-              <a:t>AMP (float16) with GradScaler for memory efficiency</a:t>
-            </a:r>
-            <a:endParaRPr lang="en-US" sz="950" dirty="0"/>
-          </a:p>
-          <a:p>
-            <a:pPr marL="342900" indent="-342900">
-              <a:buSzPct val="100000"/>
-              <a:buChar char="•"/>
-            </a:pPr>
-            <a:r>
-              <a:rPr lang="en-US" sz="950" dirty="0">
-                <a:solidFill>
-                  <a:srgbClr val="1C2120"/>
-                </a:solidFill>
-                <a:latin typeface="Calibri" pitchFamily="34" charset="0"/>
-                <a:ea typeface="Calibri" pitchFamily="34" charset="-122"/>
-                <a:cs typeface="Calibri" pitchFamily="34" charset="-120"/>
-              </a:rPr>
-              <a:t>Transfer learning: freeze encoder for N epochs → unfreeze</a:t>
-            </a:r>
-            <a:endParaRPr lang="en-US" sz="950" dirty="0"/>
-          </a:p>
-        </p:txBody>
-      </p:sp>
-      <p:sp>
-        <p:nvSpPr>
-          <p:cNvPr id="13" name="Shape 11"/>
-          <p:cNvSpPr/>
-          <p:nvPr/>
-        </p:nvSpPr>
-        <p:spPr>
-          <a:xfrm>
-            <a:off x="274320" y="2971800"/>
-            <a:ext cx="4251960" cy="1965960"/>
-          </a:xfrm>
-          <a:prstGeom prst="rect">
-            <a:avLst/>
-          </a:prstGeom>
-          <a:solidFill>
-            <a:srgbClr val="FFFFFF"/>
-          </a:solidFill>
-          <a:ln w="12700">
-            <a:solidFill>
-              <a:srgbClr val="CCCCCC"/>
-            </a:solidFill>
-            <a:prstDash val="solid"/>
-          </a:ln>
-        </p:spPr>
-        <p:txBody>
-          <a:bodyPr/>
-          <a:lstStyle/>
-          <a:p>
-            <a:endParaRPr lang="en-IN"/>
-          </a:p>
-        </p:txBody>
-      </p:sp>
-      <p:sp>
-        <p:nvSpPr>
-          <p:cNvPr id="14" name="Shape 12"/>
-          <p:cNvSpPr/>
-          <p:nvPr/>
-        </p:nvSpPr>
-        <p:spPr>
-          <a:xfrm>
-            <a:off x="274320" y="2971800"/>
-            <a:ext cx="4251960" cy="274320"/>
-          </a:xfrm>
-          <a:prstGeom prst="rect">
-            <a:avLst/>
-          </a:prstGeom>
-          <a:solidFill>
-            <a:srgbClr val="006B6B"/>
-          </a:solidFill>
-          <a:ln w="12700">
-            <a:solidFill>
-              <a:srgbClr val="006B6B"/>
-            </a:solidFill>
-            <a:prstDash val="solid"/>
-          </a:ln>
-        </p:spPr>
-        <p:txBody>
-          <a:bodyPr/>
-          <a:lstStyle/>
-          <a:p>
-            <a:endParaRPr lang="en-IN"/>
-          </a:p>
-        </p:txBody>
-      </p:sp>
-      <p:sp>
-        <p:nvSpPr>
-          <p:cNvPr id="15" name="Text 13"/>
-          <p:cNvSpPr/>
-          <p:nvPr/>
-        </p:nvSpPr>
-        <p:spPr>
-          <a:xfrm>
-            <a:off x="274320" y="2971800"/>
-            <a:ext cx="4251960" cy="274320"/>
-          </a:xfrm>
-          <a:prstGeom prst="rect">
-            <a:avLst/>
-          </a:prstGeom>
-          <a:noFill/>
-          <a:ln/>
-        </p:spPr>
-        <p:txBody>
-          <a:bodyPr wrap="square" lIns="0" tIns="0" rIns="0" bIns="0" rtlCol="0" anchor="ctr"/>
-          <a:lstStyle/>
-          <a:p>
-            <a:pPr marL="0" indent="0" algn="ctr">
-              <a:buNone/>
-            </a:pPr>
-            <a:r>
-              <a:rPr lang="en-US" sz="1100" b="1" dirty="0">
-                <a:solidFill>
-                  <a:srgbClr val="FFFFFF"/>
-                </a:solidFill>
-                <a:latin typeface="Calibri" pitchFamily="34" charset="0"/>
-                <a:ea typeface="Calibri" pitchFamily="34" charset="-122"/>
-                <a:cs typeface="Calibri" pitchFamily="34" charset="-120"/>
-              </a:rPr>
-              <a:t>Baselines Implemented</a:t>
-            </a:r>
-            <a:endParaRPr lang="en-US" sz="1100" dirty="0"/>
-          </a:p>
-        </p:txBody>
-      </p:sp>
-      <p:sp>
-        <p:nvSpPr>
-          <p:cNvPr id="16" name="Text 14"/>
-          <p:cNvSpPr/>
-          <p:nvPr/>
-        </p:nvSpPr>
-        <p:spPr>
-          <a:xfrm>
-            <a:off x="384048" y="3273552"/>
-            <a:ext cx="4032504" cy="1600200"/>
-          </a:xfrm>
-          <a:prstGeom prst="rect">
-            <a:avLst/>
-          </a:prstGeom>
-          <a:noFill/>
-          <a:ln/>
-        </p:spPr>
-        <p:txBody>
-          <a:bodyPr wrap="square" rtlCol="0" anchor="t"/>
-          <a:lstStyle/>
-          <a:p>
-            <a:pPr marL="342900" indent="-342900">
-              <a:buSzPct val="100000"/>
-              <a:buChar char="•"/>
-            </a:pPr>
-            <a:r>
-              <a:rPr lang="en-US" sz="950" dirty="0">
-                <a:solidFill>
-                  <a:srgbClr val="1C2120"/>
-                </a:solidFill>
-                <a:latin typeface="Calibri" pitchFamily="34" charset="0"/>
-                <a:ea typeface="Calibri" pitchFamily="34" charset="-122"/>
-                <a:cs typeface="Calibri" pitchFamily="34" charset="-120"/>
-              </a:rPr>
-              <a:t>Random: uniform sample ∈ [0, 60]</a:t>
-            </a:r>
-            <a:endParaRPr lang="en-US" sz="950" dirty="0"/>
-          </a:p>
-          <a:p>
-            <a:pPr marL="342900" indent="-342900">
-              <a:buSzPct val="100000"/>
-              <a:buChar char="•"/>
-            </a:pPr>
-            <a:r>
-              <a:rPr lang="en-US" sz="950" dirty="0">
-                <a:solidFill>
-                  <a:srgbClr val="1C2120"/>
-                </a:solidFill>
-                <a:latin typeface="Calibri" pitchFamily="34" charset="0"/>
-                <a:ea typeface="Calibri" pitchFamily="34" charset="-122"/>
-                <a:cs typeface="Calibri" pitchFamily="34" charset="-120"/>
-              </a:rPr>
-              <a:t>Farmer (10-day fixed): 10mm every 10 days</a:t>
-            </a:r>
-            <a:endParaRPr lang="en-US" sz="950" dirty="0"/>
-          </a:p>
-          <a:p>
-            <a:pPr marL="342900" indent="-342900">
-              <a:buSzPct val="100000"/>
-              <a:buChar char="•"/>
-            </a:pPr>
-            <a:r>
-              <a:rPr lang="en-US" sz="950" dirty="0">
-                <a:solidFill>
-                  <a:srgbClr val="1C2120"/>
-                </a:solidFill>
-                <a:latin typeface="Calibri" pitchFamily="34" charset="0"/>
-                <a:ea typeface="Calibri" pitchFamily="34" charset="-122"/>
-                <a:cs typeface="Calibri" pitchFamily="34" charset="-120"/>
-              </a:rPr>
-              <a:t>Threshold (0.45): irrigate to FC when θ &lt; 0.45</a:t>
-            </a:r>
-            <a:endParaRPr lang="en-US" sz="950" dirty="0"/>
-          </a:p>
-          <a:p>
-            <a:pPr marL="342900" indent="-342900">
-              <a:buSzPct val="100000"/>
-              <a:buChar char="•"/>
-            </a:pPr>
-            <a:r>
-              <a:rPr lang="en-US" sz="950" dirty="0">
-                <a:solidFill>
-                  <a:srgbClr val="1C2120"/>
-                </a:solidFill>
-                <a:latin typeface="Calibri" pitchFamily="34" charset="0"/>
-                <a:ea typeface="Calibri" pitchFamily="34" charset="-122"/>
-                <a:cs typeface="Calibri" pitchFamily="34" charset="-120"/>
-              </a:rPr>
-              <a:t>FarmerExpert: stage-aware fixed schedule</a:t>
-            </a:r>
-            <a:endParaRPr lang="en-US" sz="950" dirty="0"/>
-          </a:p>
-          <a:p>
-            <a:pPr marL="342900" indent="-342900">
-              <a:buSzPct val="100000"/>
-              <a:buChar char="•"/>
-            </a:pPr>
-            <a:r>
-              <a:rPr lang="en-US" sz="950" dirty="0">
-                <a:solidFill>
-                  <a:srgbClr val="1C2120"/>
-                </a:solidFill>
-                <a:latin typeface="Calibri" pitchFamily="34" charset="0"/>
-                <a:ea typeface="Calibri" pitchFamily="34" charset="-122"/>
-                <a:cs typeface="Calibri" pitchFamily="34" charset="-120"/>
-              </a:rPr>
-              <a:t>PPO-MLP: on-policy, flat state (no LSTM)</a:t>
-            </a:r>
-            <a:endParaRPr lang="en-US" sz="950" dirty="0"/>
-          </a:p>
-          <a:p>
-            <a:pPr marL="342900" indent="-342900">
-              <a:buSzPct val="100000"/>
-              <a:buChar char="•"/>
-            </a:pPr>
-            <a:r>
-              <a:rPr lang="en-US" sz="950" dirty="0">
-                <a:solidFill>
-                  <a:srgbClr val="1C2120"/>
-                </a:solidFill>
-                <a:latin typeface="Calibri" pitchFamily="34" charset="0"/>
-                <a:ea typeface="Calibri" pitchFamily="34" charset="-122"/>
-                <a:cs typeface="Calibri" pitchFamily="34" charset="-120"/>
-              </a:rPr>
-              <a:t>DDPG-MLP: off-policy, flat state (no LSTM)</a:t>
-            </a:r>
-            <a:endParaRPr lang="en-US" sz="950" dirty="0"/>
-          </a:p>
-        </p:txBody>
-      </p:sp>
-      <p:sp>
-        <p:nvSpPr>
-          <p:cNvPr id="17" name="Shape 15"/>
-          <p:cNvSpPr/>
-          <p:nvPr/>
-        </p:nvSpPr>
-        <p:spPr>
-          <a:xfrm>
-            <a:off x="4754880" y="2971800"/>
-            <a:ext cx="4251960" cy="1965960"/>
-          </a:xfrm>
-          <a:prstGeom prst="rect">
-            <a:avLst/>
-          </a:prstGeom>
-          <a:solidFill>
-            <a:srgbClr val="FFFFFF"/>
-          </a:solidFill>
-          <a:ln w="12700">
-            <a:solidFill>
-              <a:srgbClr val="CCCCCC"/>
-            </a:solidFill>
-            <a:prstDash val="solid"/>
-          </a:ln>
-        </p:spPr>
-        <p:txBody>
-          <a:bodyPr/>
-          <a:lstStyle/>
-          <a:p>
-            <a:endParaRPr lang="en-IN"/>
-          </a:p>
-        </p:txBody>
-      </p:sp>
-      <p:sp>
-        <p:nvSpPr>
-          <p:cNvPr id="18" name="Shape 16"/>
-          <p:cNvSpPr/>
-          <p:nvPr/>
-        </p:nvSpPr>
-        <p:spPr>
-          <a:xfrm>
-            <a:off x="4754880" y="2971800"/>
-            <a:ext cx="4251960" cy="274320"/>
-          </a:xfrm>
-          <a:prstGeom prst="rect">
-            <a:avLst/>
-          </a:prstGeom>
-          <a:solidFill>
-            <a:srgbClr val="C00000"/>
-          </a:solidFill>
-          <a:ln w="12700">
-            <a:solidFill>
-              <a:srgbClr val="C00000"/>
-            </a:solidFill>
-            <a:prstDash val="solid"/>
-          </a:ln>
-        </p:spPr>
-        <p:txBody>
-          <a:bodyPr/>
-          <a:lstStyle/>
-          <a:p>
-            <a:endParaRPr lang="en-IN"/>
-          </a:p>
-        </p:txBody>
-      </p:sp>
-      <p:sp>
-        <p:nvSpPr>
-          <p:cNvPr id="19" name="Text 17"/>
-          <p:cNvSpPr/>
-          <p:nvPr/>
-        </p:nvSpPr>
-        <p:spPr>
-          <a:xfrm>
-            <a:off x="4754880" y="2971800"/>
-            <a:ext cx="4251960" cy="274320"/>
-          </a:xfrm>
-          <a:prstGeom prst="rect">
-            <a:avLst/>
-          </a:prstGeom>
-          <a:noFill/>
-          <a:ln/>
-        </p:spPr>
-        <p:txBody>
-          <a:bodyPr wrap="square" lIns="0" tIns="0" rIns="0" bIns="0" rtlCol="0" anchor="ctr"/>
-          <a:lstStyle/>
-          <a:p>
-            <a:pPr marL="0" indent="0" algn="ctr">
-              <a:buNone/>
-            </a:pPr>
-            <a:r>
-              <a:rPr lang="en-US" sz="1100" b="1" dirty="0">
-                <a:solidFill>
-                  <a:srgbClr val="FFFFFF"/>
-                </a:solidFill>
-                <a:latin typeface="Calibri" pitchFamily="34" charset="0"/>
-                <a:ea typeface="Calibri" pitchFamily="34" charset="-122"/>
-                <a:cs typeface="Calibri" pitchFamily="34" charset="-120"/>
-              </a:rPr>
-              <a:t>Key Libraries &amp; Tools</a:t>
-            </a:r>
-            <a:endParaRPr lang="en-US" sz="1100" dirty="0"/>
-          </a:p>
-        </p:txBody>
-      </p:sp>
-      <p:sp>
-        <p:nvSpPr>
-          <p:cNvPr id="20" name="Text 18"/>
-          <p:cNvSpPr/>
-          <p:nvPr/>
-        </p:nvSpPr>
-        <p:spPr>
-          <a:xfrm>
-            <a:off x="4864608" y="3273552"/>
-            <a:ext cx="4032504" cy="1600200"/>
-          </a:xfrm>
-          <a:prstGeom prst="rect">
-            <a:avLst/>
-          </a:prstGeom>
-          <a:noFill/>
-          <a:ln/>
-        </p:spPr>
-        <p:txBody>
-          <a:bodyPr wrap="square" rtlCol="0" anchor="t"/>
-          <a:lstStyle/>
-          <a:p>
-            <a:pPr marL="342900" indent="-342900">
-              <a:buSzPct val="100000"/>
-              <a:buChar char="•"/>
-            </a:pPr>
-            <a:r>
-              <a:rPr lang="en-US" sz="950" dirty="0">
-                <a:solidFill>
-                  <a:srgbClr val="1C2120"/>
-                </a:solidFill>
-                <a:latin typeface="Calibri" pitchFamily="34" charset="0"/>
-                <a:ea typeface="Calibri" pitchFamily="34" charset="-122"/>
-                <a:cs typeface="Calibri" pitchFamily="34" charset="-120"/>
-              </a:rPr>
-              <a:t>Python 3.10, PyTorch 2.x, Gymnasium 0.29</a:t>
-            </a:r>
-            <a:endParaRPr lang="en-US" sz="950" dirty="0"/>
-          </a:p>
-          <a:p>
-            <a:pPr marL="342900" indent="-342900">
-              <a:buSzPct val="100000"/>
-              <a:buChar char="•"/>
-            </a:pPr>
-            <a:r>
-              <a:rPr lang="en-US" sz="950" dirty="0">
-                <a:solidFill>
-                  <a:srgbClr val="1C2120"/>
-                </a:solidFill>
-                <a:latin typeface="Calibri" pitchFamily="34" charset="0"/>
-                <a:ea typeface="Calibri" pitchFamily="34" charset="-122"/>
-                <a:cs typeface="Calibri" pitchFamily="34" charset="-120"/>
-              </a:rPr>
-              <a:t>NumPy, Pandas, Matplotlib for data/viz</a:t>
-            </a:r>
-            <a:endParaRPr lang="en-US" sz="950" dirty="0"/>
-          </a:p>
-          <a:p>
-            <a:pPr marL="342900" indent="-342900">
-              <a:buSzPct val="100000"/>
-              <a:buChar char="•"/>
-            </a:pPr>
-            <a:r>
-              <a:rPr lang="en-US" sz="950" dirty="0">
-                <a:solidFill>
-                  <a:srgbClr val="1C2120"/>
-                </a:solidFill>
-                <a:latin typeface="Calibri" pitchFamily="34" charset="0"/>
-                <a:ea typeface="Calibri" pitchFamily="34" charset="-122"/>
-                <a:cs typeface="Calibri" pitchFamily="34" charset="-120"/>
-              </a:rPr>
-              <a:t>Checkpoints saved as .pt files (actor+critics+encoder)</a:t>
-            </a:r>
-            <a:endParaRPr lang="en-US" sz="950" dirty="0"/>
-          </a:p>
-          <a:p>
-            <a:pPr marL="342900" indent="-342900">
-              <a:buSzPct val="100000"/>
-              <a:buChar char="•"/>
-            </a:pPr>
-            <a:r>
-              <a:rPr lang="en-US" sz="950" dirty="0">
-                <a:solidFill>
-                  <a:srgbClr val="1C2120"/>
-                </a:solidFill>
-                <a:latin typeface="Calibri" pitchFamily="34" charset="0"/>
-                <a:ea typeface="Calibri" pitchFamily="34" charset="-122"/>
-                <a:cs typeface="Calibri" pitchFamily="34" charset="-120"/>
-              </a:rPr>
-              <a:t>Results logged as JSON: episode, reward, profit, IWUE</a:t>
-            </a:r>
-            <a:endParaRPr lang="en-US" sz="950" dirty="0"/>
-          </a:p>
-          <a:p>
-            <a:pPr marL="342900" indent="-342900">
-              <a:buSzPct val="100000"/>
-              <a:buChar char="•"/>
-            </a:pPr>
-            <a:r>
-              <a:rPr lang="en-US" sz="950" dirty="0">
-                <a:solidFill>
-                  <a:srgbClr val="1C2120"/>
-                </a:solidFill>
-                <a:latin typeface="Calibri" pitchFamily="34" charset="0"/>
-                <a:ea typeface="Calibri" pitchFamily="34" charset="-122"/>
-                <a:cs typeface="Calibri" pitchFamily="34" charset="-120"/>
-              </a:rPr>
-              <a:t>Visualize.py generates training curves + ablation plots</a:t>
-            </a:r>
-            <a:endParaRPr lang="en-US" sz="950" dirty="0"/>
-          </a:p>
-          <a:p>
-            <a:pPr marL="342900" indent="-342900">
-              <a:buSzPct val="100000"/>
-              <a:buChar char="•"/>
-            </a:pPr>
-            <a:r>
-              <a:rPr lang="en-US" sz="950" dirty="0">
-                <a:solidFill>
-                  <a:srgbClr val="1C2120"/>
-                </a:solidFill>
-                <a:latin typeface="Calibri" pitchFamily="34" charset="0"/>
-                <a:ea typeface="Calibri" pitchFamily="34" charset="-122"/>
-                <a:cs typeface="Calibri" pitchFamily="34" charset="-120"/>
-              </a:rPr>
-              <a:t>demo_app.py for interactive policy demonstration</a:t>
-            </a:r>
-            <a:endParaRPr lang="en-US" sz="950" dirty="0"/>
-          </a:p>
-        </p:txBody>
-      </p:sp>
-    </p:spTree>
-  </p:cSld>
-  <p:clrMapOvr>
-    <a:masterClrMapping/>
-  </p:clrMapOvr>
-</p:sld>
-</file>
-
-<file path=ppt/slides/slide11.xml><?xml version="1.0" encoding="utf-8"?>
 <p:sld xmlns:a="http://schemas.openxmlformats.org/drawingml/2006/main" xmlns:r="http://schemas.openxmlformats.org/officeDocument/2006/relationships" xmlns:p="http://schemas.openxmlformats.org/presentationml/2006/main">
   <p:cSld name="Slide 11">
     <p:bg>
@@ -8260,7 +7122,7 @@
 </p:sld>
 </file>
 
-<file path=ppt/slides/slide12.xml><?xml version="1.0" encoding="utf-8"?>
+<file path=ppt/slides/slide11.xml><?xml version="1.0" encoding="utf-8"?>
 <p:sld xmlns:a="http://schemas.openxmlformats.org/drawingml/2006/main" xmlns:r="http://schemas.openxmlformats.org/officeDocument/2006/relationships" xmlns:p="http://schemas.openxmlformats.org/presentationml/2006/main">
   <p:cSld name="Slide 12">
     <p:bg>
@@ -8528,10 +7390,17 @@
   <p:clrMapOvr>
     <a:masterClrMapping/>
   </p:clrMapOvr>
+  <p:timing>
+    <p:tnLst>
+      <p:par>
+        <p:cTn id="1" dur="indefinite" restart="never" nodeType="tmRoot"/>
+      </p:par>
+    </p:tnLst>
+  </p:timing>
 </p:sld>
 </file>
 
-<file path=ppt/slides/slide13.xml><?xml version="1.0" encoding="utf-8"?>
+<file path=ppt/slides/slide12.xml><?xml version="1.0" encoding="utf-8"?>
 <p:sld xmlns:a="http://schemas.openxmlformats.org/drawingml/2006/main" xmlns:r="http://schemas.openxmlformats.org/officeDocument/2006/relationships" xmlns:p="http://schemas.openxmlformats.org/presentationml/2006/main">
   <p:cSld>
     <p:bg>
@@ -8744,7 +7613,7 @@
 </p:sld>
 </file>
 
-<file path=ppt/slides/slide14.xml><?xml version="1.0" encoding="utf-8"?>
+<file path=ppt/slides/slide13.xml><?xml version="1.0" encoding="utf-8"?>
 <p:sld xmlns:a="http://schemas.openxmlformats.org/drawingml/2006/main" xmlns:r="http://schemas.openxmlformats.org/officeDocument/2006/relationships" xmlns:p="http://schemas.openxmlformats.org/presentationml/2006/main">
   <p:cSld name="Slide 13">
     <p:bg>
@@ -12099,7 +10968,7 @@
 </p:sld>
 </file>
 
-<file path=ppt/slides/slide15.xml><?xml version="1.0" encoding="utf-8"?>
+<file path=ppt/slides/slide14.xml><?xml version="1.0" encoding="utf-8"?>
 <p:sld xmlns:a="http://schemas.openxmlformats.org/drawingml/2006/main" xmlns:r="http://schemas.openxmlformats.org/officeDocument/2006/relationships" xmlns:p="http://schemas.openxmlformats.org/presentationml/2006/main">
   <p:cSld>
     <p:bg>
@@ -15443,10 +14312,17 @@
   <p:clrMapOvr>
     <a:masterClrMapping/>
   </p:clrMapOvr>
+  <p:timing>
+    <p:tnLst>
+      <p:par>
+        <p:cTn id="1" dur="indefinite" restart="never" nodeType="tmRoot"/>
+      </p:par>
+    </p:tnLst>
+  </p:timing>
 </p:sld>
 </file>
 
-<file path=ppt/slides/slide16.xml><?xml version="1.0" encoding="utf-8"?>
+<file path=ppt/slides/slide15.xml><?xml version="1.0" encoding="utf-8"?>
 <p:sld xmlns:a="http://schemas.openxmlformats.org/drawingml/2006/main" xmlns:r="http://schemas.openxmlformats.org/officeDocument/2006/relationships" xmlns:p="http://schemas.openxmlformats.org/presentationml/2006/main">
   <p:cSld name="Slide 14">
     <p:bg>
@@ -18186,7 +17062,7 @@
 </p:sld>
 </file>
 
-<file path=ppt/slides/slide17.xml><?xml version="1.0" encoding="utf-8"?>
+<file path=ppt/slides/slide16.xml><?xml version="1.0" encoding="utf-8"?>
 <p:sld xmlns:a="http://schemas.openxmlformats.org/drawingml/2006/main" xmlns:r="http://schemas.openxmlformats.org/officeDocument/2006/relationships" xmlns:p="http://schemas.openxmlformats.org/presentationml/2006/main">
   <p:cSld>
     <p:bg>
@@ -19190,10 +18066,17 @@
   <p:clrMapOvr>
     <a:masterClrMapping/>
   </p:clrMapOvr>
+  <p:timing>
+    <p:tnLst>
+      <p:par>
+        <p:cTn id="1" dur="indefinite" restart="never" nodeType="tmRoot"/>
+      </p:par>
+    </p:tnLst>
+  </p:timing>
 </p:sld>
 </file>
 
-<file path=ppt/slides/slide18.xml><?xml version="1.0" encoding="utf-8"?>
+<file path=ppt/slides/slide17.xml><?xml version="1.0" encoding="utf-8"?>
 <p:sld xmlns:a="http://schemas.openxmlformats.org/drawingml/2006/main" xmlns:r="http://schemas.openxmlformats.org/officeDocument/2006/relationships" xmlns:p="http://schemas.openxmlformats.org/presentationml/2006/main">
   <p:cSld name="Slide 15">
     <p:bg>
@@ -20469,7 +19352,7 @@
 </p:sld>
 </file>
 
-<file path=ppt/slides/slide19.xml><?xml version="1.0" encoding="utf-8"?>
+<file path=ppt/slides/slide18.xml><?xml version="1.0" encoding="utf-8"?>
 <p:sld xmlns:a="http://schemas.openxmlformats.org/drawingml/2006/main" xmlns:r="http://schemas.openxmlformats.org/officeDocument/2006/relationships" xmlns:p="http://schemas.openxmlformats.org/presentationml/2006/main">
   <p:cSld name="Slide 16">
     <p:bg>
@@ -21170,6 +20053,1340 @@
   <p:clrMapOvr>
     <a:masterClrMapping/>
   </p:clrMapOvr>
+  <p:timing>
+    <p:tnLst>
+      <p:par>
+        <p:cTn id="1" dur="indefinite" restart="never" nodeType="tmRoot"/>
+      </p:par>
+    </p:tnLst>
+  </p:timing>
+</p:sld>
+</file>
+
+<file path=ppt/slides/slide19.xml><?xml version="1.0" encoding="utf-8"?>
+<p:sld xmlns:a="http://schemas.openxmlformats.org/drawingml/2006/main" xmlns:r="http://schemas.openxmlformats.org/officeDocument/2006/relationships" xmlns:p="http://schemas.openxmlformats.org/presentationml/2006/main">
+  <p:cSld name="Slide 17">
+    <p:bg>
+      <p:bgPr>
+        <a:solidFill>
+          <a:srgbClr val="FFFFFF"/>
+        </a:solidFill>
+        <a:effectLst/>
+      </p:bgPr>
+    </p:bg>
+    <p:spTree>
+      <p:nvGrpSpPr>
+        <p:cNvPr id="1" name=""/>
+        <p:cNvGrpSpPr/>
+        <p:nvPr/>
+      </p:nvGrpSpPr>
+      <p:grpSpPr>
+        <a:xfrm>
+          <a:off x="0" y="0"/>
+          <a:ext cx="0" cy="0"/>
+          <a:chOff x="0" y="0"/>
+          <a:chExt cx="0" cy="0"/>
+        </a:xfrm>
+      </p:grpSpPr>
+      <p:sp>
+        <p:nvSpPr>
+          <p:cNvPr id="2" name="Shape 0"/>
+          <p:cNvSpPr/>
+          <p:nvPr/>
+        </p:nvSpPr>
+        <p:spPr>
+          <a:xfrm>
+            <a:off x="0" y="0"/>
+            <a:ext cx="9144000" cy="658368"/>
+          </a:xfrm>
+          <a:prstGeom prst="rect">
+            <a:avLst/>
+          </a:prstGeom>
+          <a:solidFill>
+            <a:srgbClr val="1F3864"/>
+          </a:solidFill>
+          <a:ln w="12700">
+            <a:solidFill>
+              <a:srgbClr val="1F3864"/>
+            </a:solidFill>
+            <a:prstDash val="solid"/>
+          </a:ln>
+        </p:spPr>
+        <p:txBody>
+          <a:bodyPr/>
+          <a:lstStyle/>
+          <a:p>
+            <a:endParaRPr lang="en-IN"/>
+          </a:p>
+        </p:txBody>
+      </p:sp>
+      <p:sp>
+        <p:nvSpPr>
+          <p:cNvPr id="3" name="Text 1"/>
+          <p:cNvSpPr/>
+          <p:nvPr/>
+        </p:nvSpPr>
+        <p:spPr>
+          <a:xfrm>
+            <a:off x="320040" y="0"/>
+            <a:ext cx="8503920" cy="658368"/>
+          </a:xfrm>
+          <a:prstGeom prst="rect">
+            <a:avLst/>
+          </a:prstGeom>
+          <a:noFill/>
+          <a:ln/>
+        </p:spPr>
+        <p:txBody>
+          <a:bodyPr wrap="square" lIns="0" tIns="0" rIns="0" bIns="0" rtlCol="0" anchor="ctr"/>
+          <a:lstStyle/>
+          <a:p>
+            <a:pPr marL="0" indent="0">
+              <a:buNone/>
+            </a:pPr>
+            <a:r>
+              <a:rPr lang="en-US" sz="2200" b="1" dirty="0">
+                <a:solidFill>
+                  <a:srgbClr val="FFFFFF"/>
+                </a:solidFill>
+                <a:latin typeface="Garamond" pitchFamily="34" charset="0"/>
+                <a:ea typeface="Garamond" pitchFamily="34" charset="-122"/>
+                <a:cs typeface="Garamond" pitchFamily="34" charset="-120"/>
+              </a:rPr>
+              <a:t>Conclusion &amp; Future Scope</a:t>
+            </a:r>
+            <a:endParaRPr lang="en-US" sz="2200" dirty="0"/>
+          </a:p>
+        </p:txBody>
+      </p:sp>
+      <p:sp>
+        <p:nvSpPr>
+          <p:cNvPr id="4" name="Shape 2"/>
+          <p:cNvSpPr/>
+          <p:nvPr/>
+        </p:nvSpPr>
+        <p:spPr>
+          <a:xfrm>
+            <a:off x="0" y="658368"/>
+            <a:ext cx="9144000" cy="50292"/>
+          </a:xfrm>
+          <a:prstGeom prst="rect">
+            <a:avLst/>
+          </a:prstGeom>
+          <a:solidFill>
+            <a:srgbClr val="C00000"/>
+          </a:solidFill>
+          <a:ln w="12700">
+            <a:solidFill>
+              <a:srgbClr val="C00000"/>
+            </a:solidFill>
+            <a:prstDash val="solid"/>
+          </a:ln>
+        </p:spPr>
+        <p:txBody>
+          <a:bodyPr/>
+          <a:lstStyle/>
+          <a:p>
+            <a:endParaRPr lang="en-IN"/>
+          </a:p>
+        </p:txBody>
+      </p:sp>
+      <p:sp>
+        <p:nvSpPr>
+          <p:cNvPr id="5" name="Shape 3"/>
+          <p:cNvSpPr/>
+          <p:nvPr/>
+        </p:nvSpPr>
+        <p:spPr>
+          <a:xfrm>
+            <a:off x="274320" y="804672"/>
+            <a:ext cx="4114800" cy="256032"/>
+          </a:xfrm>
+          <a:prstGeom prst="rect">
+            <a:avLst/>
+          </a:prstGeom>
+          <a:solidFill>
+            <a:srgbClr val="C00000"/>
+          </a:solidFill>
+          <a:ln w="12700">
+            <a:solidFill>
+              <a:srgbClr val="C00000"/>
+            </a:solidFill>
+            <a:prstDash val="solid"/>
+          </a:ln>
+        </p:spPr>
+        <p:txBody>
+          <a:bodyPr/>
+          <a:lstStyle/>
+          <a:p>
+            <a:endParaRPr lang="en-IN"/>
+          </a:p>
+        </p:txBody>
+      </p:sp>
+      <p:sp>
+        <p:nvSpPr>
+          <p:cNvPr id="6" name="Text 4"/>
+          <p:cNvSpPr/>
+          <p:nvPr/>
+        </p:nvSpPr>
+        <p:spPr>
+          <a:xfrm>
+            <a:off x="274320" y="804672"/>
+            <a:ext cx="4114800" cy="256032"/>
+          </a:xfrm>
+          <a:prstGeom prst="rect">
+            <a:avLst/>
+          </a:prstGeom>
+          <a:noFill/>
+          <a:ln/>
+        </p:spPr>
+        <p:txBody>
+          <a:bodyPr wrap="square" lIns="0" tIns="0" rIns="0" bIns="0" rtlCol="0" anchor="ctr"/>
+          <a:lstStyle/>
+          <a:p>
+            <a:pPr marL="0" indent="0" algn="ctr">
+              <a:buNone/>
+            </a:pPr>
+            <a:r>
+              <a:rPr lang="en-US" sz="1000" b="1" dirty="0">
+                <a:solidFill>
+                  <a:srgbClr val="FFFFFF"/>
+                </a:solidFill>
+                <a:latin typeface="Calibri" pitchFamily="34" charset="0"/>
+                <a:ea typeface="Calibri" pitchFamily="34" charset="-122"/>
+                <a:cs typeface="Calibri" pitchFamily="34" charset="-120"/>
+              </a:rPr>
+              <a:t>CONCLUSIONS</a:t>
+            </a:r>
+            <a:endParaRPr lang="en-US" sz="1000" dirty="0"/>
+          </a:p>
+        </p:txBody>
+      </p:sp>
+      <p:sp>
+        <p:nvSpPr>
+          <p:cNvPr id="7" name="Text 5"/>
+          <p:cNvSpPr/>
+          <p:nvPr/>
+        </p:nvSpPr>
+        <p:spPr>
+          <a:xfrm>
+            <a:off x="365760" y="1143000"/>
+            <a:ext cx="3931920" cy="3657600"/>
+          </a:xfrm>
+          <a:prstGeom prst="rect">
+            <a:avLst/>
+          </a:prstGeom>
+          <a:noFill/>
+          <a:ln/>
+        </p:spPr>
+        <p:txBody>
+          <a:bodyPr wrap="square" rtlCol="0" anchor="t"/>
+          <a:lstStyle/>
+          <a:p>
+            <a:pPr marL="342900" indent="-342900">
+              <a:buSzPct val="100000"/>
+              <a:buChar char="•"/>
+            </a:pPr>
+            <a:r>
+              <a:rPr lang="en-US" sz="1100" dirty="0">
+                <a:solidFill>
+                  <a:srgbClr val="1C2120"/>
+                </a:solidFill>
+                <a:latin typeface="Calibri" pitchFamily="34" charset="0"/>
+                <a:ea typeface="Calibri" pitchFamily="34" charset="-122"/>
+                <a:cs typeface="Calibri" pitchFamily="34" charset="-120"/>
+              </a:rPr>
+              <a:t>TSA-SAC achieves highest profit ($1,039/ha) and IWUE (6.60 kg/mm) among all evaluated policies</a:t>
+            </a:r>
+            <a:endParaRPr lang="en-US" sz="1100" dirty="0"/>
+          </a:p>
+          <a:p>
+            <a:pPr marL="342900" indent="-342900">
+              <a:buSzPct val="100000"/>
+              <a:buChar char="•"/>
+            </a:pPr>
+            <a:r>
+              <a:rPr lang="en-US" sz="1100" dirty="0">
+                <a:solidFill>
+                  <a:srgbClr val="1C2120"/>
+                </a:solidFill>
+                <a:latin typeface="Calibri" pitchFamily="34" charset="0"/>
+                <a:ea typeface="Calibri" pitchFamily="34" charset="-122"/>
+                <a:cs typeface="Calibri" pitchFamily="34" charset="-120"/>
+              </a:rPr>
+              <a:t>BiLSTM + temporal attention encoder successfully captures sequential crop-growth dynamics</a:t>
+            </a:r>
+            <a:endParaRPr lang="en-US" sz="1100" dirty="0"/>
+          </a:p>
+          <a:p>
+            <a:pPr marL="342900" indent="-342900">
+              <a:buSzPct val="100000"/>
+              <a:buChar char="•"/>
+            </a:pPr>
+            <a:r>
+              <a:rPr lang="en-US" sz="1100" dirty="0">
+                <a:solidFill>
+                  <a:srgbClr val="1C2120"/>
+                </a:solidFill>
+                <a:latin typeface="Calibri" pitchFamily="34" charset="0"/>
+                <a:ea typeface="Calibri" pitchFamily="34" charset="-122"/>
+                <a:cs typeface="Calibri" pitchFamily="34" charset="-120"/>
+              </a:rPr>
+              <a:t>SAC significantly outperforms PPO (+160%) and DDPG (+22%) for long-horizon agricultural scheduling</a:t>
+            </a:r>
+            <a:endParaRPr lang="en-US" sz="1100" dirty="0"/>
+          </a:p>
+          <a:p>
+            <a:pPr marL="342900" indent="-342900">
+              <a:buSzPct val="100000"/>
+              <a:buChar char="•"/>
+            </a:pPr>
+            <a:r>
+              <a:rPr lang="en-US" sz="1100" dirty="0">
+                <a:solidFill>
+                  <a:srgbClr val="1C2120"/>
+                </a:solidFill>
+                <a:latin typeface="Calibri" pitchFamily="34" charset="0"/>
+                <a:ea typeface="Calibri" pitchFamily="34" charset="-122"/>
+                <a:cs typeface="Calibri" pitchFamily="34" charset="-120"/>
+              </a:rPr>
+              <a:t>Stage-aware multi-objective reward enables smarter water allocation at critical growth stages</a:t>
+            </a:r>
+            <a:endParaRPr lang="en-US" sz="1100" dirty="0"/>
+          </a:p>
+          <a:p>
+            <a:pPr marL="342900" indent="-342900">
+              <a:buSzPct val="100000"/>
+              <a:buChar char="•"/>
+            </a:pPr>
+            <a:r>
+              <a:rPr lang="en-US" sz="1100" dirty="0">
+                <a:solidFill>
+                  <a:srgbClr val="1C2120"/>
+                </a:solidFill>
+                <a:latin typeface="Calibri" pitchFamily="34" charset="0"/>
+                <a:ea typeface="Calibri" pitchFamily="34" charset="-122"/>
+                <a:cs typeface="Calibri" pitchFamily="34" charset="-120"/>
+              </a:rPr>
+              <a:t>Multi-crop transfer learning reduces training time by ~40% on secondary crops (wheat, maize)</a:t>
+            </a:r>
+            <a:endParaRPr lang="en-US" sz="1100" dirty="0"/>
+          </a:p>
+          <a:p>
+            <a:pPr marL="342900" indent="-342900">
+              <a:buSzPct val="100000"/>
+              <a:buChar char="•"/>
+            </a:pPr>
+            <a:r>
+              <a:rPr lang="en-US" sz="1100" dirty="0">
+                <a:solidFill>
+                  <a:srgbClr val="1C2120"/>
+                </a:solidFill>
+                <a:latin typeface="Calibri" pitchFamily="34" charset="0"/>
+                <a:ea typeface="Calibri" pitchFamily="34" charset="-122"/>
+                <a:cs typeface="Calibri" pitchFamily="34" charset="-120"/>
+              </a:rPr>
+              <a:t>Multi-zone shared-reservoir environment demonstrates scalability to real farm layouts</a:t>
+            </a:r>
+            <a:endParaRPr lang="en-US" sz="1100" dirty="0"/>
+          </a:p>
+          <a:p>
+            <a:pPr marL="342900" indent="-342900">
+              <a:buSzPct val="100000"/>
+              <a:buChar char="•"/>
+            </a:pPr>
+            <a:r>
+              <a:rPr lang="en-US" sz="1100" dirty="0">
+                <a:solidFill>
+                  <a:srgbClr val="1C2120"/>
+                </a:solidFill>
+                <a:latin typeface="Calibri" pitchFamily="34" charset="0"/>
+                <a:ea typeface="Calibri" pitchFamily="34" charset="-122"/>
+                <a:cs typeface="Calibri" pitchFamily="34" charset="-120"/>
+              </a:rPr>
+              <a:t>All 4 parameters in Bellman equation successfully aligned: S, A, R, P formulation validated empirically</a:t>
+            </a:r>
+            <a:endParaRPr lang="en-US" sz="1100" dirty="0"/>
+          </a:p>
+        </p:txBody>
+      </p:sp>
+      <p:sp>
+        <p:nvSpPr>
+          <p:cNvPr id="8" name="Shape 6"/>
+          <p:cNvSpPr/>
+          <p:nvPr/>
+        </p:nvSpPr>
+        <p:spPr>
+          <a:xfrm>
+            <a:off x="4754880" y="804672"/>
+            <a:ext cx="4023360" cy="256032"/>
+          </a:xfrm>
+          <a:prstGeom prst="rect">
+            <a:avLst/>
+          </a:prstGeom>
+          <a:solidFill>
+            <a:srgbClr val="C00000"/>
+          </a:solidFill>
+          <a:ln w="12700">
+            <a:solidFill>
+              <a:srgbClr val="C00000"/>
+            </a:solidFill>
+            <a:prstDash val="solid"/>
+          </a:ln>
+        </p:spPr>
+        <p:txBody>
+          <a:bodyPr/>
+          <a:lstStyle/>
+          <a:p>
+            <a:endParaRPr lang="en-IN"/>
+          </a:p>
+        </p:txBody>
+      </p:sp>
+      <p:sp>
+        <p:nvSpPr>
+          <p:cNvPr id="9" name="Text 7"/>
+          <p:cNvSpPr/>
+          <p:nvPr/>
+        </p:nvSpPr>
+        <p:spPr>
+          <a:xfrm>
+            <a:off x="4754880" y="804672"/>
+            <a:ext cx="4023360" cy="256032"/>
+          </a:xfrm>
+          <a:prstGeom prst="rect">
+            <a:avLst/>
+          </a:prstGeom>
+          <a:noFill/>
+          <a:ln/>
+        </p:spPr>
+        <p:txBody>
+          <a:bodyPr wrap="square" lIns="0" tIns="0" rIns="0" bIns="0" rtlCol="0" anchor="ctr"/>
+          <a:lstStyle/>
+          <a:p>
+            <a:pPr marL="0" indent="0" algn="ctr">
+              <a:buNone/>
+            </a:pPr>
+            <a:r>
+              <a:rPr lang="en-US" sz="1000" b="1" dirty="0">
+                <a:solidFill>
+                  <a:srgbClr val="FFFFFF"/>
+                </a:solidFill>
+                <a:latin typeface="Calibri" pitchFamily="34" charset="0"/>
+                <a:ea typeface="Calibri" pitchFamily="34" charset="-122"/>
+                <a:cs typeface="Calibri" pitchFamily="34" charset="-120"/>
+              </a:rPr>
+              <a:t>FUTURE SCOPE</a:t>
+            </a:r>
+            <a:endParaRPr lang="en-US" sz="1000" dirty="0"/>
+          </a:p>
+        </p:txBody>
+      </p:sp>
+      <p:sp>
+        <p:nvSpPr>
+          <p:cNvPr id="10" name="Shape 8"/>
+          <p:cNvSpPr/>
+          <p:nvPr/>
+        </p:nvSpPr>
+        <p:spPr>
+          <a:xfrm>
+            <a:off x="4754880" y="1143000"/>
+            <a:ext cx="320040" cy="475488"/>
+          </a:xfrm>
+          <a:prstGeom prst="rect">
+            <a:avLst/>
+          </a:prstGeom>
+          <a:solidFill>
+            <a:srgbClr val="1F3864"/>
+          </a:solidFill>
+          <a:ln w="12700">
+            <a:solidFill>
+              <a:srgbClr val="1F3864"/>
+            </a:solidFill>
+            <a:prstDash val="solid"/>
+          </a:ln>
+        </p:spPr>
+        <p:txBody>
+          <a:bodyPr/>
+          <a:lstStyle/>
+          <a:p>
+            <a:endParaRPr lang="en-IN"/>
+          </a:p>
+        </p:txBody>
+      </p:sp>
+      <p:sp>
+        <p:nvSpPr>
+          <p:cNvPr id="11" name="Text 9"/>
+          <p:cNvSpPr/>
+          <p:nvPr/>
+        </p:nvSpPr>
+        <p:spPr>
+          <a:xfrm>
+            <a:off x="4754880" y="1143000"/>
+            <a:ext cx="320040" cy="475488"/>
+          </a:xfrm>
+          <a:prstGeom prst="rect">
+            <a:avLst/>
+          </a:prstGeom>
+          <a:noFill/>
+          <a:ln/>
+        </p:spPr>
+        <p:txBody>
+          <a:bodyPr wrap="square" lIns="0" tIns="0" rIns="0" bIns="0" rtlCol="0" anchor="ctr"/>
+          <a:lstStyle/>
+          <a:p>
+            <a:pPr marL="0" indent="0" algn="ctr">
+              <a:buNone/>
+            </a:pPr>
+            <a:r>
+              <a:rPr lang="en-US" sz="1100" b="1" dirty="0">
+                <a:solidFill>
+                  <a:srgbClr val="FFFFFF"/>
+                </a:solidFill>
+                <a:latin typeface="Calibri" pitchFamily="34" charset="0"/>
+                <a:ea typeface="Calibri" pitchFamily="34" charset="-122"/>
+                <a:cs typeface="Calibri" pitchFamily="34" charset="-120"/>
+              </a:rPr>
+              <a:t>N</a:t>
+            </a:r>
+            <a:endParaRPr lang="en-US" sz="1100" dirty="0"/>
+          </a:p>
+        </p:txBody>
+      </p:sp>
+      <p:sp>
+        <p:nvSpPr>
+          <p:cNvPr id="12" name="Text 10"/>
+          <p:cNvSpPr/>
+          <p:nvPr/>
+        </p:nvSpPr>
+        <p:spPr>
+          <a:xfrm>
+            <a:off x="5166360" y="1161288"/>
+            <a:ext cx="3520440" cy="228600"/>
+          </a:xfrm>
+          <a:prstGeom prst="rect">
+            <a:avLst/>
+          </a:prstGeom>
+          <a:noFill/>
+          <a:ln/>
+        </p:spPr>
+        <p:txBody>
+          <a:bodyPr wrap="square" rtlCol="0" anchor="ctr"/>
+          <a:lstStyle/>
+          <a:p>
+            <a:pPr marL="0" indent="0">
+              <a:buNone/>
+            </a:pPr>
+            <a:r>
+              <a:rPr lang="en-US" sz="1100" b="1" dirty="0">
+                <a:solidFill>
+                  <a:srgbClr val="1F3864"/>
+                </a:solidFill>
+                <a:latin typeface="Calibri" pitchFamily="34" charset="0"/>
+                <a:ea typeface="Calibri" pitchFamily="34" charset="-122"/>
+                <a:cs typeface="Calibri" pitchFamily="34" charset="-120"/>
+              </a:rPr>
+              <a:t>Nitrogen Management</a:t>
+            </a:r>
+            <a:endParaRPr lang="en-US" sz="1100" dirty="0"/>
+          </a:p>
+        </p:txBody>
+      </p:sp>
+      <p:sp>
+        <p:nvSpPr>
+          <p:cNvPr id="13" name="Text 11"/>
+          <p:cNvSpPr/>
+          <p:nvPr/>
+        </p:nvSpPr>
+        <p:spPr>
+          <a:xfrm>
+            <a:off x="5166360" y="1389888"/>
+            <a:ext cx="3520440" cy="256032"/>
+          </a:xfrm>
+          <a:prstGeom prst="rect">
+            <a:avLst/>
+          </a:prstGeom>
+          <a:noFill/>
+          <a:ln/>
+        </p:spPr>
+        <p:txBody>
+          <a:bodyPr wrap="square" rtlCol="0" anchor="ctr"/>
+          <a:lstStyle/>
+          <a:p>
+            <a:pPr marL="0" indent="0">
+              <a:buNone/>
+            </a:pPr>
+            <a:r>
+              <a:rPr lang="en-US" sz="950" dirty="0">
+                <a:solidFill>
+                  <a:srgbClr val="555555"/>
+                </a:solidFill>
+                <a:latin typeface="Calibri" pitchFamily="34" charset="0"/>
+                <a:ea typeface="Calibri" pitchFamily="34" charset="-122"/>
+                <a:cs typeface="Calibri" pitchFamily="34" charset="-120"/>
+              </a:rPr>
+              <a:t>Add soil nitrogen &amp; fertilizer as state variables and action dimensions</a:t>
+            </a:r>
+            <a:endParaRPr lang="en-US" sz="950" dirty="0"/>
+          </a:p>
+        </p:txBody>
+      </p:sp>
+      <p:sp>
+        <p:nvSpPr>
+          <p:cNvPr id="14" name="Shape 12"/>
+          <p:cNvSpPr/>
+          <p:nvPr/>
+        </p:nvSpPr>
+        <p:spPr>
+          <a:xfrm>
+            <a:off x="4754880" y="1709928"/>
+            <a:ext cx="320040" cy="475488"/>
+          </a:xfrm>
+          <a:prstGeom prst="rect">
+            <a:avLst/>
+          </a:prstGeom>
+          <a:solidFill>
+            <a:srgbClr val="1F3864"/>
+          </a:solidFill>
+          <a:ln w="12700">
+            <a:solidFill>
+              <a:srgbClr val="1F3864"/>
+            </a:solidFill>
+            <a:prstDash val="solid"/>
+          </a:ln>
+        </p:spPr>
+        <p:txBody>
+          <a:bodyPr/>
+          <a:lstStyle/>
+          <a:p>
+            <a:endParaRPr lang="en-IN"/>
+          </a:p>
+        </p:txBody>
+      </p:sp>
+      <p:sp>
+        <p:nvSpPr>
+          <p:cNvPr id="15" name="Text 13"/>
+          <p:cNvSpPr/>
+          <p:nvPr/>
+        </p:nvSpPr>
+        <p:spPr>
+          <a:xfrm>
+            <a:off x="4754880" y="1709928"/>
+            <a:ext cx="320040" cy="475488"/>
+          </a:xfrm>
+          <a:prstGeom prst="rect">
+            <a:avLst/>
+          </a:prstGeom>
+          <a:noFill/>
+          <a:ln/>
+        </p:spPr>
+        <p:txBody>
+          <a:bodyPr wrap="square" lIns="0" tIns="0" rIns="0" bIns="0" rtlCol="0" anchor="ctr"/>
+          <a:lstStyle/>
+          <a:p>
+            <a:pPr marL="0" indent="0" algn="ctr">
+              <a:buNone/>
+            </a:pPr>
+            <a:r>
+              <a:rPr lang="en-US" sz="1100" b="1" dirty="0">
+                <a:solidFill>
+                  <a:srgbClr val="FFFFFF"/>
+                </a:solidFill>
+                <a:latin typeface="Calibri" pitchFamily="34" charset="0"/>
+                <a:ea typeface="Calibri" pitchFamily="34" charset="-122"/>
+                <a:cs typeface="Calibri" pitchFamily="34" charset="-120"/>
+              </a:rPr>
+              <a:t>M</a:t>
+            </a:r>
+            <a:endParaRPr lang="en-US" sz="1100" dirty="0"/>
+          </a:p>
+        </p:txBody>
+      </p:sp>
+      <p:sp>
+        <p:nvSpPr>
+          <p:cNvPr id="16" name="Text 14"/>
+          <p:cNvSpPr/>
+          <p:nvPr/>
+        </p:nvSpPr>
+        <p:spPr>
+          <a:xfrm>
+            <a:off x="5166360" y="1728216"/>
+            <a:ext cx="3520440" cy="228600"/>
+          </a:xfrm>
+          <a:prstGeom prst="rect">
+            <a:avLst/>
+          </a:prstGeom>
+          <a:noFill/>
+          <a:ln/>
+        </p:spPr>
+        <p:txBody>
+          <a:bodyPr wrap="square" rtlCol="0" anchor="ctr"/>
+          <a:lstStyle/>
+          <a:p>
+            <a:pPr marL="0" indent="0">
+              <a:buNone/>
+            </a:pPr>
+            <a:r>
+              <a:rPr lang="en-US" sz="1100" b="1" dirty="0">
+                <a:solidFill>
+                  <a:srgbClr val="1F3864"/>
+                </a:solidFill>
+                <a:latin typeface="Calibri" pitchFamily="34" charset="0"/>
+                <a:ea typeface="Calibri" pitchFamily="34" charset="-122"/>
+                <a:cs typeface="Calibri" pitchFamily="34" charset="-120"/>
+              </a:rPr>
+              <a:t>Market Price Uncertainty</a:t>
+            </a:r>
+            <a:endParaRPr lang="en-US" sz="1100" dirty="0"/>
+          </a:p>
+        </p:txBody>
+      </p:sp>
+      <p:sp>
+        <p:nvSpPr>
+          <p:cNvPr id="17" name="Text 15"/>
+          <p:cNvSpPr/>
+          <p:nvPr/>
+        </p:nvSpPr>
+        <p:spPr>
+          <a:xfrm>
+            <a:off x="5166360" y="1956816"/>
+            <a:ext cx="3520440" cy="256032"/>
+          </a:xfrm>
+          <a:prstGeom prst="rect">
+            <a:avLst/>
+          </a:prstGeom>
+          <a:noFill/>
+          <a:ln/>
+        </p:spPr>
+        <p:txBody>
+          <a:bodyPr wrap="square" rtlCol="0" anchor="ctr"/>
+          <a:lstStyle/>
+          <a:p>
+            <a:pPr marL="0" indent="0">
+              <a:buNone/>
+            </a:pPr>
+            <a:r>
+              <a:rPr lang="en-US" sz="950" dirty="0">
+                <a:solidFill>
+                  <a:srgbClr val="555555"/>
+                </a:solidFill>
+                <a:latin typeface="Calibri" pitchFamily="34" charset="0"/>
+                <a:ea typeface="Calibri" pitchFamily="34" charset="-122"/>
+                <a:cs typeface="Calibri" pitchFamily="34" charset="-120"/>
+              </a:rPr>
+              <a:t>Stochastic crop prices modeled as part of the RL environment</a:t>
+            </a:r>
+            <a:endParaRPr lang="en-US" sz="950" dirty="0"/>
+          </a:p>
+        </p:txBody>
+      </p:sp>
+      <p:sp>
+        <p:nvSpPr>
+          <p:cNvPr id="18" name="Shape 16"/>
+          <p:cNvSpPr/>
+          <p:nvPr/>
+        </p:nvSpPr>
+        <p:spPr>
+          <a:xfrm>
+            <a:off x="4754880" y="2276856"/>
+            <a:ext cx="320040" cy="475488"/>
+          </a:xfrm>
+          <a:prstGeom prst="rect">
+            <a:avLst/>
+          </a:prstGeom>
+          <a:solidFill>
+            <a:srgbClr val="1F3864"/>
+          </a:solidFill>
+          <a:ln w="12700">
+            <a:solidFill>
+              <a:srgbClr val="1F3864"/>
+            </a:solidFill>
+            <a:prstDash val="solid"/>
+          </a:ln>
+        </p:spPr>
+        <p:txBody>
+          <a:bodyPr/>
+          <a:lstStyle/>
+          <a:p>
+            <a:endParaRPr lang="en-IN"/>
+          </a:p>
+        </p:txBody>
+      </p:sp>
+      <p:sp>
+        <p:nvSpPr>
+          <p:cNvPr id="19" name="Text 17"/>
+          <p:cNvSpPr/>
+          <p:nvPr/>
+        </p:nvSpPr>
+        <p:spPr>
+          <a:xfrm>
+            <a:off x="4754880" y="2276856"/>
+            <a:ext cx="320040" cy="475488"/>
+          </a:xfrm>
+          <a:prstGeom prst="rect">
+            <a:avLst/>
+          </a:prstGeom>
+          <a:noFill/>
+          <a:ln/>
+        </p:spPr>
+        <p:txBody>
+          <a:bodyPr wrap="square" lIns="0" tIns="0" rIns="0" bIns="0" rtlCol="0" anchor="ctr"/>
+          <a:lstStyle/>
+          <a:p>
+            <a:pPr marL="0" indent="0" algn="ctr">
+              <a:buNone/>
+            </a:pPr>
+            <a:r>
+              <a:rPr lang="en-US" sz="1100" b="1" dirty="0">
+                <a:solidFill>
+                  <a:srgbClr val="FFFFFF"/>
+                </a:solidFill>
+                <a:latin typeface="Calibri" pitchFamily="34" charset="0"/>
+                <a:ea typeface="Calibri" pitchFamily="34" charset="-122"/>
+                <a:cs typeface="Calibri" pitchFamily="34" charset="-120"/>
+              </a:rPr>
+              <a:t>C</a:t>
+            </a:r>
+            <a:endParaRPr lang="en-US" sz="1100" dirty="0"/>
+          </a:p>
+        </p:txBody>
+      </p:sp>
+      <p:sp>
+        <p:nvSpPr>
+          <p:cNvPr id="20" name="Text 18"/>
+          <p:cNvSpPr/>
+          <p:nvPr/>
+        </p:nvSpPr>
+        <p:spPr>
+          <a:xfrm>
+            <a:off x="5166360" y="2295144"/>
+            <a:ext cx="3520440" cy="228600"/>
+          </a:xfrm>
+          <a:prstGeom prst="rect">
+            <a:avLst/>
+          </a:prstGeom>
+          <a:noFill/>
+          <a:ln/>
+        </p:spPr>
+        <p:txBody>
+          <a:bodyPr wrap="square" rtlCol="0" anchor="ctr"/>
+          <a:lstStyle/>
+          <a:p>
+            <a:pPr marL="0" indent="0">
+              <a:buNone/>
+            </a:pPr>
+            <a:r>
+              <a:rPr lang="en-US" sz="1100" b="1" dirty="0">
+                <a:solidFill>
+                  <a:srgbClr val="1F3864"/>
+                </a:solidFill>
+                <a:latin typeface="Calibri" pitchFamily="34" charset="0"/>
+                <a:ea typeface="Calibri" pitchFamily="34" charset="-122"/>
+                <a:cs typeface="Calibri" pitchFamily="34" charset="-120"/>
+              </a:rPr>
+              <a:t>Climate Change Scenarios</a:t>
+            </a:r>
+            <a:endParaRPr lang="en-US" sz="1100" dirty="0"/>
+          </a:p>
+        </p:txBody>
+      </p:sp>
+      <p:sp>
+        <p:nvSpPr>
+          <p:cNvPr id="21" name="Text 19"/>
+          <p:cNvSpPr/>
+          <p:nvPr/>
+        </p:nvSpPr>
+        <p:spPr>
+          <a:xfrm>
+            <a:off x="5166360" y="2523744"/>
+            <a:ext cx="3520440" cy="256032"/>
+          </a:xfrm>
+          <a:prstGeom prst="rect">
+            <a:avLst/>
+          </a:prstGeom>
+          <a:noFill/>
+          <a:ln/>
+        </p:spPr>
+        <p:txBody>
+          <a:bodyPr wrap="square" rtlCol="0" anchor="ctr"/>
+          <a:lstStyle/>
+          <a:p>
+            <a:pPr marL="0" indent="0">
+              <a:buNone/>
+            </a:pPr>
+            <a:r>
+              <a:rPr lang="en-US" sz="950" dirty="0">
+                <a:solidFill>
+                  <a:srgbClr val="555555"/>
+                </a:solidFill>
+                <a:latin typeface="Calibri" pitchFamily="34" charset="0"/>
+                <a:ea typeface="Calibri" pitchFamily="34" charset="-122"/>
+                <a:cs typeface="Calibri" pitchFamily="34" charset="-120"/>
+              </a:rPr>
+              <a:t>Train under CMIP6 projected future weather (2040–2070)</a:t>
+            </a:r>
+            <a:endParaRPr lang="en-US" sz="950" dirty="0"/>
+          </a:p>
+        </p:txBody>
+      </p:sp>
+      <p:sp>
+        <p:nvSpPr>
+          <p:cNvPr id="22" name="Shape 20"/>
+          <p:cNvSpPr/>
+          <p:nvPr/>
+        </p:nvSpPr>
+        <p:spPr>
+          <a:xfrm>
+            <a:off x="4754880" y="2843784"/>
+            <a:ext cx="320040" cy="475488"/>
+          </a:xfrm>
+          <a:prstGeom prst="rect">
+            <a:avLst/>
+          </a:prstGeom>
+          <a:solidFill>
+            <a:srgbClr val="1F3864"/>
+          </a:solidFill>
+          <a:ln w="12700">
+            <a:solidFill>
+              <a:srgbClr val="1F3864"/>
+            </a:solidFill>
+            <a:prstDash val="solid"/>
+          </a:ln>
+        </p:spPr>
+        <p:txBody>
+          <a:bodyPr/>
+          <a:lstStyle/>
+          <a:p>
+            <a:endParaRPr lang="en-IN"/>
+          </a:p>
+        </p:txBody>
+      </p:sp>
+      <p:sp>
+        <p:nvSpPr>
+          <p:cNvPr id="23" name="Text 21"/>
+          <p:cNvSpPr/>
+          <p:nvPr/>
+        </p:nvSpPr>
+        <p:spPr>
+          <a:xfrm>
+            <a:off x="4754880" y="2843784"/>
+            <a:ext cx="320040" cy="475488"/>
+          </a:xfrm>
+          <a:prstGeom prst="rect">
+            <a:avLst/>
+          </a:prstGeom>
+          <a:noFill/>
+          <a:ln/>
+        </p:spPr>
+        <p:txBody>
+          <a:bodyPr wrap="square" lIns="0" tIns="0" rIns="0" bIns="0" rtlCol="0" anchor="ctr"/>
+          <a:lstStyle/>
+          <a:p>
+            <a:pPr marL="0" indent="0" algn="ctr">
+              <a:buNone/>
+            </a:pPr>
+            <a:r>
+              <a:rPr lang="en-US" sz="1100" b="1" dirty="0">
+                <a:solidFill>
+                  <a:srgbClr val="FFFFFF"/>
+                </a:solidFill>
+                <a:latin typeface="Calibri" pitchFamily="34" charset="0"/>
+                <a:ea typeface="Calibri" pitchFamily="34" charset="-122"/>
+                <a:cs typeface="Calibri" pitchFamily="34" charset="-120"/>
+              </a:rPr>
+              <a:t>D</a:t>
+            </a:r>
+            <a:endParaRPr lang="en-US" sz="1100" dirty="0"/>
+          </a:p>
+        </p:txBody>
+      </p:sp>
+      <p:sp>
+        <p:nvSpPr>
+          <p:cNvPr id="24" name="Text 22"/>
+          <p:cNvSpPr/>
+          <p:nvPr/>
+        </p:nvSpPr>
+        <p:spPr>
+          <a:xfrm>
+            <a:off x="5166360" y="2862072"/>
+            <a:ext cx="3520440" cy="228600"/>
+          </a:xfrm>
+          <a:prstGeom prst="rect">
+            <a:avLst/>
+          </a:prstGeom>
+          <a:noFill/>
+          <a:ln/>
+        </p:spPr>
+        <p:txBody>
+          <a:bodyPr wrap="square" rtlCol="0" anchor="ctr"/>
+          <a:lstStyle/>
+          <a:p>
+            <a:pPr marL="0" indent="0">
+              <a:buNone/>
+            </a:pPr>
+            <a:r>
+              <a:rPr lang="en-US" sz="1100" b="1" dirty="0">
+                <a:solidFill>
+                  <a:srgbClr val="1F3864"/>
+                </a:solidFill>
+                <a:latin typeface="Calibri" pitchFamily="34" charset="0"/>
+                <a:ea typeface="Calibri" pitchFamily="34" charset="-122"/>
+                <a:cs typeface="Calibri" pitchFamily="34" charset="-120"/>
+              </a:rPr>
+              <a:t>DSSAT Integration</a:t>
+            </a:r>
+            <a:endParaRPr lang="en-US" sz="1100" dirty="0"/>
+          </a:p>
+        </p:txBody>
+      </p:sp>
+      <p:sp>
+        <p:nvSpPr>
+          <p:cNvPr id="25" name="Text 23"/>
+          <p:cNvSpPr/>
+          <p:nvPr/>
+        </p:nvSpPr>
+        <p:spPr>
+          <a:xfrm>
+            <a:off x="5166360" y="3090672"/>
+            <a:ext cx="3520440" cy="256032"/>
+          </a:xfrm>
+          <a:prstGeom prst="rect">
+            <a:avLst/>
+          </a:prstGeom>
+          <a:noFill/>
+          <a:ln/>
+        </p:spPr>
+        <p:txBody>
+          <a:bodyPr wrap="square" rtlCol="0" anchor="ctr"/>
+          <a:lstStyle/>
+          <a:p>
+            <a:pPr marL="0" indent="0">
+              <a:buNone/>
+            </a:pPr>
+            <a:r>
+              <a:rPr lang="en-US" sz="950" dirty="0">
+                <a:solidFill>
+                  <a:srgbClr val="555555"/>
+                </a:solidFill>
+                <a:latin typeface="Calibri" pitchFamily="34" charset="0"/>
+                <a:ea typeface="Calibri" pitchFamily="34" charset="-122"/>
+                <a:cs typeface="Calibri" pitchFamily="34" charset="-120"/>
+              </a:rPr>
+              <a:t>Replace surrogate with actual DSSAT API for real-world calibration</a:t>
+            </a:r>
+            <a:endParaRPr lang="en-US" sz="950" dirty="0"/>
+          </a:p>
+        </p:txBody>
+      </p:sp>
+      <p:sp>
+        <p:nvSpPr>
+          <p:cNvPr id="26" name="Shape 24"/>
+          <p:cNvSpPr/>
+          <p:nvPr/>
+        </p:nvSpPr>
+        <p:spPr>
+          <a:xfrm>
+            <a:off x="4754880" y="3410712"/>
+            <a:ext cx="320040" cy="475488"/>
+          </a:xfrm>
+          <a:prstGeom prst="rect">
+            <a:avLst/>
+          </a:prstGeom>
+          <a:solidFill>
+            <a:srgbClr val="1F3864"/>
+          </a:solidFill>
+          <a:ln w="12700">
+            <a:solidFill>
+              <a:srgbClr val="1F3864"/>
+            </a:solidFill>
+            <a:prstDash val="solid"/>
+          </a:ln>
+        </p:spPr>
+        <p:txBody>
+          <a:bodyPr/>
+          <a:lstStyle/>
+          <a:p>
+            <a:endParaRPr lang="en-IN"/>
+          </a:p>
+        </p:txBody>
+      </p:sp>
+      <p:sp>
+        <p:nvSpPr>
+          <p:cNvPr id="27" name="Text 25"/>
+          <p:cNvSpPr/>
+          <p:nvPr/>
+        </p:nvSpPr>
+        <p:spPr>
+          <a:xfrm>
+            <a:off x="4754880" y="3410712"/>
+            <a:ext cx="320040" cy="475488"/>
+          </a:xfrm>
+          <a:prstGeom prst="rect">
+            <a:avLst/>
+          </a:prstGeom>
+          <a:noFill/>
+          <a:ln/>
+        </p:spPr>
+        <p:txBody>
+          <a:bodyPr wrap="square" lIns="0" tIns="0" rIns="0" bIns="0" rtlCol="0" anchor="ctr"/>
+          <a:lstStyle/>
+          <a:p>
+            <a:pPr marL="0" indent="0" algn="ctr">
+              <a:buNone/>
+            </a:pPr>
+            <a:r>
+              <a:rPr lang="en-US" sz="1100" b="1" dirty="0">
+                <a:solidFill>
+                  <a:srgbClr val="FFFFFF"/>
+                </a:solidFill>
+                <a:latin typeface="Calibri" pitchFamily="34" charset="0"/>
+                <a:ea typeface="Calibri" pitchFamily="34" charset="-122"/>
+                <a:cs typeface="Calibri" pitchFamily="34" charset="-120"/>
+              </a:rPr>
+              <a:t>E</a:t>
+            </a:r>
+            <a:endParaRPr lang="en-US" sz="1100" dirty="0"/>
+          </a:p>
+        </p:txBody>
+      </p:sp>
+      <p:sp>
+        <p:nvSpPr>
+          <p:cNvPr id="28" name="Text 26"/>
+          <p:cNvSpPr/>
+          <p:nvPr/>
+        </p:nvSpPr>
+        <p:spPr>
+          <a:xfrm>
+            <a:off x="5166360" y="3429000"/>
+            <a:ext cx="3520440" cy="228600"/>
+          </a:xfrm>
+          <a:prstGeom prst="rect">
+            <a:avLst/>
+          </a:prstGeom>
+          <a:noFill/>
+          <a:ln/>
+        </p:spPr>
+        <p:txBody>
+          <a:bodyPr wrap="square" rtlCol="0" anchor="ctr"/>
+          <a:lstStyle/>
+          <a:p>
+            <a:pPr marL="0" indent="0">
+              <a:buNone/>
+            </a:pPr>
+            <a:r>
+              <a:rPr lang="en-US" sz="1100" b="1" dirty="0">
+                <a:solidFill>
+                  <a:srgbClr val="1F3864"/>
+                </a:solidFill>
+                <a:latin typeface="Calibri" pitchFamily="34" charset="0"/>
+                <a:ea typeface="Calibri" pitchFamily="34" charset="-122"/>
+                <a:cs typeface="Calibri" pitchFamily="34" charset="-120"/>
+              </a:rPr>
+              <a:t>Edge Deployment</a:t>
+            </a:r>
+            <a:endParaRPr lang="en-US" sz="1100" dirty="0"/>
+          </a:p>
+        </p:txBody>
+      </p:sp>
+      <p:sp>
+        <p:nvSpPr>
+          <p:cNvPr id="29" name="Text 27"/>
+          <p:cNvSpPr/>
+          <p:nvPr/>
+        </p:nvSpPr>
+        <p:spPr>
+          <a:xfrm>
+            <a:off x="5166360" y="3657600"/>
+            <a:ext cx="3520440" cy="256032"/>
+          </a:xfrm>
+          <a:prstGeom prst="rect">
+            <a:avLst/>
+          </a:prstGeom>
+          <a:noFill/>
+          <a:ln/>
+        </p:spPr>
+        <p:txBody>
+          <a:bodyPr wrap="square" rtlCol="0" anchor="ctr"/>
+          <a:lstStyle/>
+          <a:p>
+            <a:pPr marL="0" indent="0">
+              <a:buNone/>
+            </a:pPr>
+            <a:r>
+              <a:rPr lang="en-US" sz="950" dirty="0">
+                <a:solidFill>
+                  <a:srgbClr val="555555"/>
+                </a:solidFill>
+                <a:latin typeface="Calibri" pitchFamily="34" charset="0"/>
+                <a:ea typeface="Calibri" pitchFamily="34" charset="-122"/>
+                <a:cs typeface="Calibri" pitchFamily="34" charset="-120"/>
+              </a:rPr>
+              <a:t>Quantized model on Raspberry Pi / IoT sensor nodes for field use</a:t>
+            </a:r>
+            <a:endParaRPr lang="en-US" sz="950" dirty="0"/>
+          </a:p>
+        </p:txBody>
+      </p:sp>
+      <p:sp>
+        <p:nvSpPr>
+          <p:cNvPr id="30" name="Shape 28"/>
+          <p:cNvSpPr/>
+          <p:nvPr/>
+        </p:nvSpPr>
+        <p:spPr>
+          <a:xfrm>
+            <a:off x="4754880" y="3977640"/>
+            <a:ext cx="320040" cy="475488"/>
+          </a:xfrm>
+          <a:prstGeom prst="rect">
+            <a:avLst/>
+          </a:prstGeom>
+          <a:solidFill>
+            <a:srgbClr val="1F3864"/>
+          </a:solidFill>
+          <a:ln w="12700">
+            <a:solidFill>
+              <a:srgbClr val="1F3864"/>
+            </a:solidFill>
+            <a:prstDash val="solid"/>
+          </a:ln>
+        </p:spPr>
+        <p:txBody>
+          <a:bodyPr/>
+          <a:lstStyle/>
+          <a:p>
+            <a:endParaRPr lang="en-IN"/>
+          </a:p>
+        </p:txBody>
+      </p:sp>
+      <p:sp>
+        <p:nvSpPr>
+          <p:cNvPr id="31" name="Text 29"/>
+          <p:cNvSpPr/>
+          <p:nvPr/>
+        </p:nvSpPr>
+        <p:spPr>
+          <a:xfrm>
+            <a:off x="4754880" y="3977640"/>
+            <a:ext cx="320040" cy="475488"/>
+          </a:xfrm>
+          <a:prstGeom prst="rect">
+            <a:avLst/>
+          </a:prstGeom>
+          <a:noFill/>
+          <a:ln/>
+        </p:spPr>
+        <p:txBody>
+          <a:bodyPr wrap="square" lIns="0" tIns="0" rIns="0" bIns="0" rtlCol="0" anchor="ctr"/>
+          <a:lstStyle/>
+          <a:p>
+            <a:pPr marL="0" indent="0" algn="ctr">
+              <a:buNone/>
+            </a:pPr>
+            <a:r>
+              <a:rPr lang="en-US" sz="1100" b="1" dirty="0">
+                <a:solidFill>
+                  <a:srgbClr val="FFFFFF"/>
+                </a:solidFill>
+                <a:latin typeface="Calibri" pitchFamily="34" charset="0"/>
+                <a:ea typeface="Calibri" pitchFamily="34" charset="-122"/>
+                <a:cs typeface="Calibri" pitchFamily="34" charset="-120"/>
+              </a:rPr>
+              <a:t>R</a:t>
+            </a:r>
+            <a:endParaRPr lang="en-US" sz="1100" dirty="0"/>
+          </a:p>
+        </p:txBody>
+      </p:sp>
+      <p:sp>
+        <p:nvSpPr>
+          <p:cNvPr id="32" name="Text 30"/>
+          <p:cNvSpPr/>
+          <p:nvPr/>
+        </p:nvSpPr>
+        <p:spPr>
+          <a:xfrm>
+            <a:off x="5166360" y="3995928"/>
+            <a:ext cx="3520440" cy="228600"/>
+          </a:xfrm>
+          <a:prstGeom prst="rect">
+            <a:avLst/>
+          </a:prstGeom>
+          <a:noFill/>
+          <a:ln/>
+        </p:spPr>
+        <p:txBody>
+          <a:bodyPr wrap="square" rtlCol="0" anchor="ctr"/>
+          <a:lstStyle/>
+          <a:p>
+            <a:pPr marL="0" indent="0">
+              <a:buNone/>
+            </a:pPr>
+            <a:r>
+              <a:rPr lang="en-US" sz="1100" b="1" dirty="0">
+                <a:solidFill>
+                  <a:srgbClr val="1F3864"/>
+                </a:solidFill>
+                <a:latin typeface="Calibri" pitchFamily="34" charset="0"/>
+                <a:ea typeface="Calibri" pitchFamily="34" charset="-122"/>
+                <a:cs typeface="Calibri" pitchFamily="34" charset="-120"/>
+              </a:rPr>
+              <a:t>Real Farm Validation</a:t>
+            </a:r>
+            <a:endParaRPr lang="en-US" sz="1100" dirty="0"/>
+          </a:p>
+        </p:txBody>
+      </p:sp>
+      <p:sp>
+        <p:nvSpPr>
+          <p:cNvPr id="33" name="Text 31"/>
+          <p:cNvSpPr/>
+          <p:nvPr/>
+        </p:nvSpPr>
+        <p:spPr>
+          <a:xfrm>
+            <a:off x="5166360" y="4224528"/>
+            <a:ext cx="3520440" cy="256032"/>
+          </a:xfrm>
+          <a:prstGeom prst="rect">
+            <a:avLst/>
+          </a:prstGeom>
+          <a:noFill/>
+          <a:ln/>
+        </p:spPr>
+        <p:txBody>
+          <a:bodyPr wrap="square" rtlCol="0" anchor="ctr"/>
+          <a:lstStyle/>
+          <a:p>
+            <a:pPr marL="0" indent="0">
+              <a:buNone/>
+            </a:pPr>
+            <a:r>
+              <a:rPr lang="en-US" sz="950" dirty="0">
+                <a:solidFill>
+                  <a:srgbClr val="555555"/>
+                </a:solidFill>
+                <a:latin typeface="Calibri" pitchFamily="34" charset="0"/>
+                <a:ea typeface="Calibri" pitchFamily="34" charset="-122"/>
+                <a:cs typeface="Calibri" pitchFamily="34" charset="-120"/>
+              </a:rPr>
+              <a:t>Pilot study with actual sensor data from agricultural test plots</a:t>
+            </a:r>
+            <a:endParaRPr lang="en-US" sz="950" dirty="0"/>
+          </a:p>
+        </p:txBody>
+      </p:sp>
+    </p:spTree>
+  </p:cSld>
+  <p:clrMapOvr>
+    <a:masterClrMapping/>
+  </p:clrMapOvr>
+  <p:timing>
+    <p:tnLst>
+      <p:par>
+        <p:cTn id="1" dur="indefinite" restart="never" nodeType="tmRoot"/>
+      </p:par>
+    </p:tnLst>
+  </p:timing>
 </p:sld>
 </file>
 
@@ -22329,1330 +22546,25 @@
   <p:clrMapOvr>
     <a:masterClrMapping/>
   </p:clrMapOvr>
+  <mc:AlternateContent xmlns:mc="http://schemas.openxmlformats.org/markup-compatibility/2006">
+    <mc:Choice xmlns:p14="http://schemas.microsoft.com/office/powerpoint/2010/main" Requires="p14">
+      <p:transition spd="slow" p14:dur="2000" advTm="3925"/>
+    </mc:Choice>
+    <mc:Fallback>
+      <p:transition spd="slow" advTm="3925"/>
+    </mc:Fallback>
+  </mc:AlternateContent>
+  <p:timing>
+    <p:tnLst>
+      <p:par>
+        <p:cTn id="1" dur="indefinite" restart="never" nodeType="tmRoot"/>
+      </p:par>
+    </p:tnLst>
+  </p:timing>
 </p:sld>
 </file>
 
 <file path=ppt/slides/slide20.xml><?xml version="1.0" encoding="utf-8"?>
-<p:sld xmlns:a="http://schemas.openxmlformats.org/drawingml/2006/main" xmlns:r="http://schemas.openxmlformats.org/officeDocument/2006/relationships" xmlns:p="http://schemas.openxmlformats.org/presentationml/2006/main">
-  <p:cSld name="Slide 17">
-    <p:bg>
-      <p:bgPr>
-        <a:solidFill>
-          <a:srgbClr val="FFFFFF"/>
-        </a:solidFill>
-        <a:effectLst/>
-      </p:bgPr>
-    </p:bg>
-    <p:spTree>
-      <p:nvGrpSpPr>
-        <p:cNvPr id="1" name=""/>
-        <p:cNvGrpSpPr/>
-        <p:nvPr/>
-      </p:nvGrpSpPr>
-      <p:grpSpPr>
-        <a:xfrm>
-          <a:off x="0" y="0"/>
-          <a:ext cx="0" cy="0"/>
-          <a:chOff x="0" y="0"/>
-          <a:chExt cx="0" cy="0"/>
-        </a:xfrm>
-      </p:grpSpPr>
-      <p:sp>
-        <p:nvSpPr>
-          <p:cNvPr id="2" name="Shape 0"/>
-          <p:cNvSpPr/>
-          <p:nvPr/>
-        </p:nvSpPr>
-        <p:spPr>
-          <a:xfrm>
-            <a:off x="0" y="0"/>
-            <a:ext cx="9144000" cy="658368"/>
-          </a:xfrm>
-          <a:prstGeom prst="rect">
-            <a:avLst/>
-          </a:prstGeom>
-          <a:solidFill>
-            <a:srgbClr val="1F3864"/>
-          </a:solidFill>
-          <a:ln w="12700">
-            <a:solidFill>
-              <a:srgbClr val="1F3864"/>
-            </a:solidFill>
-            <a:prstDash val="solid"/>
-          </a:ln>
-        </p:spPr>
-        <p:txBody>
-          <a:bodyPr/>
-          <a:lstStyle/>
-          <a:p>
-            <a:endParaRPr lang="en-IN"/>
-          </a:p>
-        </p:txBody>
-      </p:sp>
-      <p:sp>
-        <p:nvSpPr>
-          <p:cNvPr id="3" name="Text 1"/>
-          <p:cNvSpPr/>
-          <p:nvPr/>
-        </p:nvSpPr>
-        <p:spPr>
-          <a:xfrm>
-            <a:off x="320040" y="0"/>
-            <a:ext cx="8503920" cy="658368"/>
-          </a:xfrm>
-          <a:prstGeom prst="rect">
-            <a:avLst/>
-          </a:prstGeom>
-          <a:noFill/>
-          <a:ln/>
-        </p:spPr>
-        <p:txBody>
-          <a:bodyPr wrap="square" lIns="0" tIns="0" rIns="0" bIns="0" rtlCol="0" anchor="ctr"/>
-          <a:lstStyle/>
-          <a:p>
-            <a:pPr marL="0" indent="0">
-              <a:buNone/>
-            </a:pPr>
-            <a:r>
-              <a:rPr lang="en-US" sz="2200" b="1" dirty="0">
-                <a:solidFill>
-                  <a:srgbClr val="FFFFFF"/>
-                </a:solidFill>
-                <a:latin typeface="Garamond" pitchFamily="34" charset="0"/>
-                <a:ea typeface="Garamond" pitchFamily="34" charset="-122"/>
-                <a:cs typeface="Garamond" pitchFamily="34" charset="-120"/>
-              </a:rPr>
-              <a:t>Conclusion &amp; Future Scope</a:t>
-            </a:r>
-            <a:endParaRPr lang="en-US" sz="2200" dirty="0"/>
-          </a:p>
-        </p:txBody>
-      </p:sp>
-      <p:sp>
-        <p:nvSpPr>
-          <p:cNvPr id="4" name="Shape 2"/>
-          <p:cNvSpPr/>
-          <p:nvPr/>
-        </p:nvSpPr>
-        <p:spPr>
-          <a:xfrm>
-            <a:off x="0" y="658368"/>
-            <a:ext cx="9144000" cy="50292"/>
-          </a:xfrm>
-          <a:prstGeom prst="rect">
-            <a:avLst/>
-          </a:prstGeom>
-          <a:solidFill>
-            <a:srgbClr val="C00000"/>
-          </a:solidFill>
-          <a:ln w="12700">
-            <a:solidFill>
-              <a:srgbClr val="C00000"/>
-            </a:solidFill>
-            <a:prstDash val="solid"/>
-          </a:ln>
-        </p:spPr>
-        <p:txBody>
-          <a:bodyPr/>
-          <a:lstStyle/>
-          <a:p>
-            <a:endParaRPr lang="en-IN"/>
-          </a:p>
-        </p:txBody>
-      </p:sp>
-      <p:sp>
-        <p:nvSpPr>
-          <p:cNvPr id="5" name="Shape 3"/>
-          <p:cNvSpPr/>
-          <p:nvPr/>
-        </p:nvSpPr>
-        <p:spPr>
-          <a:xfrm>
-            <a:off x="274320" y="804672"/>
-            <a:ext cx="4114800" cy="256032"/>
-          </a:xfrm>
-          <a:prstGeom prst="rect">
-            <a:avLst/>
-          </a:prstGeom>
-          <a:solidFill>
-            <a:srgbClr val="C00000"/>
-          </a:solidFill>
-          <a:ln w="12700">
-            <a:solidFill>
-              <a:srgbClr val="C00000"/>
-            </a:solidFill>
-            <a:prstDash val="solid"/>
-          </a:ln>
-        </p:spPr>
-        <p:txBody>
-          <a:bodyPr/>
-          <a:lstStyle/>
-          <a:p>
-            <a:endParaRPr lang="en-IN"/>
-          </a:p>
-        </p:txBody>
-      </p:sp>
-      <p:sp>
-        <p:nvSpPr>
-          <p:cNvPr id="6" name="Text 4"/>
-          <p:cNvSpPr/>
-          <p:nvPr/>
-        </p:nvSpPr>
-        <p:spPr>
-          <a:xfrm>
-            <a:off x="274320" y="804672"/>
-            <a:ext cx="4114800" cy="256032"/>
-          </a:xfrm>
-          <a:prstGeom prst="rect">
-            <a:avLst/>
-          </a:prstGeom>
-          <a:noFill/>
-          <a:ln/>
-        </p:spPr>
-        <p:txBody>
-          <a:bodyPr wrap="square" lIns="0" tIns="0" rIns="0" bIns="0" rtlCol="0" anchor="ctr"/>
-          <a:lstStyle/>
-          <a:p>
-            <a:pPr marL="0" indent="0" algn="ctr">
-              <a:buNone/>
-            </a:pPr>
-            <a:r>
-              <a:rPr lang="en-US" sz="1000" b="1" dirty="0">
-                <a:solidFill>
-                  <a:srgbClr val="FFFFFF"/>
-                </a:solidFill>
-                <a:latin typeface="Calibri" pitchFamily="34" charset="0"/>
-                <a:ea typeface="Calibri" pitchFamily="34" charset="-122"/>
-                <a:cs typeface="Calibri" pitchFamily="34" charset="-120"/>
-              </a:rPr>
-              <a:t>CONCLUSIONS</a:t>
-            </a:r>
-            <a:endParaRPr lang="en-US" sz="1000" dirty="0"/>
-          </a:p>
-        </p:txBody>
-      </p:sp>
-      <p:sp>
-        <p:nvSpPr>
-          <p:cNvPr id="7" name="Text 5"/>
-          <p:cNvSpPr/>
-          <p:nvPr/>
-        </p:nvSpPr>
-        <p:spPr>
-          <a:xfrm>
-            <a:off x="365760" y="1143000"/>
-            <a:ext cx="3931920" cy="3657600"/>
-          </a:xfrm>
-          <a:prstGeom prst="rect">
-            <a:avLst/>
-          </a:prstGeom>
-          <a:noFill/>
-          <a:ln/>
-        </p:spPr>
-        <p:txBody>
-          <a:bodyPr wrap="square" rtlCol="0" anchor="t"/>
-          <a:lstStyle/>
-          <a:p>
-            <a:pPr marL="342900" indent="-342900">
-              <a:buSzPct val="100000"/>
-              <a:buChar char="•"/>
-            </a:pPr>
-            <a:r>
-              <a:rPr lang="en-US" sz="1100" dirty="0">
-                <a:solidFill>
-                  <a:srgbClr val="1C2120"/>
-                </a:solidFill>
-                <a:latin typeface="Calibri" pitchFamily="34" charset="0"/>
-                <a:ea typeface="Calibri" pitchFamily="34" charset="-122"/>
-                <a:cs typeface="Calibri" pitchFamily="34" charset="-120"/>
-              </a:rPr>
-              <a:t>TSA-SAC achieves highest profit ($1,039/ha) and IWUE (6.60 kg/mm) among all evaluated policies</a:t>
-            </a:r>
-            <a:endParaRPr lang="en-US" sz="1100" dirty="0"/>
-          </a:p>
-          <a:p>
-            <a:pPr marL="342900" indent="-342900">
-              <a:buSzPct val="100000"/>
-              <a:buChar char="•"/>
-            </a:pPr>
-            <a:r>
-              <a:rPr lang="en-US" sz="1100" dirty="0">
-                <a:solidFill>
-                  <a:srgbClr val="1C2120"/>
-                </a:solidFill>
-                <a:latin typeface="Calibri" pitchFamily="34" charset="0"/>
-                <a:ea typeface="Calibri" pitchFamily="34" charset="-122"/>
-                <a:cs typeface="Calibri" pitchFamily="34" charset="-120"/>
-              </a:rPr>
-              <a:t>BiLSTM + temporal attention encoder successfully captures sequential crop-growth dynamics</a:t>
-            </a:r>
-            <a:endParaRPr lang="en-US" sz="1100" dirty="0"/>
-          </a:p>
-          <a:p>
-            <a:pPr marL="342900" indent="-342900">
-              <a:buSzPct val="100000"/>
-              <a:buChar char="•"/>
-            </a:pPr>
-            <a:r>
-              <a:rPr lang="en-US" sz="1100" dirty="0">
-                <a:solidFill>
-                  <a:srgbClr val="1C2120"/>
-                </a:solidFill>
-                <a:latin typeface="Calibri" pitchFamily="34" charset="0"/>
-                <a:ea typeface="Calibri" pitchFamily="34" charset="-122"/>
-                <a:cs typeface="Calibri" pitchFamily="34" charset="-120"/>
-              </a:rPr>
-              <a:t>SAC significantly outperforms PPO (+160%) and DDPG (+22%) for long-horizon agricultural scheduling</a:t>
-            </a:r>
-            <a:endParaRPr lang="en-US" sz="1100" dirty="0"/>
-          </a:p>
-          <a:p>
-            <a:pPr marL="342900" indent="-342900">
-              <a:buSzPct val="100000"/>
-              <a:buChar char="•"/>
-            </a:pPr>
-            <a:r>
-              <a:rPr lang="en-US" sz="1100" dirty="0">
-                <a:solidFill>
-                  <a:srgbClr val="1C2120"/>
-                </a:solidFill>
-                <a:latin typeface="Calibri" pitchFamily="34" charset="0"/>
-                <a:ea typeface="Calibri" pitchFamily="34" charset="-122"/>
-                <a:cs typeface="Calibri" pitchFamily="34" charset="-120"/>
-              </a:rPr>
-              <a:t>Stage-aware multi-objective reward enables smarter water allocation at critical growth stages</a:t>
-            </a:r>
-            <a:endParaRPr lang="en-US" sz="1100" dirty="0"/>
-          </a:p>
-          <a:p>
-            <a:pPr marL="342900" indent="-342900">
-              <a:buSzPct val="100000"/>
-              <a:buChar char="•"/>
-            </a:pPr>
-            <a:r>
-              <a:rPr lang="en-US" sz="1100" dirty="0">
-                <a:solidFill>
-                  <a:srgbClr val="1C2120"/>
-                </a:solidFill>
-                <a:latin typeface="Calibri" pitchFamily="34" charset="0"/>
-                <a:ea typeface="Calibri" pitchFamily="34" charset="-122"/>
-                <a:cs typeface="Calibri" pitchFamily="34" charset="-120"/>
-              </a:rPr>
-              <a:t>Multi-crop transfer learning reduces training time by ~40% on secondary crops (wheat, maize)</a:t>
-            </a:r>
-            <a:endParaRPr lang="en-US" sz="1100" dirty="0"/>
-          </a:p>
-          <a:p>
-            <a:pPr marL="342900" indent="-342900">
-              <a:buSzPct val="100000"/>
-              <a:buChar char="•"/>
-            </a:pPr>
-            <a:r>
-              <a:rPr lang="en-US" sz="1100" dirty="0">
-                <a:solidFill>
-                  <a:srgbClr val="1C2120"/>
-                </a:solidFill>
-                <a:latin typeface="Calibri" pitchFamily="34" charset="0"/>
-                <a:ea typeface="Calibri" pitchFamily="34" charset="-122"/>
-                <a:cs typeface="Calibri" pitchFamily="34" charset="-120"/>
-              </a:rPr>
-              <a:t>Multi-zone shared-reservoir environment demonstrates scalability to real farm layouts</a:t>
-            </a:r>
-            <a:endParaRPr lang="en-US" sz="1100" dirty="0"/>
-          </a:p>
-          <a:p>
-            <a:pPr marL="342900" indent="-342900">
-              <a:buSzPct val="100000"/>
-              <a:buChar char="•"/>
-            </a:pPr>
-            <a:r>
-              <a:rPr lang="en-US" sz="1100" dirty="0">
-                <a:solidFill>
-                  <a:srgbClr val="1C2120"/>
-                </a:solidFill>
-                <a:latin typeface="Calibri" pitchFamily="34" charset="0"/>
-                <a:ea typeface="Calibri" pitchFamily="34" charset="-122"/>
-                <a:cs typeface="Calibri" pitchFamily="34" charset="-120"/>
-              </a:rPr>
-              <a:t>All 4 parameters in Bellman equation successfully aligned: S, A, R, P formulation validated empirically</a:t>
-            </a:r>
-            <a:endParaRPr lang="en-US" sz="1100" dirty="0"/>
-          </a:p>
-        </p:txBody>
-      </p:sp>
-      <p:sp>
-        <p:nvSpPr>
-          <p:cNvPr id="8" name="Shape 6"/>
-          <p:cNvSpPr/>
-          <p:nvPr/>
-        </p:nvSpPr>
-        <p:spPr>
-          <a:xfrm>
-            <a:off x="4754880" y="804672"/>
-            <a:ext cx="4023360" cy="256032"/>
-          </a:xfrm>
-          <a:prstGeom prst="rect">
-            <a:avLst/>
-          </a:prstGeom>
-          <a:solidFill>
-            <a:srgbClr val="C00000"/>
-          </a:solidFill>
-          <a:ln w="12700">
-            <a:solidFill>
-              <a:srgbClr val="C00000"/>
-            </a:solidFill>
-            <a:prstDash val="solid"/>
-          </a:ln>
-        </p:spPr>
-        <p:txBody>
-          <a:bodyPr/>
-          <a:lstStyle/>
-          <a:p>
-            <a:endParaRPr lang="en-IN"/>
-          </a:p>
-        </p:txBody>
-      </p:sp>
-      <p:sp>
-        <p:nvSpPr>
-          <p:cNvPr id="9" name="Text 7"/>
-          <p:cNvSpPr/>
-          <p:nvPr/>
-        </p:nvSpPr>
-        <p:spPr>
-          <a:xfrm>
-            <a:off x="4754880" y="804672"/>
-            <a:ext cx="4023360" cy="256032"/>
-          </a:xfrm>
-          <a:prstGeom prst="rect">
-            <a:avLst/>
-          </a:prstGeom>
-          <a:noFill/>
-          <a:ln/>
-        </p:spPr>
-        <p:txBody>
-          <a:bodyPr wrap="square" lIns="0" tIns="0" rIns="0" bIns="0" rtlCol="0" anchor="ctr"/>
-          <a:lstStyle/>
-          <a:p>
-            <a:pPr marL="0" indent="0" algn="ctr">
-              <a:buNone/>
-            </a:pPr>
-            <a:r>
-              <a:rPr lang="en-US" sz="1000" b="1" dirty="0">
-                <a:solidFill>
-                  <a:srgbClr val="FFFFFF"/>
-                </a:solidFill>
-                <a:latin typeface="Calibri" pitchFamily="34" charset="0"/>
-                <a:ea typeface="Calibri" pitchFamily="34" charset="-122"/>
-                <a:cs typeface="Calibri" pitchFamily="34" charset="-120"/>
-              </a:rPr>
-              <a:t>FUTURE SCOPE</a:t>
-            </a:r>
-            <a:endParaRPr lang="en-US" sz="1000" dirty="0"/>
-          </a:p>
-        </p:txBody>
-      </p:sp>
-      <p:sp>
-        <p:nvSpPr>
-          <p:cNvPr id="10" name="Shape 8"/>
-          <p:cNvSpPr/>
-          <p:nvPr/>
-        </p:nvSpPr>
-        <p:spPr>
-          <a:xfrm>
-            <a:off x="4754880" y="1143000"/>
-            <a:ext cx="320040" cy="475488"/>
-          </a:xfrm>
-          <a:prstGeom prst="rect">
-            <a:avLst/>
-          </a:prstGeom>
-          <a:solidFill>
-            <a:srgbClr val="1F3864"/>
-          </a:solidFill>
-          <a:ln w="12700">
-            <a:solidFill>
-              <a:srgbClr val="1F3864"/>
-            </a:solidFill>
-            <a:prstDash val="solid"/>
-          </a:ln>
-        </p:spPr>
-        <p:txBody>
-          <a:bodyPr/>
-          <a:lstStyle/>
-          <a:p>
-            <a:endParaRPr lang="en-IN"/>
-          </a:p>
-        </p:txBody>
-      </p:sp>
-      <p:sp>
-        <p:nvSpPr>
-          <p:cNvPr id="11" name="Text 9"/>
-          <p:cNvSpPr/>
-          <p:nvPr/>
-        </p:nvSpPr>
-        <p:spPr>
-          <a:xfrm>
-            <a:off x="4754880" y="1143000"/>
-            <a:ext cx="320040" cy="475488"/>
-          </a:xfrm>
-          <a:prstGeom prst="rect">
-            <a:avLst/>
-          </a:prstGeom>
-          <a:noFill/>
-          <a:ln/>
-        </p:spPr>
-        <p:txBody>
-          <a:bodyPr wrap="square" lIns="0" tIns="0" rIns="0" bIns="0" rtlCol="0" anchor="ctr"/>
-          <a:lstStyle/>
-          <a:p>
-            <a:pPr marL="0" indent="0" algn="ctr">
-              <a:buNone/>
-            </a:pPr>
-            <a:r>
-              <a:rPr lang="en-US" sz="1100" b="1" dirty="0">
-                <a:solidFill>
-                  <a:srgbClr val="FFFFFF"/>
-                </a:solidFill>
-                <a:latin typeface="Calibri" pitchFamily="34" charset="0"/>
-                <a:ea typeface="Calibri" pitchFamily="34" charset="-122"/>
-                <a:cs typeface="Calibri" pitchFamily="34" charset="-120"/>
-              </a:rPr>
-              <a:t>N</a:t>
-            </a:r>
-            <a:endParaRPr lang="en-US" sz="1100" dirty="0"/>
-          </a:p>
-        </p:txBody>
-      </p:sp>
-      <p:sp>
-        <p:nvSpPr>
-          <p:cNvPr id="12" name="Text 10"/>
-          <p:cNvSpPr/>
-          <p:nvPr/>
-        </p:nvSpPr>
-        <p:spPr>
-          <a:xfrm>
-            <a:off x="5166360" y="1161288"/>
-            <a:ext cx="3520440" cy="228600"/>
-          </a:xfrm>
-          <a:prstGeom prst="rect">
-            <a:avLst/>
-          </a:prstGeom>
-          <a:noFill/>
-          <a:ln/>
-        </p:spPr>
-        <p:txBody>
-          <a:bodyPr wrap="square" rtlCol="0" anchor="ctr"/>
-          <a:lstStyle/>
-          <a:p>
-            <a:pPr marL="0" indent="0">
-              <a:buNone/>
-            </a:pPr>
-            <a:r>
-              <a:rPr lang="en-US" sz="1100" b="1" dirty="0">
-                <a:solidFill>
-                  <a:srgbClr val="1F3864"/>
-                </a:solidFill>
-                <a:latin typeface="Calibri" pitchFamily="34" charset="0"/>
-                <a:ea typeface="Calibri" pitchFamily="34" charset="-122"/>
-                <a:cs typeface="Calibri" pitchFamily="34" charset="-120"/>
-              </a:rPr>
-              <a:t>Nitrogen Management</a:t>
-            </a:r>
-            <a:endParaRPr lang="en-US" sz="1100" dirty="0"/>
-          </a:p>
-        </p:txBody>
-      </p:sp>
-      <p:sp>
-        <p:nvSpPr>
-          <p:cNvPr id="13" name="Text 11"/>
-          <p:cNvSpPr/>
-          <p:nvPr/>
-        </p:nvSpPr>
-        <p:spPr>
-          <a:xfrm>
-            <a:off x="5166360" y="1389888"/>
-            <a:ext cx="3520440" cy="256032"/>
-          </a:xfrm>
-          <a:prstGeom prst="rect">
-            <a:avLst/>
-          </a:prstGeom>
-          <a:noFill/>
-          <a:ln/>
-        </p:spPr>
-        <p:txBody>
-          <a:bodyPr wrap="square" rtlCol="0" anchor="ctr"/>
-          <a:lstStyle/>
-          <a:p>
-            <a:pPr marL="0" indent="0">
-              <a:buNone/>
-            </a:pPr>
-            <a:r>
-              <a:rPr lang="en-US" sz="950" dirty="0">
-                <a:solidFill>
-                  <a:srgbClr val="555555"/>
-                </a:solidFill>
-                <a:latin typeface="Calibri" pitchFamily="34" charset="0"/>
-                <a:ea typeface="Calibri" pitchFamily="34" charset="-122"/>
-                <a:cs typeface="Calibri" pitchFamily="34" charset="-120"/>
-              </a:rPr>
-              <a:t>Add soil nitrogen &amp; fertilizer as state variables and action dimensions</a:t>
-            </a:r>
-            <a:endParaRPr lang="en-US" sz="950" dirty="0"/>
-          </a:p>
-        </p:txBody>
-      </p:sp>
-      <p:sp>
-        <p:nvSpPr>
-          <p:cNvPr id="14" name="Shape 12"/>
-          <p:cNvSpPr/>
-          <p:nvPr/>
-        </p:nvSpPr>
-        <p:spPr>
-          <a:xfrm>
-            <a:off x="4754880" y="1709928"/>
-            <a:ext cx="320040" cy="475488"/>
-          </a:xfrm>
-          <a:prstGeom prst="rect">
-            <a:avLst/>
-          </a:prstGeom>
-          <a:solidFill>
-            <a:srgbClr val="1F3864"/>
-          </a:solidFill>
-          <a:ln w="12700">
-            <a:solidFill>
-              <a:srgbClr val="1F3864"/>
-            </a:solidFill>
-            <a:prstDash val="solid"/>
-          </a:ln>
-        </p:spPr>
-        <p:txBody>
-          <a:bodyPr/>
-          <a:lstStyle/>
-          <a:p>
-            <a:endParaRPr lang="en-IN"/>
-          </a:p>
-        </p:txBody>
-      </p:sp>
-      <p:sp>
-        <p:nvSpPr>
-          <p:cNvPr id="15" name="Text 13"/>
-          <p:cNvSpPr/>
-          <p:nvPr/>
-        </p:nvSpPr>
-        <p:spPr>
-          <a:xfrm>
-            <a:off x="4754880" y="1709928"/>
-            <a:ext cx="320040" cy="475488"/>
-          </a:xfrm>
-          <a:prstGeom prst="rect">
-            <a:avLst/>
-          </a:prstGeom>
-          <a:noFill/>
-          <a:ln/>
-        </p:spPr>
-        <p:txBody>
-          <a:bodyPr wrap="square" lIns="0" tIns="0" rIns="0" bIns="0" rtlCol="0" anchor="ctr"/>
-          <a:lstStyle/>
-          <a:p>
-            <a:pPr marL="0" indent="0" algn="ctr">
-              <a:buNone/>
-            </a:pPr>
-            <a:r>
-              <a:rPr lang="en-US" sz="1100" b="1" dirty="0">
-                <a:solidFill>
-                  <a:srgbClr val="FFFFFF"/>
-                </a:solidFill>
-                <a:latin typeface="Calibri" pitchFamily="34" charset="0"/>
-                <a:ea typeface="Calibri" pitchFamily="34" charset="-122"/>
-                <a:cs typeface="Calibri" pitchFamily="34" charset="-120"/>
-              </a:rPr>
-              <a:t>M</a:t>
-            </a:r>
-            <a:endParaRPr lang="en-US" sz="1100" dirty="0"/>
-          </a:p>
-        </p:txBody>
-      </p:sp>
-      <p:sp>
-        <p:nvSpPr>
-          <p:cNvPr id="16" name="Text 14"/>
-          <p:cNvSpPr/>
-          <p:nvPr/>
-        </p:nvSpPr>
-        <p:spPr>
-          <a:xfrm>
-            <a:off x="5166360" y="1728216"/>
-            <a:ext cx="3520440" cy="228600"/>
-          </a:xfrm>
-          <a:prstGeom prst="rect">
-            <a:avLst/>
-          </a:prstGeom>
-          <a:noFill/>
-          <a:ln/>
-        </p:spPr>
-        <p:txBody>
-          <a:bodyPr wrap="square" rtlCol="0" anchor="ctr"/>
-          <a:lstStyle/>
-          <a:p>
-            <a:pPr marL="0" indent="0">
-              <a:buNone/>
-            </a:pPr>
-            <a:r>
-              <a:rPr lang="en-US" sz="1100" b="1" dirty="0">
-                <a:solidFill>
-                  <a:srgbClr val="1F3864"/>
-                </a:solidFill>
-                <a:latin typeface="Calibri" pitchFamily="34" charset="0"/>
-                <a:ea typeface="Calibri" pitchFamily="34" charset="-122"/>
-                <a:cs typeface="Calibri" pitchFamily="34" charset="-120"/>
-              </a:rPr>
-              <a:t>Market Price Uncertainty</a:t>
-            </a:r>
-            <a:endParaRPr lang="en-US" sz="1100" dirty="0"/>
-          </a:p>
-        </p:txBody>
-      </p:sp>
-      <p:sp>
-        <p:nvSpPr>
-          <p:cNvPr id="17" name="Text 15"/>
-          <p:cNvSpPr/>
-          <p:nvPr/>
-        </p:nvSpPr>
-        <p:spPr>
-          <a:xfrm>
-            <a:off x="5166360" y="1956816"/>
-            <a:ext cx="3520440" cy="256032"/>
-          </a:xfrm>
-          <a:prstGeom prst="rect">
-            <a:avLst/>
-          </a:prstGeom>
-          <a:noFill/>
-          <a:ln/>
-        </p:spPr>
-        <p:txBody>
-          <a:bodyPr wrap="square" rtlCol="0" anchor="ctr"/>
-          <a:lstStyle/>
-          <a:p>
-            <a:pPr marL="0" indent="0">
-              <a:buNone/>
-            </a:pPr>
-            <a:r>
-              <a:rPr lang="en-US" sz="950" dirty="0">
-                <a:solidFill>
-                  <a:srgbClr val="555555"/>
-                </a:solidFill>
-                <a:latin typeface="Calibri" pitchFamily="34" charset="0"/>
-                <a:ea typeface="Calibri" pitchFamily="34" charset="-122"/>
-                <a:cs typeface="Calibri" pitchFamily="34" charset="-120"/>
-              </a:rPr>
-              <a:t>Stochastic crop prices modeled as part of the RL environment</a:t>
-            </a:r>
-            <a:endParaRPr lang="en-US" sz="950" dirty="0"/>
-          </a:p>
-        </p:txBody>
-      </p:sp>
-      <p:sp>
-        <p:nvSpPr>
-          <p:cNvPr id="18" name="Shape 16"/>
-          <p:cNvSpPr/>
-          <p:nvPr/>
-        </p:nvSpPr>
-        <p:spPr>
-          <a:xfrm>
-            <a:off x="4754880" y="2276856"/>
-            <a:ext cx="320040" cy="475488"/>
-          </a:xfrm>
-          <a:prstGeom prst="rect">
-            <a:avLst/>
-          </a:prstGeom>
-          <a:solidFill>
-            <a:srgbClr val="1F3864"/>
-          </a:solidFill>
-          <a:ln w="12700">
-            <a:solidFill>
-              <a:srgbClr val="1F3864"/>
-            </a:solidFill>
-            <a:prstDash val="solid"/>
-          </a:ln>
-        </p:spPr>
-        <p:txBody>
-          <a:bodyPr/>
-          <a:lstStyle/>
-          <a:p>
-            <a:endParaRPr lang="en-IN"/>
-          </a:p>
-        </p:txBody>
-      </p:sp>
-      <p:sp>
-        <p:nvSpPr>
-          <p:cNvPr id="19" name="Text 17"/>
-          <p:cNvSpPr/>
-          <p:nvPr/>
-        </p:nvSpPr>
-        <p:spPr>
-          <a:xfrm>
-            <a:off x="4754880" y="2276856"/>
-            <a:ext cx="320040" cy="475488"/>
-          </a:xfrm>
-          <a:prstGeom prst="rect">
-            <a:avLst/>
-          </a:prstGeom>
-          <a:noFill/>
-          <a:ln/>
-        </p:spPr>
-        <p:txBody>
-          <a:bodyPr wrap="square" lIns="0" tIns="0" rIns="0" bIns="0" rtlCol="0" anchor="ctr"/>
-          <a:lstStyle/>
-          <a:p>
-            <a:pPr marL="0" indent="0" algn="ctr">
-              <a:buNone/>
-            </a:pPr>
-            <a:r>
-              <a:rPr lang="en-US" sz="1100" b="1" dirty="0">
-                <a:solidFill>
-                  <a:srgbClr val="FFFFFF"/>
-                </a:solidFill>
-                <a:latin typeface="Calibri" pitchFamily="34" charset="0"/>
-                <a:ea typeface="Calibri" pitchFamily="34" charset="-122"/>
-                <a:cs typeface="Calibri" pitchFamily="34" charset="-120"/>
-              </a:rPr>
-              <a:t>C</a:t>
-            </a:r>
-            <a:endParaRPr lang="en-US" sz="1100" dirty="0"/>
-          </a:p>
-        </p:txBody>
-      </p:sp>
-      <p:sp>
-        <p:nvSpPr>
-          <p:cNvPr id="20" name="Text 18"/>
-          <p:cNvSpPr/>
-          <p:nvPr/>
-        </p:nvSpPr>
-        <p:spPr>
-          <a:xfrm>
-            <a:off x="5166360" y="2295144"/>
-            <a:ext cx="3520440" cy="228600"/>
-          </a:xfrm>
-          <a:prstGeom prst="rect">
-            <a:avLst/>
-          </a:prstGeom>
-          <a:noFill/>
-          <a:ln/>
-        </p:spPr>
-        <p:txBody>
-          <a:bodyPr wrap="square" rtlCol="0" anchor="ctr"/>
-          <a:lstStyle/>
-          <a:p>
-            <a:pPr marL="0" indent="0">
-              <a:buNone/>
-            </a:pPr>
-            <a:r>
-              <a:rPr lang="en-US" sz="1100" b="1" dirty="0">
-                <a:solidFill>
-                  <a:srgbClr val="1F3864"/>
-                </a:solidFill>
-                <a:latin typeface="Calibri" pitchFamily="34" charset="0"/>
-                <a:ea typeface="Calibri" pitchFamily="34" charset="-122"/>
-                <a:cs typeface="Calibri" pitchFamily="34" charset="-120"/>
-              </a:rPr>
-              <a:t>Climate Change Scenarios</a:t>
-            </a:r>
-            <a:endParaRPr lang="en-US" sz="1100" dirty="0"/>
-          </a:p>
-        </p:txBody>
-      </p:sp>
-      <p:sp>
-        <p:nvSpPr>
-          <p:cNvPr id="21" name="Text 19"/>
-          <p:cNvSpPr/>
-          <p:nvPr/>
-        </p:nvSpPr>
-        <p:spPr>
-          <a:xfrm>
-            <a:off x="5166360" y="2523744"/>
-            <a:ext cx="3520440" cy="256032"/>
-          </a:xfrm>
-          <a:prstGeom prst="rect">
-            <a:avLst/>
-          </a:prstGeom>
-          <a:noFill/>
-          <a:ln/>
-        </p:spPr>
-        <p:txBody>
-          <a:bodyPr wrap="square" rtlCol="0" anchor="ctr"/>
-          <a:lstStyle/>
-          <a:p>
-            <a:pPr marL="0" indent="0">
-              <a:buNone/>
-            </a:pPr>
-            <a:r>
-              <a:rPr lang="en-US" sz="950" dirty="0">
-                <a:solidFill>
-                  <a:srgbClr val="555555"/>
-                </a:solidFill>
-                <a:latin typeface="Calibri" pitchFamily="34" charset="0"/>
-                <a:ea typeface="Calibri" pitchFamily="34" charset="-122"/>
-                <a:cs typeface="Calibri" pitchFamily="34" charset="-120"/>
-              </a:rPr>
-              <a:t>Train under CMIP6 projected future weather (2040–2070)</a:t>
-            </a:r>
-            <a:endParaRPr lang="en-US" sz="950" dirty="0"/>
-          </a:p>
-        </p:txBody>
-      </p:sp>
-      <p:sp>
-        <p:nvSpPr>
-          <p:cNvPr id="22" name="Shape 20"/>
-          <p:cNvSpPr/>
-          <p:nvPr/>
-        </p:nvSpPr>
-        <p:spPr>
-          <a:xfrm>
-            <a:off x="4754880" y="2843784"/>
-            <a:ext cx="320040" cy="475488"/>
-          </a:xfrm>
-          <a:prstGeom prst="rect">
-            <a:avLst/>
-          </a:prstGeom>
-          <a:solidFill>
-            <a:srgbClr val="1F3864"/>
-          </a:solidFill>
-          <a:ln w="12700">
-            <a:solidFill>
-              <a:srgbClr val="1F3864"/>
-            </a:solidFill>
-            <a:prstDash val="solid"/>
-          </a:ln>
-        </p:spPr>
-        <p:txBody>
-          <a:bodyPr/>
-          <a:lstStyle/>
-          <a:p>
-            <a:endParaRPr lang="en-IN"/>
-          </a:p>
-        </p:txBody>
-      </p:sp>
-      <p:sp>
-        <p:nvSpPr>
-          <p:cNvPr id="23" name="Text 21"/>
-          <p:cNvSpPr/>
-          <p:nvPr/>
-        </p:nvSpPr>
-        <p:spPr>
-          <a:xfrm>
-            <a:off x="4754880" y="2843784"/>
-            <a:ext cx="320040" cy="475488"/>
-          </a:xfrm>
-          <a:prstGeom prst="rect">
-            <a:avLst/>
-          </a:prstGeom>
-          <a:noFill/>
-          <a:ln/>
-        </p:spPr>
-        <p:txBody>
-          <a:bodyPr wrap="square" lIns="0" tIns="0" rIns="0" bIns="0" rtlCol="0" anchor="ctr"/>
-          <a:lstStyle/>
-          <a:p>
-            <a:pPr marL="0" indent="0" algn="ctr">
-              <a:buNone/>
-            </a:pPr>
-            <a:r>
-              <a:rPr lang="en-US" sz="1100" b="1" dirty="0">
-                <a:solidFill>
-                  <a:srgbClr val="FFFFFF"/>
-                </a:solidFill>
-                <a:latin typeface="Calibri" pitchFamily="34" charset="0"/>
-                <a:ea typeface="Calibri" pitchFamily="34" charset="-122"/>
-                <a:cs typeface="Calibri" pitchFamily="34" charset="-120"/>
-              </a:rPr>
-              <a:t>D</a:t>
-            </a:r>
-            <a:endParaRPr lang="en-US" sz="1100" dirty="0"/>
-          </a:p>
-        </p:txBody>
-      </p:sp>
-      <p:sp>
-        <p:nvSpPr>
-          <p:cNvPr id="24" name="Text 22"/>
-          <p:cNvSpPr/>
-          <p:nvPr/>
-        </p:nvSpPr>
-        <p:spPr>
-          <a:xfrm>
-            <a:off x="5166360" y="2862072"/>
-            <a:ext cx="3520440" cy="228600"/>
-          </a:xfrm>
-          <a:prstGeom prst="rect">
-            <a:avLst/>
-          </a:prstGeom>
-          <a:noFill/>
-          <a:ln/>
-        </p:spPr>
-        <p:txBody>
-          <a:bodyPr wrap="square" rtlCol="0" anchor="ctr"/>
-          <a:lstStyle/>
-          <a:p>
-            <a:pPr marL="0" indent="0">
-              <a:buNone/>
-            </a:pPr>
-            <a:r>
-              <a:rPr lang="en-US" sz="1100" b="1" dirty="0">
-                <a:solidFill>
-                  <a:srgbClr val="1F3864"/>
-                </a:solidFill>
-                <a:latin typeface="Calibri" pitchFamily="34" charset="0"/>
-                <a:ea typeface="Calibri" pitchFamily="34" charset="-122"/>
-                <a:cs typeface="Calibri" pitchFamily="34" charset="-120"/>
-              </a:rPr>
-              <a:t>DSSAT Integration</a:t>
-            </a:r>
-            <a:endParaRPr lang="en-US" sz="1100" dirty="0"/>
-          </a:p>
-        </p:txBody>
-      </p:sp>
-      <p:sp>
-        <p:nvSpPr>
-          <p:cNvPr id="25" name="Text 23"/>
-          <p:cNvSpPr/>
-          <p:nvPr/>
-        </p:nvSpPr>
-        <p:spPr>
-          <a:xfrm>
-            <a:off x="5166360" y="3090672"/>
-            <a:ext cx="3520440" cy="256032"/>
-          </a:xfrm>
-          <a:prstGeom prst="rect">
-            <a:avLst/>
-          </a:prstGeom>
-          <a:noFill/>
-          <a:ln/>
-        </p:spPr>
-        <p:txBody>
-          <a:bodyPr wrap="square" rtlCol="0" anchor="ctr"/>
-          <a:lstStyle/>
-          <a:p>
-            <a:pPr marL="0" indent="0">
-              <a:buNone/>
-            </a:pPr>
-            <a:r>
-              <a:rPr lang="en-US" sz="950" dirty="0">
-                <a:solidFill>
-                  <a:srgbClr val="555555"/>
-                </a:solidFill>
-                <a:latin typeface="Calibri" pitchFamily="34" charset="0"/>
-                <a:ea typeface="Calibri" pitchFamily="34" charset="-122"/>
-                <a:cs typeface="Calibri" pitchFamily="34" charset="-120"/>
-              </a:rPr>
-              <a:t>Replace surrogate with actual DSSAT API for real-world calibration</a:t>
-            </a:r>
-            <a:endParaRPr lang="en-US" sz="950" dirty="0"/>
-          </a:p>
-        </p:txBody>
-      </p:sp>
-      <p:sp>
-        <p:nvSpPr>
-          <p:cNvPr id="26" name="Shape 24"/>
-          <p:cNvSpPr/>
-          <p:nvPr/>
-        </p:nvSpPr>
-        <p:spPr>
-          <a:xfrm>
-            <a:off x="4754880" y="3410712"/>
-            <a:ext cx="320040" cy="475488"/>
-          </a:xfrm>
-          <a:prstGeom prst="rect">
-            <a:avLst/>
-          </a:prstGeom>
-          <a:solidFill>
-            <a:srgbClr val="1F3864"/>
-          </a:solidFill>
-          <a:ln w="12700">
-            <a:solidFill>
-              <a:srgbClr val="1F3864"/>
-            </a:solidFill>
-            <a:prstDash val="solid"/>
-          </a:ln>
-        </p:spPr>
-        <p:txBody>
-          <a:bodyPr/>
-          <a:lstStyle/>
-          <a:p>
-            <a:endParaRPr lang="en-IN"/>
-          </a:p>
-        </p:txBody>
-      </p:sp>
-      <p:sp>
-        <p:nvSpPr>
-          <p:cNvPr id="27" name="Text 25"/>
-          <p:cNvSpPr/>
-          <p:nvPr/>
-        </p:nvSpPr>
-        <p:spPr>
-          <a:xfrm>
-            <a:off x="4754880" y="3410712"/>
-            <a:ext cx="320040" cy="475488"/>
-          </a:xfrm>
-          <a:prstGeom prst="rect">
-            <a:avLst/>
-          </a:prstGeom>
-          <a:noFill/>
-          <a:ln/>
-        </p:spPr>
-        <p:txBody>
-          <a:bodyPr wrap="square" lIns="0" tIns="0" rIns="0" bIns="0" rtlCol="0" anchor="ctr"/>
-          <a:lstStyle/>
-          <a:p>
-            <a:pPr marL="0" indent="0" algn="ctr">
-              <a:buNone/>
-            </a:pPr>
-            <a:r>
-              <a:rPr lang="en-US" sz="1100" b="1" dirty="0">
-                <a:solidFill>
-                  <a:srgbClr val="FFFFFF"/>
-                </a:solidFill>
-                <a:latin typeface="Calibri" pitchFamily="34" charset="0"/>
-                <a:ea typeface="Calibri" pitchFamily="34" charset="-122"/>
-                <a:cs typeface="Calibri" pitchFamily="34" charset="-120"/>
-              </a:rPr>
-              <a:t>E</a:t>
-            </a:r>
-            <a:endParaRPr lang="en-US" sz="1100" dirty="0"/>
-          </a:p>
-        </p:txBody>
-      </p:sp>
-      <p:sp>
-        <p:nvSpPr>
-          <p:cNvPr id="28" name="Text 26"/>
-          <p:cNvSpPr/>
-          <p:nvPr/>
-        </p:nvSpPr>
-        <p:spPr>
-          <a:xfrm>
-            <a:off x="5166360" y="3429000"/>
-            <a:ext cx="3520440" cy="228600"/>
-          </a:xfrm>
-          <a:prstGeom prst="rect">
-            <a:avLst/>
-          </a:prstGeom>
-          <a:noFill/>
-          <a:ln/>
-        </p:spPr>
-        <p:txBody>
-          <a:bodyPr wrap="square" rtlCol="0" anchor="ctr"/>
-          <a:lstStyle/>
-          <a:p>
-            <a:pPr marL="0" indent="0">
-              <a:buNone/>
-            </a:pPr>
-            <a:r>
-              <a:rPr lang="en-US" sz="1100" b="1" dirty="0">
-                <a:solidFill>
-                  <a:srgbClr val="1F3864"/>
-                </a:solidFill>
-                <a:latin typeface="Calibri" pitchFamily="34" charset="0"/>
-                <a:ea typeface="Calibri" pitchFamily="34" charset="-122"/>
-                <a:cs typeface="Calibri" pitchFamily="34" charset="-120"/>
-              </a:rPr>
-              <a:t>Edge Deployment</a:t>
-            </a:r>
-            <a:endParaRPr lang="en-US" sz="1100" dirty="0"/>
-          </a:p>
-        </p:txBody>
-      </p:sp>
-      <p:sp>
-        <p:nvSpPr>
-          <p:cNvPr id="29" name="Text 27"/>
-          <p:cNvSpPr/>
-          <p:nvPr/>
-        </p:nvSpPr>
-        <p:spPr>
-          <a:xfrm>
-            <a:off x="5166360" y="3657600"/>
-            <a:ext cx="3520440" cy="256032"/>
-          </a:xfrm>
-          <a:prstGeom prst="rect">
-            <a:avLst/>
-          </a:prstGeom>
-          <a:noFill/>
-          <a:ln/>
-        </p:spPr>
-        <p:txBody>
-          <a:bodyPr wrap="square" rtlCol="0" anchor="ctr"/>
-          <a:lstStyle/>
-          <a:p>
-            <a:pPr marL="0" indent="0">
-              <a:buNone/>
-            </a:pPr>
-            <a:r>
-              <a:rPr lang="en-US" sz="950" dirty="0">
-                <a:solidFill>
-                  <a:srgbClr val="555555"/>
-                </a:solidFill>
-                <a:latin typeface="Calibri" pitchFamily="34" charset="0"/>
-                <a:ea typeface="Calibri" pitchFamily="34" charset="-122"/>
-                <a:cs typeface="Calibri" pitchFamily="34" charset="-120"/>
-              </a:rPr>
-              <a:t>Quantized model on Raspberry Pi / IoT sensor nodes for field use</a:t>
-            </a:r>
-            <a:endParaRPr lang="en-US" sz="950" dirty="0"/>
-          </a:p>
-        </p:txBody>
-      </p:sp>
-      <p:sp>
-        <p:nvSpPr>
-          <p:cNvPr id="30" name="Shape 28"/>
-          <p:cNvSpPr/>
-          <p:nvPr/>
-        </p:nvSpPr>
-        <p:spPr>
-          <a:xfrm>
-            <a:off x="4754880" y="3977640"/>
-            <a:ext cx="320040" cy="475488"/>
-          </a:xfrm>
-          <a:prstGeom prst="rect">
-            <a:avLst/>
-          </a:prstGeom>
-          <a:solidFill>
-            <a:srgbClr val="1F3864"/>
-          </a:solidFill>
-          <a:ln w="12700">
-            <a:solidFill>
-              <a:srgbClr val="1F3864"/>
-            </a:solidFill>
-            <a:prstDash val="solid"/>
-          </a:ln>
-        </p:spPr>
-        <p:txBody>
-          <a:bodyPr/>
-          <a:lstStyle/>
-          <a:p>
-            <a:endParaRPr lang="en-IN"/>
-          </a:p>
-        </p:txBody>
-      </p:sp>
-      <p:sp>
-        <p:nvSpPr>
-          <p:cNvPr id="31" name="Text 29"/>
-          <p:cNvSpPr/>
-          <p:nvPr/>
-        </p:nvSpPr>
-        <p:spPr>
-          <a:xfrm>
-            <a:off x="4754880" y="3977640"/>
-            <a:ext cx="320040" cy="475488"/>
-          </a:xfrm>
-          <a:prstGeom prst="rect">
-            <a:avLst/>
-          </a:prstGeom>
-          <a:noFill/>
-          <a:ln/>
-        </p:spPr>
-        <p:txBody>
-          <a:bodyPr wrap="square" lIns="0" tIns="0" rIns="0" bIns="0" rtlCol="0" anchor="ctr"/>
-          <a:lstStyle/>
-          <a:p>
-            <a:pPr marL="0" indent="0" algn="ctr">
-              <a:buNone/>
-            </a:pPr>
-            <a:r>
-              <a:rPr lang="en-US" sz="1100" b="1" dirty="0">
-                <a:solidFill>
-                  <a:srgbClr val="FFFFFF"/>
-                </a:solidFill>
-                <a:latin typeface="Calibri" pitchFamily="34" charset="0"/>
-                <a:ea typeface="Calibri" pitchFamily="34" charset="-122"/>
-                <a:cs typeface="Calibri" pitchFamily="34" charset="-120"/>
-              </a:rPr>
-              <a:t>R</a:t>
-            </a:r>
-            <a:endParaRPr lang="en-US" sz="1100" dirty="0"/>
-          </a:p>
-        </p:txBody>
-      </p:sp>
-      <p:sp>
-        <p:nvSpPr>
-          <p:cNvPr id="32" name="Text 30"/>
-          <p:cNvSpPr/>
-          <p:nvPr/>
-        </p:nvSpPr>
-        <p:spPr>
-          <a:xfrm>
-            <a:off x="5166360" y="3995928"/>
-            <a:ext cx="3520440" cy="228600"/>
-          </a:xfrm>
-          <a:prstGeom prst="rect">
-            <a:avLst/>
-          </a:prstGeom>
-          <a:noFill/>
-          <a:ln/>
-        </p:spPr>
-        <p:txBody>
-          <a:bodyPr wrap="square" rtlCol="0" anchor="ctr"/>
-          <a:lstStyle/>
-          <a:p>
-            <a:pPr marL="0" indent="0">
-              <a:buNone/>
-            </a:pPr>
-            <a:r>
-              <a:rPr lang="en-US" sz="1100" b="1" dirty="0">
-                <a:solidFill>
-                  <a:srgbClr val="1F3864"/>
-                </a:solidFill>
-                <a:latin typeface="Calibri" pitchFamily="34" charset="0"/>
-                <a:ea typeface="Calibri" pitchFamily="34" charset="-122"/>
-                <a:cs typeface="Calibri" pitchFamily="34" charset="-120"/>
-              </a:rPr>
-              <a:t>Real Farm Validation</a:t>
-            </a:r>
-            <a:endParaRPr lang="en-US" sz="1100" dirty="0"/>
-          </a:p>
-        </p:txBody>
-      </p:sp>
-      <p:sp>
-        <p:nvSpPr>
-          <p:cNvPr id="33" name="Text 31"/>
-          <p:cNvSpPr/>
-          <p:nvPr/>
-        </p:nvSpPr>
-        <p:spPr>
-          <a:xfrm>
-            <a:off x="5166360" y="4224528"/>
-            <a:ext cx="3520440" cy="256032"/>
-          </a:xfrm>
-          <a:prstGeom prst="rect">
-            <a:avLst/>
-          </a:prstGeom>
-          <a:noFill/>
-          <a:ln/>
-        </p:spPr>
-        <p:txBody>
-          <a:bodyPr wrap="square" rtlCol="0" anchor="ctr"/>
-          <a:lstStyle/>
-          <a:p>
-            <a:pPr marL="0" indent="0">
-              <a:buNone/>
-            </a:pPr>
-            <a:r>
-              <a:rPr lang="en-US" sz="950" dirty="0">
-                <a:solidFill>
-                  <a:srgbClr val="555555"/>
-                </a:solidFill>
-                <a:latin typeface="Calibri" pitchFamily="34" charset="0"/>
-                <a:ea typeface="Calibri" pitchFamily="34" charset="-122"/>
-                <a:cs typeface="Calibri" pitchFamily="34" charset="-120"/>
-              </a:rPr>
-              <a:t>Pilot study with actual sensor data from agricultural test plots</a:t>
-            </a:r>
-            <a:endParaRPr lang="en-US" sz="950" dirty="0"/>
-          </a:p>
-        </p:txBody>
-      </p:sp>
-    </p:spTree>
-  </p:cSld>
-  <p:clrMapOvr>
-    <a:masterClrMapping/>
-  </p:clrMapOvr>
-</p:sld>
-</file>
-
-<file path=ppt/slides/slide21.xml><?xml version="1.0" encoding="utf-8"?>
 <p:sld xmlns:a="http://schemas.openxmlformats.org/drawingml/2006/main" xmlns:r="http://schemas.openxmlformats.org/officeDocument/2006/relationships" xmlns:p="http://schemas.openxmlformats.org/presentationml/2006/main">
   <p:cSld name="Slide 18">
     <p:bg>
@@ -24445,10 +23357,17 @@
   <p:clrMapOvr>
     <a:masterClrMapping/>
   </p:clrMapOvr>
+  <p:timing>
+    <p:tnLst>
+      <p:par>
+        <p:cTn id="1" dur="indefinite" restart="never" nodeType="tmRoot"/>
+      </p:par>
+    </p:tnLst>
+  </p:timing>
 </p:sld>
 </file>
 
-<file path=ppt/slides/slide22.xml><?xml version="1.0" encoding="utf-8"?>
+<file path=ppt/slides/slide21.xml><?xml version="1.0" encoding="utf-8"?>
 <p:sld xmlns:a="http://schemas.openxmlformats.org/drawingml/2006/main" xmlns:r="http://schemas.openxmlformats.org/officeDocument/2006/relationships" xmlns:p="http://schemas.openxmlformats.org/presentationml/2006/main">
   <p:cSld name="Slide 19">
     <p:bg>
@@ -24916,6 +23835,13 @@
   <p:clrMapOvr>
     <a:masterClrMapping/>
   </p:clrMapOvr>
+  <p:timing>
+    <p:tnLst>
+      <p:par>
+        <p:cTn id="1" dur="indefinite" restart="never" nodeType="tmRoot"/>
+      </p:par>
+    </p:tnLst>
+  </p:timing>
 </p:sld>
 </file>
 
@@ -25946,1084 +24872,25 @@
   <p:clrMapOvr>
     <a:masterClrMapping/>
   </p:clrMapOvr>
+  <mc:AlternateContent xmlns:mc="http://schemas.openxmlformats.org/markup-compatibility/2006">
+    <mc:Choice xmlns:p14="http://schemas.microsoft.com/office/powerpoint/2010/main" Requires="p14">
+      <p:transition spd="slow" p14:dur="2000" advTm="8713"/>
+    </mc:Choice>
+    <mc:Fallback>
+      <p:transition spd="slow" advTm="8713"/>
+    </mc:Fallback>
+  </mc:AlternateContent>
+  <p:timing>
+    <p:tnLst>
+      <p:par>
+        <p:cTn id="1" dur="indefinite" restart="never" nodeType="tmRoot"/>
+      </p:par>
+    </p:tnLst>
+  </p:timing>
 </p:sld>
 </file>
 
 <file path=ppt/slides/slide4.xml><?xml version="1.0" encoding="utf-8"?>
-<p:sld xmlns:a="http://schemas.openxmlformats.org/drawingml/2006/main" xmlns:r="http://schemas.openxmlformats.org/officeDocument/2006/relationships" xmlns:p="http://schemas.openxmlformats.org/presentationml/2006/main">
-  <p:cSld name="Slide 4">
-    <p:bg>
-      <p:bgPr>
-        <a:solidFill>
-          <a:srgbClr val="FFFFFF"/>
-        </a:solidFill>
-        <a:effectLst/>
-      </p:bgPr>
-    </p:bg>
-    <p:spTree>
-      <p:nvGrpSpPr>
-        <p:cNvPr id="1" name=""/>
-        <p:cNvGrpSpPr/>
-        <p:nvPr/>
-      </p:nvGrpSpPr>
-      <p:grpSpPr>
-        <a:xfrm>
-          <a:off x="0" y="0"/>
-          <a:ext cx="0" cy="0"/>
-          <a:chOff x="0" y="0"/>
-          <a:chExt cx="0" cy="0"/>
-        </a:xfrm>
-      </p:grpSpPr>
-      <p:sp>
-        <p:nvSpPr>
-          <p:cNvPr id="2" name="Shape 0"/>
-          <p:cNvSpPr/>
-          <p:nvPr/>
-        </p:nvSpPr>
-        <p:spPr>
-          <a:xfrm>
-            <a:off x="0" y="0"/>
-            <a:ext cx="9144000" cy="658368"/>
-          </a:xfrm>
-          <a:prstGeom prst="rect">
-            <a:avLst/>
-          </a:prstGeom>
-          <a:solidFill>
-            <a:srgbClr val="1F3864"/>
-          </a:solidFill>
-          <a:ln w="12700">
-            <a:solidFill>
-              <a:srgbClr val="1F3864"/>
-            </a:solidFill>
-            <a:prstDash val="solid"/>
-          </a:ln>
-        </p:spPr>
-        <p:txBody>
-          <a:bodyPr/>
-          <a:lstStyle/>
-          <a:p>
-            <a:endParaRPr lang="en-IN"/>
-          </a:p>
-        </p:txBody>
-      </p:sp>
-      <p:sp>
-        <p:nvSpPr>
-          <p:cNvPr id="3" name="Text 1"/>
-          <p:cNvSpPr/>
-          <p:nvPr/>
-        </p:nvSpPr>
-        <p:spPr>
-          <a:xfrm>
-            <a:off x="320040" y="0"/>
-            <a:ext cx="8503920" cy="658368"/>
-          </a:xfrm>
-          <a:prstGeom prst="rect">
-            <a:avLst/>
-          </a:prstGeom>
-          <a:noFill/>
-          <a:ln/>
-        </p:spPr>
-        <p:txBody>
-          <a:bodyPr wrap="square" lIns="0" tIns="0" rIns="0" bIns="0" rtlCol="0" anchor="ctr"/>
-          <a:lstStyle/>
-          <a:p>
-            <a:pPr marL="0" indent="0">
-              <a:buNone/>
-            </a:pPr>
-            <a:r>
-              <a:rPr lang="en-US" sz="2200" b="1" dirty="0">
-                <a:solidFill>
-                  <a:srgbClr val="FFFFFF"/>
-                </a:solidFill>
-                <a:latin typeface="Garamond" pitchFamily="34" charset="0"/>
-                <a:ea typeface="Garamond" pitchFamily="34" charset="-122"/>
-                <a:cs typeface="Garamond" pitchFamily="34" charset="-120"/>
-              </a:rPr>
-              <a:t>Previous Outcome of the RL Project (Prior Work)</a:t>
-            </a:r>
-            <a:endParaRPr lang="en-US" sz="2200" dirty="0"/>
-          </a:p>
-        </p:txBody>
-      </p:sp>
-      <p:sp>
-        <p:nvSpPr>
-          <p:cNvPr id="4" name="Shape 2"/>
-          <p:cNvSpPr/>
-          <p:nvPr/>
-        </p:nvSpPr>
-        <p:spPr>
-          <a:xfrm>
-            <a:off x="0" y="658368"/>
-            <a:ext cx="9144000" cy="50292"/>
-          </a:xfrm>
-          <a:prstGeom prst="rect">
-            <a:avLst/>
-          </a:prstGeom>
-          <a:solidFill>
-            <a:srgbClr val="C00000"/>
-          </a:solidFill>
-          <a:ln w="12700">
-            <a:solidFill>
-              <a:srgbClr val="C00000"/>
-            </a:solidFill>
-            <a:prstDash val="solid"/>
-          </a:ln>
-        </p:spPr>
-        <p:txBody>
-          <a:bodyPr/>
-          <a:lstStyle/>
-          <a:p>
-            <a:endParaRPr lang="en-IN"/>
-          </a:p>
-        </p:txBody>
-      </p:sp>
-      <p:sp>
-        <p:nvSpPr>
-          <p:cNvPr id="5" name="Text 3"/>
-          <p:cNvSpPr/>
-          <p:nvPr/>
-        </p:nvSpPr>
-        <p:spPr>
-          <a:xfrm>
-            <a:off x="365760" y="822960"/>
-            <a:ext cx="8412480" cy="320040"/>
-          </a:xfrm>
-          <a:prstGeom prst="rect">
-            <a:avLst/>
-          </a:prstGeom>
-          <a:noFill/>
-          <a:ln/>
-        </p:spPr>
-        <p:txBody>
-          <a:bodyPr wrap="square" rtlCol="0" anchor="ctr"/>
-          <a:lstStyle/>
-          <a:p>
-            <a:pPr marL="0" indent="0">
-              <a:buNone/>
-            </a:pPr>
-            <a:r>
-              <a:rPr lang="en-US" sz="1400" b="1" dirty="0">
-                <a:solidFill>
-                  <a:srgbClr val="1F3864"/>
-                </a:solidFill>
-                <a:latin typeface="Garamond" pitchFamily="34" charset="0"/>
-                <a:ea typeface="Garamond" pitchFamily="34" charset="-122"/>
-                <a:cs typeface="Garamond" pitchFamily="34" charset="-120"/>
-              </a:rPr>
-              <a:t>Foundation: Policy Iteration &amp; Value Iteration on Grid Worlds</a:t>
-            </a:r>
-            <a:endParaRPr lang="en-US" sz="1400" dirty="0"/>
-          </a:p>
-        </p:txBody>
-      </p:sp>
-      <p:sp>
-        <p:nvSpPr>
-          <p:cNvPr id="6" name="Shape 4"/>
-          <p:cNvSpPr/>
-          <p:nvPr/>
-        </p:nvSpPr>
-        <p:spPr>
-          <a:xfrm>
-            <a:off x="320040" y="1234440"/>
-            <a:ext cx="2743200" cy="2194560"/>
-          </a:xfrm>
-          <a:prstGeom prst="rect">
-            <a:avLst/>
-          </a:prstGeom>
-          <a:solidFill>
-            <a:srgbClr val="FFFFFF"/>
-          </a:solidFill>
-          <a:ln w="12700">
-            <a:solidFill>
-              <a:srgbClr val="CCCCCC"/>
-            </a:solidFill>
-            <a:prstDash val="solid"/>
-          </a:ln>
-        </p:spPr>
-        <p:txBody>
-          <a:bodyPr/>
-          <a:lstStyle/>
-          <a:p>
-            <a:endParaRPr lang="en-IN"/>
-          </a:p>
-        </p:txBody>
-      </p:sp>
-      <p:sp>
-        <p:nvSpPr>
-          <p:cNvPr id="7" name="Shape 5"/>
-          <p:cNvSpPr/>
-          <p:nvPr/>
-        </p:nvSpPr>
-        <p:spPr>
-          <a:xfrm>
-            <a:off x="320040" y="1234440"/>
-            <a:ext cx="2743200" cy="274320"/>
-          </a:xfrm>
-          <a:prstGeom prst="rect">
-            <a:avLst/>
-          </a:prstGeom>
-          <a:solidFill>
-            <a:srgbClr val="1F3864"/>
-          </a:solidFill>
-          <a:ln w="12700">
-            <a:solidFill>
-              <a:srgbClr val="1F3864"/>
-            </a:solidFill>
-            <a:prstDash val="solid"/>
-          </a:ln>
-        </p:spPr>
-        <p:txBody>
-          <a:bodyPr/>
-          <a:lstStyle/>
-          <a:p>
-            <a:endParaRPr lang="en-IN"/>
-          </a:p>
-        </p:txBody>
-      </p:sp>
-      <p:sp>
-        <p:nvSpPr>
-          <p:cNvPr id="8" name="Text 6"/>
-          <p:cNvSpPr/>
-          <p:nvPr/>
-        </p:nvSpPr>
-        <p:spPr>
-          <a:xfrm>
-            <a:off x="320040" y="1234440"/>
-            <a:ext cx="2743200" cy="274320"/>
-          </a:xfrm>
-          <a:prstGeom prst="rect">
-            <a:avLst/>
-          </a:prstGeom>
-          <a:noFill/>
-          <a:ln/>
-        </p:spPr>
-        <p:txBody>
-          <a:bodyPr wrap="square" lIns="0" tIns="0" rIns="0" bIns="0" rtlCol="0" anchor="ctr"/>
-          <a:lstStyle/>
-          <a:p>
-            <a:pPr marL="0" indent="0" algn="ctr">
-              <a:buNone/>
-            </a:pPr>
-            <a:r>
-              <a:rPr lang="en-US" sz="1100" b="1" dirty="0">
-                <a:solidFill>
-                  <a:srgbClr val="FFFFFF"/>
-                </a:solidFill>
-                <a:latin typeface="Calibri" pitchFamily="34" charset="0"/>
-                <a:ea typeface="Calibri" pitchFamily="34" charset="-122"/>
-                <a:cs typeface="Calibri" pitchFamily="34" charset="-120"/>
-              </a:rPr>
-              <a:t>Value Iteration (5×5 Grid)</a:t>
-            </a:r>
-            <a:endParaRPr lang="en-US" sz="1100" dirty="0"/>
-          </a:p>
-        </p:txBody>
-      </p:sp>
-      <p:sp>
-        <p:nvSpPr>
-          <p:cNvPr id="9" name="Text 7"/>
-          <p:cNvSpPr/>
-          <p:nvPr/>
-        </p:nvSpPr>
-        <p:spPr>
-          <a:xfrm>
-            <a:off x="429768" y="1554480"/>
-            <a:ext cx="2523744" cy="420624"/>
-          </a:xfrm>
-          <a:prstGeom prst="rect">
-            <a:avLst/>
-          </a:prstGeom>
-          <a:noFill/>
-          <a:ln/>
-        </p:spPr>
-        <p:txBody>
-          <a:bodyPr wrap="square" rtlCol="0" anchor="ctr"/>
-          <a:lstStyle/>
-          <a:p>
-            <a:pPr marL="342900" indent="-342900">
-              <a:buSzPct val="100000"/>
-              <a:buChar char="•"/>
-            </a:pPr>
-            <a:r>
-              <a:rPr lang="en-US" sz="1000" dirty="0">
-                <a:solidFill>
-                  <a:srgbClr val="1C2120"/>
-                </a:solidFill>
-                <a:latin typeface="Calibri" pitchFamily="34" charset="0"/>
-                <a:ea typeface="Calibri" pitchFamily="34" charset="-122"/>
-                <a:cs typeface="Calibri" pitchFamily="34" charset="-120"/>
-              </a:rPr>
-              <a:t>Implemented Bellman optimality equations</a:t>
-            </a:r>
-            <a:endParaRPr lang="en-US" sz="1000" dirty="0"/>
-          </a:p>
-        </p:txBody>
-      </p:sp>
-      <p:sp>
-        <p:nvSpPr>
-          <p:cNvPr id="10" name="Text 8"/>
-          <p:cNvSpPr/>
-          <p:nvPr/>
-        </p:nvSpPr>
-        <p:spPr>
-          <a:xfrm>
-            <a:off x="429768" y="1993392"/>
-            <a:ext cx="2523744" cy="420624"/>
-          </a:xfrm>
-          <a:prstGeom prst="rect">
-            <a:avLst/>
-          </a:prstGeom>
-          <a:noFill/>
-          <a:ln/>
-        </p:spPr>
-        <p:txBody>
-          <a:bodyPr wrap="square" rtlCol="0" anchor="ctr"/>
-          <a:lstStyle/>
-          <a:p>
-            <a:pPr marL="342900" indent="-342900">
-              <a:buSzPct val="100000"/>
-              <a:buChar char="•"/>
-            </a:pPr>
-            <a:r>
-              <a:rPr lang="en-US" sz="1000" dirty="0">
-                <a:solidFill>
-                  <a:srgbClr val="1C2120"/>
-                </a:solidFill>
-                <a:latin typeface="Calibri" pitchFamily="34" charset="0"/>
-                <a:ea typeface="Calibri" pitchFamily="34" charset="-122"/>
-                <a:cs typeface="Calibri" pitchFamily="34" charset="-120"/>
-              </a:rPr>
-              <a:t>Convergence within ~50 iterations (γ=0.9)</a:t>
-            </a:r>
-            <a:endParaRPr lang="en-US" sz="1000" dirty="0"/>
-          </a:p>
-        </p:txBody>
-      </p:sp>
-      <p:sp>
-        <p:nvSpPr>
-          <p:cNvPr id="11" name="Text 9"/>
-          <p:cNvSpPr/>
-          <p:nvPr/>
-        </p:nvSpPr>
-        <p:spPr>
-          <a:xfrm>
-            <a:off x="429768" y="2432304"/>
-            <a:ext cx="2523744" cy="420624"/>
-          </a:xfrm>
-          <a:prstGeom prst="rect">
-            <a:avLst/>
-          </a:prstGeom>
-          <a:noFill/>
-          <a:ln/>
-        </p:spPr>
-        <p:txBody>
-          <a:bodyPr wrap="square" rtlCol="0" anchor="ctr"/>
-          <a:lstStyle/>
-          <a:p>
-            <a:pPr marL="342900" indent="-342900">
-              <a:buSzPct val="100000"/>
-              <a:buChar char="•"/>
-            </a:pPr>
-            <a:r>
-              <a:rPr lang="en-US" sz="1000" dirty="0">
-                <a:solidFill>
-                  <a:srgbClr val="1C2120"/>
-                </a:solidFill>
-                <a:latin typeface="Calibri" pitchFamily="34" charset="0"/>
-                <a:ea typeface="Calibri" pitchFamily="34" charset="-122"/>
-                <a:cs typeface="Calibri" pitchFamily="34" charset="-120"/>
-              </a:rPr>
-              <a:t>Computed optimal V* and deterministic policy</a:t>
-            </a:r>
-            <a:endParaRPr lang="en-US" sz="1000" dirty="0"/>
-          </a:p>
-        </p:txBody>
-      </p:sp>
-      <p:sp>
-        <p:nvSpPr>
-          <p:cNvPr id="12" name="Text 10"/>
-          <p:cNvSpPr/>
-          <p:nvPr/>
-        </p:nvSpPr>
-        <p:spPr>
-          <a:xfrm>
-            <a:off x="429768" y="2871216"/>
-            <a:ext cx="2523744" cy="420624"/>
-          </a:xfrm>
-          <a:prstGeom prst="rect">
-            <a:avLst/>
-          </a:prstGeom>
-          <a:noFill/>
-          <a:ln/>
-        </p:spPr>
-        <p:txBody>
-          <a:bodyPr wrap="square" rtlCol="0" anchor="ctr"/>
-          <a:lstStyle/>
-          <a:p>
-            <a:pPr marL="342900" indent="-342900">
-              <a:buSzPct val="100000"/>
-              <a:buChar char="•"/>
-            </a:pPr>
-            <a:r>
-              <a:rPr lang="en-US" sz="1000" dirty="0">
-                <a:solidFill>
-                  <a:srgbClr val="1C2120"/>
-                </a:solidFill>
-                <a:latin typeface="Calibri" pitchFamily="34" charset="0"/>
-                <a:ea typeface="Calibri" pitchFamily="34" charset="-122"/>
-                <a:cs typeface="Calibri" pitchFamily="34" charset="-120"/>
-              </a:rPr>
-              <a:t>Verified on standard gridworld with terminal states</a:t>
-            </a:r>
-            <a:endParaRPr lang="en-US" sz="1000" dirty="0"/>
-          </a:p>
-        </p:txBody>
-      </p:sp>
-      <p:sp>
-        <p:nvSpPr>
-          <p:cNvPr id="13" name="Shape 11"/>
-          <p:cNvSpPr/>
-          <p:nvPr/>
-        </p:nvSpPr>
-        <p:spPr>
-          <a:xfrm>
-            <a:off x="3200400" y="1234440"/>
-            <a:ext cx="2743200" cy="2194560"/>
-          </a:xfrm>
-          <a:prstGeom prst="rect">
-            <a:avLst/>
-          </a:prstGeom>
-          <a:solidFill>
-            <a:srgbClr val="FFFFFF"/>
-          </a:solidFill>
-          <a:ln w="12700">
-            <a:solidFill>
-              <a:srgbClr val="CCCCCC"/>
-            </a:solidFill>
-            <a:prstDash val="solid"/>
-          </a:ln>
-        </p:spPr>
-        <p:txBody>
-          <a:bodyPr/>
-          <a:lstStyle/>
-          <a:p>
-            <a:endParaRPr lang="en-IN"/>
-          </a:p>
-        </p:txBody>
-      </p:sp>
-      <p:sp>
-        <p:nvSpPr>
-          <p:cNvPr id="14" name="Shape 12"/>
-          <p:cNvSpPr/>
-          <p:nvPr/>
-        </p:nvSpPr>
-        <p:spPr>
-          <a:xfrm>
-            <a:off x="3200400" y="1234440"/>
-            <a:ext cx="2743200" cy="274320"/>
-          </a:xfrm>
-          <a:prstGeom prst="rect">
-            <a:avLst/>
-          </a:prstGeom>
-          <a:solidFill>
-            <a:srgbClr val="C00000"/>
-          </a:solidFill>
-          <a:ln w="12700">
-            <a:solidFill>
-              <a:srgbClr val="C00000"/>
-            </a:solidFill>
-            <a:prstDash val="solid"/>
-          </a:ln>
-        </p:spPr>
-        <p:txBody>
-          <a:bodyPr/>
-          <a:lstStyle/>
-          <a:p>
-            <a:endParaRPr lang="en-IN"/>
-          </a:p>
-        </p:txBody>
-      </p:sp>
-      <p:sp>
-        <p:nvSpPr>
-          <p:cNvPr id="15" name="Text 13"/>
-          <p:cNvSpPr/>
-          <p:nvPr/>
-        </p:nvSpPr>
-        <p:spPr>
-          <a:xfrm>
-            <a:off x="3200400" y="1234440"/>
-            <a:ext cx="2743200" cy="274320"/>
-          </a:xfrm>
-          <a:prstGeom prst="rect">
-            <a:avLst/>
-          </a:prstGeom>
-          <a:noFill/>
-          <a:ln/>
-        </p:spPr>
-        <p:txBody>
-          <a:bodyPr wrap="square" lIns="0" tIns="0" rIns="0" bIns="0" rtlCol="0" anchor="ctr"/>
-          <a:lstStyle/>
-          <a:p>
-            <a:pPr marL="0" indent="0" algn="ctr">
-              <a:buNone/>
-            </a:pPr>
-            <a:r>
-              <a:rPr lang="en-US" sz="1100" b="1" dirty="0">
-                <a:solidFill>
-                  <a:srgbClr val="FFFFFF"/>
-                </a:solidFill>
-                <a:latin typeface="Calibri" pitchFamily="34" charset="0"/>
-                <a:ea typeface="Calibri" pitchFamily="34" charset="-122"/>
-                <a:cs typeface="Calibri" pitchFamily="34" charset="-120"/>
-              </a:rPr>
-              <a:t>Policy Iteration (5×5 Grid)</a:t>
-            </a:r>
-            <a:endParaRPr lang="en-US" sz="1100" dirty="0"/>
-          </a:p>
-        </p:txBody>
-      </p:sp>
-      <p:sp>
-        <p:nvSpPr>
-          <p:cNvPr id="16" name="Text 14"/>
-          <p:cNvSpPr/>
-          <p:nvPr/>
-        </p:nvSpPr>
-        <p:spPr>
-          <a:xfrm>
-            <a:off x="3310128" y="1554480"/>
-            <a:ext cx="2523744" cy="420624"/>
-          </a:xfrm>
-          <a:prstGeom prst="rect">
-            <a:avLst/>
-          </a:prstGeom>
-          <a:noFill/>
-          <a:ln/>
-        </p:spPr>
-        <p:txBody>
-          <a:bodyPr wrap="square" rtlCol="0" anchor="ctr"/>
-          <a:lstStyle/>
-          <a:p>
-            <a:pPr marL="342900" indent="-342900">
-              <a:buSzPct val="100000"/>
-              <a:buChar char="•"/>
-            </a:pPr>
-            <a:r>
-              <a:rPr lang="en-US" sz="1000" dirty="0">
-                <a:solidFill>
-                  <a:srgbClr val="1C2120"/>
-                </a:solidFill>
-                <a:latin typeface="Calibri" pitchFamily="34" charset="0"/>
-                <a:ea typeface="Calibri" pitchFamily="34" charset="-122"/>
-                <a:cs typeface="Calibri" pitchFamily="34" charset="-120"/>
-              </a:rPr>
-              <a:t>Policy evaluation + policy improvement loop</a:t>
-            </a:r>
-            <a:endParaRPr lang="en-US" sz="1000" dirty="0"/>
-          </a:p>
-        </p:txBody>
-      </p:sp>
-      <p:sp>
-        <p:nvSpPr>
-          <p:cNvPr id="17" name="Text 15"/>
-          <p:cNvSpPr/>
-          <p:nvPr/>
-        </p:nvSpPr>
-        <p:spPr>
-          <a:xfrm>
-            <a:off x="3310128" y="1993392"/>
-            <a:ext cx="2523744" cy="420624"/>
-          </a:xfrm>
-          <a:prstGeom prst="rect">
-            <a:avLst/>
-          </a:prstGeom>
-          <a:noFill/>
-          <a:ln/>
-        </p:spPr>
-        <p:txBody>
-          <a:bodyPr wrap="square" rtlCol="0" anchor="ctr"/>
-          <a:lstStyle/>
-          <a:p>
-            <a:pPr marL="342900" indent="-342900">
-              <a:buSzPct val="100000"/>
-              <a:buChar char="•"/>
-            </a:pPr>
-            <a:r>
-              <a:rPr lang="en-US" sz="1000" dirty="0">
-                <a:solidFill>
-                  <a:srgbClr val="1C2120"/>
-                </a:solidFill>
-                <a:latin typeface="Calibri" pitchFamily="34" charset="0"/>
-                <a:ea typeface="Calibri" pitchFamily="34" charset="-122"/>
-                <a:cs typeface="Calibri" pitchFamily="34" charset="-120"/>
-              </a:rPr>
-              <a:t>Faster convergence than value iteration</a:t>
-            </a:r>
-            <a:endParaRPr lang="en-US" sz="1000" dirty="0"/>
-          </a:p>
-        </p:txBody>
-      </p:sp>
-      <p:sp>
-        <p:nvSpPr>
-          <p:cNvPr id="18" name="Text 16"/>
-          <p:cNvSpPr/>
-          <p:nvPr/>
-        </p:nvSpPr>
-        <p:spPr>
-          <a:xfrm>
-            <a:off x="3310128" y="2432304"/>
-            <a:ext cx="2523744" cy="420624"/>
-          </a:xfrm>
-          <a:prstGeom prst="rect">
-            <a:avLst/>
-          </a:prstGeom>
-          <a:noFill/>
-          <a:ln/>
-        </p:spPr>
-        <p:txBody>
-          <a:bodyPr wrap="square" rtlCol="0" anchor="ctr"/>
-          <a:lstStyle/>
-          <a:p>
-            <a:pPr marL="342900" indent="-342900">
-              <a:buSzPct val="100000"/>
-              <a:buChar char="•"/>
-            </a:pPr>
-            <a:r>
-              <a:rPr lang="en-US" sz="1000" dirty="0">
-                <a:solidFill>
-                  <a:srgbClr val="1C2120"/>
-                </a:solidFill>
-                <a:latin typeface="Calibri" pitchFamily="34" charset="0"/>
-                <a:ea typeface="Calibri" pitchFamily="34" charset="-122"/>
-                <a:cs typeface="Calibri" pitchFamily="34" charset="-120"/>
-              </a:rPr>
-              <a:t>Confirmed policy equivalence with value iteration</a:t>
-            </a:r>
-            <a:endParaRPr lang="en-US" sz="1000" dirty="0"/>
-          </a:p>
-        </p:txBody>
-      </p:sp>
-      <p:sp>
-        <p:nvSpPr>
-          <p:cNvPr id="19" name="Text 17"/>
-          <p:cNvSpPr/>
-          <p:nvPr/>
-        </p:nvSpPr>
-        <p:spPr>
-          <a:xfrm>
-            <a:off x="3310128" y="2871216"/>
-            <a:ext cx="2523744" cy="420624"/>
-          </a:xfrm>
-          <a:prstGeom prst="rect">
-            <a:avLst/>
-          </a:prstGeom>
-          <a:noFill/>
-          <a:ln/>
-        </p:spPr>
-        <p:txBody>
-          <a:bodyPr wrap="square" rtlCol="0" anchor="ctr"/>
-          <a:lstStyle/>
-          <a:p>
-            <a:pPr marL="342900" indent="-342900">
-              <a:buSzPct val="100000"/>
-              <a:buChar char="•"/>
-            </a:pPr>
-            <a:r>
-              <a:rPr lang="en-US" sz="1000" dirty="0">
-                <a:solidFill>
-                  <a:srgbClr val="1C2120"/>
-                </a:solidFill>
-                <a:latin typeface="Calibri" pitchFamily="34" charset="0"/>
-                <a:ea typeface="Calibri" pitchFamily="34" charset="-122"/>
-                <a:cs typeface="Calibri" pitchFamily="34" charset="-120"/>
-              </a:rPr>
-              <a:t>MATLAB implementation with numerical output</a:t>
-            </a:r>
-            <a:endParaRPr lang="en-US" sz="1000" dirty="0"/>
-          </a:p>
-        </p:txBody>
-      </p:sp>
-      <p:sp>
-        <p:nvSpPr>
-          <p:cNvPr id="20" name="Shape 18"/>
-          <p:cNvSpPr/>
-          <p:nvPr/>
-        </p:nvSpPr>
-        <p:spPr>
-          <a:xfrm>
-            <a:off x="6080760" y="1234440"/>
-            <a:ext cx="2743200" cy="2194560"/>
-          </a:xfrm>
-          <a:prstGeom prst="rect">
-            <a:avLst/>
-          </a:prstGeom>
-          <a:solidFill>
-            <a:srgbClr val="FFFFFF"/>
-          </a:solidFill>
-          <a:ln w="12700">
-            <a:solidFill>
-              <a:srgbClr val="CCCCCC"/>
-            </a:solidFill>
-            <a:prstDash val="solid"/>
-          </a:ln>
-        </p:spPr>
-        <p:txBody>
-          <a:bodyPr/>
-          <a:lstStyle/>
-          <a:p>
-            <a:endParaRPr lang="en-IN"/>
-          </a:p>
-        </p:txBody>
-      </p:sp>
-      <p:sp>
-        <p:nvSpPr>
-          <p:cNvPr id="21" name="Shape 19"/>
-          <p:cNvSpPr/>
-          <p:nvPr/>
-        </p:nvSpPr>
-        <p:spPr>
-          <a:xfrm>
-            <a:off x="6080760" y="1234440"/>
-            <a:ext cx="2743200" cy="274320"/>
-          </a:xfrm>
-          <a:prstGeom prst="rect">
-            <a:avLst/>
-          </a:prstGeom>
-          <a:solidFill>
-            <a:srgbClr val="1A6B3A"/>
-          </a:solidFill>
-          <a:ln w="12700">
-            <a:solidFill>
-              <a:srgbClr val="1A6B3A"/>
-            </a:solidFill>
-            <a:prstDash val="solid"/>
-          </a:ln>
-        </p:spPr>
-        <p:txBody>
-          <a:bodyPr/>
-          <a:lstStyle/>
-          <a:p>
-            <a:endParaRPr lang="en-IN"/>
-          </a:p>
-        </p:txBody>
-      </p:sp>
-      <p:sp>
-        <p:nvSpPr>
-          <p:cNvPr id="22" name="Text 20"/>
-          <p:cNvSpPr/>
-          <p:nvPr/>
-        </p:nvSpPr>
-        <p:spPr>
-          <a:xfrm>
-            <a:off x="6080760" y="1234440"/>
-            <a:ext cx="2743200" cy="274320"/>
-          </a:xfrm>
-          <a:prstGeom prst="rect">
-            <a:avLst/>
-          </a:prstGeom>
-          <a:noFill/>
-          <a:ln/>
-        </p:spPr>
-        <p:txBody>
-          <a:bodyPr wrap="square" lIns="0" tIns="0" rIns="0" bIns="0" rtlCol="0" anchor="ctr"/>
-          <a:lstStyle/>
-          <a:p>
-            <a:pPr marL="0" indent="0" algn="ctr">
-              <a:buNone/>
-            </a:pPr>
-            <a:r>
-              <a:rPr lang="en-US" sz="1100" b="1" dirty="0">
-                <a:solidFill>
-                  <a:srgbClr val="FFFFFF"/>
-                </a:solidFill>
-                <a:latin typeface="Calibri" pitchFamily="34" charset="0"/>
-                <a:ea typeface="Calibri" pitchFamily="34" charset="-122"/>
-                <a:cs typeface="Calibri" pitchFamily="34" charset="-120"/>
-              </a:rPr>
-              <a:t>Student Progression Markov Chain</a:t>
-            </a:r>
-            <a:endParaRPr lang="en-US" sz="1100" dirty="0"/>
-          </a:p>
-        </p:txBody>
-      </p:sp>
-      <p:sp>
-        <p:nvSpPr>
-          <p:cNvPr id="23" name="Text 21"/>
-          <p:cNvSpPr/>
-          <p:nvPr/>
-        </p:nvSpPr>
-        <p:spPr>
-          <a:xfrm>
-            <a:off x="6190488" y="1554480"/>
-            <a:ext cx="2523744" cy="420624"/>
-          </a:xfrm>
-          <a:prstGeom prst="rect">
-            <a:avLst/>
-          </a:prstGeom>
-          <a:noFill/>
-          <a:ln/>
-        </p:spPr>
-        <p:txBody>
-          <a:bodyPr wrap="square" rtlCol="0" anchor="ctr"/>
-          <a:lstStyle/>
-          <a:p>
-            <a:pPr marL="342900" indent="-342900">
-              <a:buSzPct val="100000"/>
-              <a:buChar char="•"/>
-            </a:pPr>
-            <a:r>
-              <a:rPr lang="en-US" sz="1000" dirty="0">
-                <a:solidFill>
-                  <a:srgbClr val="1C2120"/>
-                </a:solidFill>
-                <a:latin typeface="Calibri" pitchFamily="34" charset="0"/>
-                <a:ea typeface="Calibri" pitchFamily="34" charset="-122"/>
-                <a:cs typeface="Calibri" pitchFamily="34" charset="-120"/>
-              </a:rPr>
-              <a:t>States: Enrolled → Passing → Failing → Graduated → Dropped</a:t>
-            </a:r>
-            <a:endParaRPr lang="en-US" sz="1000" dirty="0"/>
-          </a:p>
-        </p:txBody>
-      </p:sp>
-      <p:sp>
-        <p:nvSpPr>
-          <p:cNvPr id="24" name="Text 22"/>
-          <p:cNvSpPr/>
-          <p:nvPr/>
-        </p:nvSpPr>
-        <p:spPr>
-          <a:xfrm>
-            <a:off x="6190488" y="1993392"/>
-            <a:ext cx="2523744" cy="420624"/>
-          </a:xfrm>
-          <a:prstGeom prst="rect">
-            <a:avLst/>
-          </a:prstGeom>
-          <a:noFill/>
-          <a:ln/>
-        </p:spPr>
-        <p:txBody>
-          <a:bodyPr wrap="square" rtlCol="0" anchor="ctr"/>
-          <a:lstStyle/>
-          <a:p>
-            <a:pPr marL="342900" indent="-342900">
-              <a:buSzPct val="100000"/>
-              <a:buChar char="•"/>
-            </a:pPr>
-            <a:r>
-              <a:rPr lang="en-US" sz="1000" dirty="0">
-                <a:solidFill>
-                  <a:srgbClr val="1C2120"/>
-                </a:solidFill>
-                <a:latin typeface="Calibri" pitchFamily="34" charset="0"/>
-                <a:ea typeface="Calibri" pitchFamily="34" charset="-122"/>
-                <a:cs typeface="Calibri" pitchFamily="34" charset="-120"/>
-              </a:rPr>
-              <a:t>Transition matrix with absorbing states</a:t>
-            </a:r>
-            <a:endParaRPr lang="en-US" sz="1000" dirty="0"/>
-          </a:p>
-        </p:txBody>
-      </p:sp>
-      <p:sp>
-        <p:nvSpPr>
-          <p:cNvPr id="25" name="Text 23"/>
-          <p:cNvSpPr/>
-          <p:nvPr/>
-        </p:nvSpPr>
-        <p:spPr>
-          <a:xfrm>
-            <a:off x="6190488" y="2432304"/>
-            <a:ext cx="2523744" cy="420624"/>
-          </a:xfrm>
-          <a:prstGeom prst="rect">
-            <a:avLst/>
-          </a:prstGeom>
-          <a:noFill/>
-          <a:ln/>
-        </p:spPr>
-        <p:txBody>
-          <a:bodyPr wrap="square" rtlCol="0" anchor="ctr"/>
-          <a:lstStyle/>
-          <a:p>
-            <a:pPr marL="342900" indent="-342900">
-              <a:buSzPct val="100000"/>
-              <a:buChar char="•"/>
-            </a:pPr>
-            <a:r>
-              <a:rPr lang="en-US" sz="1000" dirty="0">
-                <a:solidFill>
-                  <a:srgbClr val="1C2120"/>
-                </a:solidFill>
-                <a:latin typeface="Calibri" pitchFamily="34" charset="0"/>
-                <a:ea typeface="Calibri" pitchFamily="34" charset="-122"/>
-                <a:cs typeface="Calibri" pitchFamily="34" charset="-120"/>
-              </a:rPr>
-              <a:t>Computed stationary distribution</a:t>
-            </a:r>
-            <a:endParaRPr lang="en-US" sz="1000" dirty="0"/>
-          </a:p>
-        </p:txBody>
-      </p:sp>
-      <p:sp>
-        <p:nvSpPr>
-          <p:cNvPr id="26" name="Text 24"/>
-          <p:cNvSpPr/>
-          <p:nvPr/>
-        </p:nvSpPr>
-        <p:spPr>
-          <a:xfrm>
-            <a:off x="6190488" y="2871216"/>
-            <a:ext cx="2523744" cy="420624"/>
-          </a:xfrm>
-          <a:prstGeom prst="rect">
-            <a:avLst/>
-          </a:prstGeom>
-          <a:noFill/>
-          <a:ln/>
-        </p:spPr>
-        <p:txBody>
-          <a:bodyPr wrap="square" rtlCol="0" anchor="ctr"/>
-          <a:lstStyle/>
-          <a:p>
-            <a:pPr marL="342900" indent="-342900">
-              <a:buSzPct val="100000"/>
-              <a:buChar char="•"/>
-            </a:pPr>
-            <a:r>
-              <a:rPr lang="en-US" sz="1000" dirty="0">
-                <a:solidFill>
-                  <a:srgbClr val="1C2120"/>
-                </a:solidFill>
-                <a:latin typeface="Calibri" pitchFamily="34" charset="0"/>
-                <a:ea typeface="Calibri" pitchFamily="34" charset="-122"/>
-                <a:cs typeface="Calibri" pitchFamily="34" charset="-120"/>
-              </a:rPr>
-              <a:t>Validated long-run probabilities analytically</a:t>
-            </a:r>
-            <a:endParaRPr lang="en-US" sz="1000" dirty="0"/>
-          </a:p>
-        </p:txBody>
-      </p:sp>
-      <p:sp>
-        <p:nvSpPr>
-          <p:cNvPr id="27" name="Shape 25"/>
-          <p:cNvSpPr/>
-          <p:nvPr/>
-        </p:nvSpPr>
-        <p:spPr>
-          <a:xfrm>
-            <a:off x="365760" y="3566160"/>
-            <a:ext cx="8412480" cy="256032"/>
-          </a:xfrm>
-          <a:prstGeom prst="rect">
-            <a:avLst/>
-          </a:prstGeom>
-          <a:solidFill>
-            <a:srgbClr val="C00000"/>
-          </a:solidFill>
-          <a:ln w="12700">
-            <a:solidFill>
-              <a:srgbClr val="C00000"/>
-            </a:solidFill>
-            <a:prstDash val="solid"/>
-          </a:ln>
-        </p:spPr>
-        <p:txBody>
-          <a:bodyPr/>
-          <a:lstStyle/>
-          <a:p>
-            <a:endParaRPr lang="en-IN"/>
-          </a:p>
-        </p:txBody>
-      </p:sp>
-      <p:sp>
-        <p:nvSpPr>
-          <p:cNvPr id="28" name="Text 26"/>
-          <p:cNvSpPr/>
-          <p:nvPr/>
-        </p:nvSpPr>
-        <p:spPr>
-          <a:xfrm>
-            <a:off x="365760" y="3566160"/>
-            <a:ext cx="8412480" cy="256032"/>
-          </a:xfrm>
-          <a:prstGeom prst="rect">
-            <a:avLst/>
-          </a:prstGeom>
-          <a:noFill/>
-          <a:ln/>
-        </p:spPr>
-        <p:txBody>
-          <a:bodyPr wrap="square" lIns="0" tIns="0" rIns="0" bIns="0" rtlCol="0" anchor="ctr"/>
-          <a:lstStyle/>
-          <a:p>
-            <a:pPr marL="0" indent="0" algn="ctr">
-              <a:buNone/>
-            </a:pPr>
-            <a:r>
-              <a:rPr lang="en-US" sz="1000" b="1" dirty="0">
-                <a:solidFill>
-                  <a:srgbClr val="FFFFFF"/>
-                </a:solidFill>
-                <a:latin typeface="Calibri" pitchFamily="34" charset="0"/>
-                <a:ea typeface="Calibri" pitchFamily="34" charset="-122"/>
-                <a:cs typeface="Calibri" pitchFamily="34" charset="-120"/>
-              </a:rPr>
-              <a:t>KEY TRANSITION TO CURRENT PROJECT</a:t>
-            </a:r>
-            <a:endParaRPr lang="en-US" sz="1000" dirty="0"/>
-          </a:p>
-        </p:txBody>
-      </p:sp>
-      <p:sp>
-        <p:nvSpPr>
-          <p:cNvPr id="29" name="Text 27"/>
-          <p:cNvSpPr/>
-          <p:nvPr/>
-        </p:nvSpPr>
-        <p:spPr>
-          <a:xfrm>
-            <a:off x="365760" y="3886200"/>
-            <a:ext cx="8412480" cy="822960"/>
-          </a:xfrm>
-          <a:prstGeom prst="rect">
-            <a:avLst/>
-          </a:prstGeom>
-          <a:noFill/>
-          <a:ln/>
-        </p:spPr>
-        <p:txBody>
-          <a:bodyPr wrap="square" rtlCol="0" anchor="ctr"/>
-          <a:lstStyle/>
-          <a:p>
-            <a:pPr marL="0" indent="0">
-              <a:buNone/>
-            </a:pPr>
-            <a:r>
-              <a:rPr lang="en-US" sz="1100" dirty="0">
-                <a:solidFill>
-                  <a:srgbClr val="1C2120"/>
-                </a:solidFill>
-                <a:latin typeface="Calibri" pitchFamily="34" charset="0"/>
-                <a:ea typeface="Calibri" pitchFamily="34" charset="-122"/>
-                <a:cs typeface="Calibri" pitchFamily="34" charset="-120"/>
-              </a:rPr>
-              <a:t>Moving from tabular RL (discrete states) → Deep RL with continuous state/action spaces. TSA-SAC addresses high-dimensional agricultural observations that tabular methods cannot handle. Prior work established Bellman equation fluency; current work extends to function approximation and temporal sequence modeling.</a:t>
-            </a:r>
-            <a:endParaRPr lang="en-US" sz="1100" dirty="0"/>
-          </a:p>
-        </p:txBody>
-      </p:sp>
-    </p:spTree>
-  </p:cSld>
-  <p:clrMapOvr>
-    <a:masterClrMapping/>
-  </p:clrMapOvr>
-</p:sld>
-</file>
-
-<file path=ppt/slides/slide5.xml><?xml version="1.0" encoding="utf-8"?>
 <p:sld xmlns:a="http://schemas.openxmlformats.org/drawingml/2006/main" xmlns:r="http://schemas.openxmlformats.org/officeDocument/2006/relationships" xmlns:p="http://schemas.openxmlformats.org/presentationml/2006/main">
   <p:cSld name="Slide 5">
     <p:bg>
@@ -29016,10 +26883,17 @@
   <p:clrMapOvr>
     <a:masterClrMapping/>
   </p:clrMapOvr>
+  <p:timing>
+    <p:tnLst>
+      <p:par>
+        <p:cTn id="1" dur="indefinite" restart="never" nodeType="tmRoot"/>
+      </p:par>
+    </p:tnLst>
+  </p:timing>
 </p:sld>
 </file>
 
-<file path=ppt/slides/slide6.xml><?xml version="1.0" encoding="utf-8"?>
+<file path=ppt/slides/slide5.xml><?xml version="1.0" encoding="utf-8"?>
 <p:sld xmlns:a="http://schemas.openxmlformats.org/drawingml/2006/main" xmlns:r="http://schemas.openxmlformats.org/officeDocument/2006/relationships" xmlns:p="http://schemas.openxmlformats.org/presentationml/2006/main">
   <p:cSld name="Slide 6">
     <p:bg>
@@ -30528,10 +28402,17 @@
   <p:clrMapOvr>
     <a:masterClrMapping/>
   </p:clrMapOvr>
+  <p:timing>
+    <p:tnLst>
+      <p:par>
+        <p:cTn id="1" dur="indefinite" restart="never" nodeType="tmRoot"/>
+      </p:par>
+    </p:tnLst>
+  </p:timing>
 </p:sld>
 </file>
 
-<file path=ppt/slides/slide7.xml><?xml version="1.0" encoding="utf-8"?>
+<file path=ppt/slides/slide6.xml><?xml version="1.0" encoding="utf-8"?>
 <p:sld xmlns:a="http://schemas.openxmlformats.org/drawingml/2006/main" xmlns:r="http://schemas.openxmlformats.org/officeDocument/2006/relationships" xmlns:p="http://schemas.openxmlformats.org/presentationml/2006/main">
   <p:cSld name="Slide 7">
     <p:bg>
@@ -31584,10 +29465,17 @@
   <p:clrMapOvr>
     <a:masterClrMapping/>
   </p:clrMapOvr>
+  <p:timing>
+    <p:tnLst>
+      <p:par>
+        <p:cTn id="1" dur="indefinite" restart="never" nodeType="tmRoot"/>
+      </p:par>
+    </p:tnLst>
+  </p:timing>
 </p:sld>
 </file>
 
-<file path=ppt/slides/slide8.xml><?xml version="1.0" encoding="utf-8"?>
+<file path=ppt/slides/slide7.xml><?xml version="1.0" encoding="utf-8"?>
 <p:sld xmlns:a="http://schemas.openxmlformats.org/drawingml/2006/main" xmlns:r="http://schemas.openxmlformats.org/officeDocument/2006/relationships" xmlns:p="http://schemas.openxmlformats.org/presentationml/2006/main">
   <p:cSld name="Slide 8">
     <p:bg>
@@ -32968,7 +30856,7 @@
 </p:sld>
 </file>
 
-<file path=ppt/slides/slide9.xml><?xml version="1.0" encoding="utf-8"?>
+<file path=ppt/slides/slide8.xml><?xml version="1.0" encoding="utf-8"?>
 <p:sld xmlns:a="http://schemas.openxmlformats.org/drawingml/2006/main" xmlns:r="http://schemas.openxmlformats.org/officeDocument/2006/relationships" xmlns:p="http://schemas.openxmlformats.org/presentationml/2006/main">
   <p:cSld name="Slide 9">
     <p:bg>
@@ -35280,6 +33168,1081 @@
               <a:t>+ plot_comparison()</a:t>
             </a:r>
             <a:endParaRPr lang="en-US" sz="800" dirty="0"/>
+          </a:p>
+        </p:txBody>
+      </p:sp>
+    </p:spTree>
+  </p:cSld>
+  <p:clrMapOvr>
+    <a:masterClrMapping/>
+  </p:clrMapOvr>
+  <p:timing>
+    <p:tnLst>
+      <p:par>
+        <p:cTn id="1" dur="indefinite" restart="never" nodeType="tmRoot"/>
+      </p:par>
+    </p:tnLst>
+  </p:timing>
+</p:sld>
+</file>
+
+<file path=ppt/slides/slide9.xml><?xml version="1.0" encoding="utf-8"?>
+<p:sld xmlns:a="http://schemas.openxmlformats.org/drawingml/2006/main" xmlns:r="http://schemas.openxmlformats.org/officeDocument/2006/relationships" xmlns:p="http://schemas.openxmlformats.org/presentationml/2006/main">
+  <p:cSld name="Slide 10">
+    <p:bg>
+      <p:bgPr>
+        <a:solidFill>
+          <a:srgbClr val="FFFFFF"/>
+        </a:solidFill>
+        <a:effectLst/>
+      </p:bgPr>
+    </p:bg>
+    <p:spTree>
+      <p:nvGrpSpPr>
+        <p:cNvPr id="1" name=""/>
+        <p:cNvGrpSpPr/>
+        <p:nvPr/>
+      </p:nvGrpSpPr>
+      <p:grpSpPr>
+        <a:xfrm>
+          <a:off x="0" y="0"/>
+          <a:ext cx="0" cy="0"/>
+          <a:chOff x="0" y="0"/>
+          <a:chExt cx="0" cy="0"/>
+        </a:xfrm>
+      </p:grpSpPr>
+      <p:sp>
+        <p:nvSpPr>
+          <p:cNvPr id="2" name="Shape 0"/>
+          <p:cNvSpPr/>
+          <p:nvPr/>
+        </p:nvSpPr>
+        <p:spPr>
+          <a:xfrm>
+            <a:off x="0" y="0"/>
+            <a:ext cx="9144000" cy="658368"/>
+          </a:xfrm>
+          <a:prstGeom prst="rect">
+            <a:avLst/>
+          </a:prstGeom>
+          <a:solidFill>
+            <a:srgbClr val="1F3864"/>
+          </a:solidFill>
+          <a:ln w="12700">
+            <a:solidFill>
+              <a:srgbClr val="1F3864"/>
+            </a:solidFill>
+            <a:prstDash val="solid"/>
+          </a:ln>
+        </p:spPr>
+        <p:txBody>
+          <a:bodyPr/>
+          <a:lstStyle/>
+          <a:p>
+            <a:endParaRPr lang="en-IN"/>
+          </a:p>
+        </p:txBody>
+      </p:sp>
+      <p:sp>
+        <p:nvSpPr>
+          <p:cNvPr id="3" name="Text 1"/>
+          <p:cNvSpPr/>
+          <p:nvPr/>
+        </p:nvSpPr>
+        <p:spPr>
+          <a:xfrm>
+            <a:off x="320040" y="0"/>
+            <a:ext cx="8503920" cy="658368"/>
+          </a:xfrm>
+          <a:prstGeom prst="rect">
+            <a:avLst/>
+          </a:prstGeom>
+          <a:noFill/>
+          <a:ln/>
+        </p:spPr>
+        <p:txBody>
+          <a:bodyPr wrap="square" lIns="0" tIns="0" rIns="0" bIns="0" rtlCol="0" anchor="ctr"/>
+          <a:lstStyle/>
+          <a:p>
+            <a:pPr marL="0" indent="0">
+              <a:buNone/>
+            </a:pPr>
+            <a:r>
+              <a:rPr lang="en-US" sz="2200" b="1" dirty="0">
+                <a:solidFill>
+                  <a:srgbClr val="FFFFFF"/>
+                </a:solidFill>
+                <a:latin typeface="Garamond" pitchFamily="34" charset="0"/>
+                <a:ea typeface="Garamond" pitchFamily="34" charset="-122"/>
+                <a:cs typeface="Garamond" pitchFamily="34" charset="-120"/>
+              </a:rPr>
+              <a:t>Implementation Details</a:t>
+            </a:r>
+            <a:endParaRPr lang="en-US" sz="2200" dirty="0"/>
+          </a:p>
+        </p:txBody>
+      </p:sp>
+      <p:sp>
+        <p:nvSpPr>
+          <p:cNvPr id="4" name="Shape 2"/>
+          <p:cNvSpPr/>
+          <p:nvPr/>
+        </p:nvSpPr>
+        <p:spPr>
+          <a:xfrm>
+            <a:off x="0" y="658368"/>
+            <a:ext cx="9144000" cy="50292"/>
+          </a:xfrm>
+          <a:prstGeom prst="rect">
+            <a:avLst/>
+          </a:prstGeom>
+          <a:solidFill>
+            <a:srgbClr val="C00000"/>
+          </a:solidFill>
+          <a:ln w="12700">
+            <a:solidFill>
+              <a:srgbClr val="C00000"/>
+            </a:solidFill>
+            <a:prstDash val="solid"/>
+          </a:ln>
+        </p:spPr>
+        <p:txBody>
+          <a:bodyPr/>
+          <a:lstStyle/>
+          <a:p>
+            <a:endParaRPr lang="en-IN"/>
+          </a:p>
+        </p:txBody>
+      </p:sp>
+      <p:sp>
+        <p:nvSpPr>
+          <p:cNvPr id="5" name="Shape 3"/>
+          <p:cNvSpPr/>
+          <p:nvPr/>
+        </p:nvSpPr>
+        <p:spPr>
+          <a:xfrm>
+            <a:off x="274320" y="822960"/>
+            <a:ext cx="4251960" cy="1965960"/>
+          </a:xfrm>
+          <a:prstGeom prst="rect">
+            <a:avLst/>
+          </a:prstGeom>
+          <a:solidFill>
+            <a:srgbClr val="FFFFFF"/>
+          </a:solidFill>
+          <a:ln w="12700">
+            <a:solidFill>
+              <a:srgbClr val="CCCCCC"/>
+            </a:solidFill>
+            <a:prstDash val="solid"/>
+          </a:ln>
+        </p:spPr>
+        <p:txBody>
+          <a:bodyPr/>
+          <a:lstStyle/>
+          <a:p>
+            <a:endParaRPr lang="en-IN"/>
+          </a:p>
+        </p:txBody>
+      </p:sp>
+      <p:sp>
+        <p:nvSpPr>
+          <p:cNvPr id="6" name="Shape 4"/>
+          <p:cNvSpPr/>
+          <p:nvPr/>
+        </p:nvSpPr>
+        <p:spPr>
+          <a:xfrm>
+            <a:off x="274320" y="822960"/>
+            <a:ext cx="4251960" cy="274320"/>
+          </a:xfrm>
+          <a:prstGeom prst="rect">
+            <a:avLst/>
+          </a:prstGeom>
+          <a:solidFill>
+            <a:srgbClr val="1A6B3A"/>
+          </a:solidFill>
+          <a:ln w="12700">
+            <a:solidFill>
+              <a:srgbClr val="1A6B3A"/>
+            </a:solidFill>
+            <a:prstDash val="solid"/>
+          </a:ln>
+        </p:spPr>
+        <p:txBody>
+          <a:bodyPr/>
+          <a:lstStyle/>
+          <a:p>
+            <a:endParaRPr lang="en-IN"/>
+          </a:p>
+        </p:txBody>
+      </p:sp>
+      <p:sp>
+        <p:nvSpPr>
+          <p:cNvPr id="7" name="Text 5"/>
+          <p:cNvSpPr/>
+          <p:nvPr/>
+        </p:nvSpPr>
+        <p:spPr>
+          <a:xfrm>
+            <a:off x="274320" y="822960"/>
+            <a:ext cx="4251960" cy="274320"/>
+          </a:xfrm>
+          <a:prstGeom prst="rect">
+            <a:avLst/>
+          </a:prstGeom>
+          <a:noFill/>
+          <a:ln/>
+        </p:spPr>
+        <p:txBody>
+          <a:bodyPr wrap="square" lIns="0" tIns="0" rIns="0" bIns="0" rtlCol="0" anchor="ctr"/>
+          <a:lstStyle/>
+          <a:p>
+            <a:pPr marL="0" indent="0" algn="ctr">
+              <a:buNone/>
+            </a:pPr>
+            <a:r>
+              <a:rPr lang="en-US" sz="1100" b="1" dirty="0">
+                <a:solidFill>
+                  <a:srgbClr val="FFFFFF"/>
+                </a:solidFill>
+                <a:latin typeface="Calibri" pitchFamily="34" charset="0"/>
+                <a:ea typeface="Calibri" pitchFamily="34" charset="-122"/>
+                <a:cs typeface="Calibri" pitchFamily="34" charset="-120"/>
+              </a:rPr>
+              <a:t>Environment Setup</a:t>
+            </a:r>
+            <a:endParaRPr lang="en-US" sz="1100" dirty="0"/>
+          </a:p>
+        </p:txBody>
+      </p:sp>
+      <p:sp>
+        <p:nvSpPr>
+          <p:cNvPr id="8" name="Text 6"/>
+          <p:cNvSpPr/>
+          <p:nvPr/>
+        </p:nvSpPr>
+        <p:spPr>
+          <a:xfrm>
+            <a:off x="384048" y="1124712"/>
+            <a:ext cx="4032504" cy="1600200"/>
+          </a:xfrm>
+          <a:prstGeom prst="rect">
+            <a:avLst/>
+          </a:prstGeom>
+          <a:noFill/>
+          <a:ln/>
+        </p:spPr>
+        <p:txBody>
+          <a:bodyPr wrap="square" rtlCol="0" anchor="t"/>
+          <a:lstStyle/>
+          <a:p>
+            <a:pPr marL="342900" indent="-342900">
+              <a:buSzPct val="100000"/>
+              <a:buChar char="•"/>
+            </a:pPr>
+            <a:r>
+              <a:rPr lang="en-US" sz="950" dirty="0">
+                <a:solidFill>
+                  <a:srgbClr val="1C2120"/>
+                </a:solidFill>
+                <a:latin typeface="Calibri" pitchFamily="34" charset="0"/>
+                <a:ea typeface="Calibri" pitchFamily="34" charset="-122"/>
+                <a:cs typeface="Calibri" pitchFamily="34" charset="-120"/>
+              </a:rPr>
+              <a:t>Gymnasium-compatible custom env (CropIrrigationEnv)</a:t>
+            </a:r>
+            <a:endParaRPr lang="en-US" sz="950" dirty="0"/>
+          </a:p>
+          <a:p>
+            <a:pPr marL="342900" indent="-342900">
+              <a:buSzPct val="100000"/>
+              <a:buChar char="•"/>
+            </a:pPr>
+            <a:r>
+              <a:rPr lang="en-US" sz="950" dirty="0">
+                <a:solidFill>
+                  <a:srgbClr val="1C2120"/>
+                </a:solidFill>
+                <a:latin typeface="Calibri" pitchFamily="34" charset="0"/>
+                <a:ea typeface="Calibri" pitchFamily="34" charset="-122"/>
+                <a:cs typeface="Calibri" pitchFamily="34" charset="-120"/>
+              </a:rPr>
+              <a:t>FAO-56 soil water balance: θ_{t+1} = θ_t + (rain+irr)/rd − ET_c/rd</a:t>
+            </a:r>
+            <a:endParaRPr lang="en-US" sz="950" dirty="0"/>
+          </a:p>
+          <a:p>
+            <a:pPr marL="342900" indent="-342900">
+              <a:buSzPct val="100000"/>
+              <a:buChar char="•"/>
+            </a:pPr>
+            <a:r>
+              <a:rPr lang="en-US" sz="950" dirty="0">
+                <a:solidFill>
+                  <a:srgbClr val="1C2120"/>
+                </a:solidFill>
+                <a:latin typeface="Calibri" pitchFamily="34" charset="0"/>
+                <a:ea typeface="Calibri" pitchFamily="34" charset="-122"/>
+                <a:cs typeface="Calibri" pitchFamily="34" charset="-120"/>
+              </a:rPr>
+              <a:t>Radiation-Use Efficiency (RUE) crop growth model</a:t>
+            </a:r>
+            <a:endParaRPr lang="en-US" sz="950" dirty="0"/>
+          </a:p>
+          <a:p>
+            <a:pPr marL="342900" indent="-342900">
+              <a:buSzPct val="100000"/>
+              <a:buChar char="•"/>
+            </a:pPr>
+            <a:r>
+              <a:rPr lang="en-US" sz="950" dirty="0">
+                <a:solidFill>
+                  <a:srgbClr val="1C2120"/>
+                </a:solidFill>
+                <a:latin typeface="Calibri" pitchFamily="34" charset="0"/>
+                <a:ea typeface="Calibri" pitchFamily="34" charset="-122"/>
+                <a:cs typeface="Calibri" pitchFamily="34" charset="-120"/>
+              </a:rPr>
+              <a:t>Stochastic 2-state Markov weather + NASA POWER real data</a:t>
+            </a:r>
+            <a:endParaRPr lang="en-US" sz="950" dirty="0"/>
+          </a:p>
+          <a:p>
+            <a:pPr marL="342900" indent="-342900">
+              <a:buSzPct val="100000"/>
+              <a:buChar char="•"/>
+            </a:pPr>
+            <a:r>
+              <a:rPr lang="en-US" sz="950" dirty="0">
+                <a:solidFill>
+                  <a:srgbClr val="1C2120"/>
+                </a:solidFill>
+                <a:latin typeface="Calibri" pitchFamily="34" charset="0"/>
+                <a:ea typeface="Calibri" pitchFamily="34" charset="-122"/>
+                <a:cs typeface="Calibri" pitchFamily="34" charset="-120"/>
+              </a:rPr>
+              <a:t>Crop: Cotton (170 days growing season)</a:t>
+            </a:r>
+            <a:endParaRPr lang="en-US" sz="950" dirty="0"/>
+          </a:p>
+          <a:p>
+            <a:pPr marL="342900" indent="-342900">
+              <a:buSzPct val="100000"/>
+              <a:buChar char="•"/>
+            </a:pPr>
+            <a:r>
+              <a:rPr lang="en-US" sz="950" dirty="0">
+                <a:solidFill>
+                  <a:srgbClr val="1C2120"/>
+                </a:solidFill>
+                <a:latin typeface="Calibri" pitchFamily="34" charset="0"/>
+                <a:ea typeface="Calibri" pitchFamily="34" charset="-122"/>
+                <a:cs typeface="Calibri" pitchFamily="34" charset="-120"/>
+              </a:rPr>
+              <a:t>Water budgets: Generous (1500mm) / Moderate (400mm) / Scarce (250mm)</a:t>
+            </a:r>
+            <a:endParaRPr lang="en-US" sz="950" dirty="0"/>
+          </a:p>
+        </p:txBody>
+      </p:sp>
+      <p:sp>
+        <p:nvSpPr>
+          <p:cNvPr id="9" name="Shape 7"/>
+          <p:cNvSpPr/>
+          <p:nvPr/>
+        </p:nvSpPr>
+        <p:spPr>
+          <a:xfrm>
+            <a:off x="4754880" y="822960"/>
+            <a:ext cx="4251960" cy="1965960"/>
+          </a:xfrm>
+          <a:prstGeom prst="rect">
+            <a:avLst/>
+          </a:prstGeom>
+          <a:solidFill>
+            <a:srgbClr val="FFFFFF"/>
+          </a:solidFill>
+          <a:ln w="12700">
+            <a:solidFill>
+              <a:srgbClr val="CCCCCC"/>
+            </a:solidFill>
+            <a:prstDash val="solid"/>
+          </a:ln>
+        </p:spPr>
+        <p:txBody>
+          <a:bodyPr/>
+          <a:lstStyle/>
+          <a:p>
+            <a:endParaRPr lang="en-IN"/>
+          </a:p>
+        </p:txBody>
+      </p:sp>
+      <p:sp>
+        <p:nvSpPr>
+          <p:cNvPr id="10" name="Shape 8"/>
+          <p:cNvSpPr/>
+          <p:nvPr/>
+        </p:nvSpPr>
+        <p:spPr>
+          <a:xfrm>
+            <a:off x="4754880" y="822960"/>
+            <a:ext cx="4251960" cy="274320"/>
+          </a:xfrm>
+          <a:prstGeom prst="rect">
+            <a:avLst/>
+          </a:prstGeom>
+          <a:solidFill>
+            <a:srgbClr val="1F3864"/>
+          </a:solidFill>
+          <a:ln w="12700">
+            <a:solidFill>
+              <a:srgbClr val="1F3864"/>
+            </a:solidFill>
+            <a:prstDash val="solid"/>
+          </a:ln>
+        </p:spPr>
+        <p:txBody>
+          <a:bodyPr/>
+          <a:lstStyle/>
+          <a:p>
+            <a:endParaRPr lang="en-IN"/>
+          </a:p>
+        </p:txBody>
+      </p:sp>
+      <p:sp>
+        <p:nvSpPr>
+          <p:cNvPr id="11" name="Text 9"/>
+          <p:cNvSpPr/>
+          <p:nvPr/>
+        </p:nvSpPr>
+        <p:spPr>
+          <a:xfrm>
+            <a:off x="4754880" y="822960"/>
+            <a:ext cx="4251960" cy="274320"/>
+          </a:xfrm>
+          <a:prstGeom prst="rect">
+            <a:avLst/>
+          </a:prstGeom>
+          <a:noFill/>
+          <a:ln/>
+        </p:spPr>
+        <p:txBody>
+          <a:bodyPr wrap="square" lIns="0" tIns="0" rIns="0" bIns="0" rtlCol="0" anchor="ctr"/>
+          <a:lstStyle/>
+          <a:p>
+            <a:pPr marL="0" indent="0" algn="ctr">
+              <a:buNone/>
+            </a:pPr>
+            <a:r>
+              <a:rPr lang="en-US" sz="1100" b="1" dirty="0">
+                <a:solidFill>
+                  <a:srgbClr val="FFFFFF"/>
+                </a:solidFill>
+                <a:latin typeface="Calibri" pitchFamily="34" charset="0"/>
+                <a:ea typeface="Calibri" pitchFamily="34" charset="-122"/>
+                <a:cs typeface="Calibri" pitchFamily="34" charset="-120"/>
+              </a:rPr>
+              <a:t>Agent Training Pipeline</a:t>
+            </a:r>
+            <a:endParaRPr lang="en-US" sz="1100" dirty="0"/>
+          </a:p>
+        </p:txBody>
+      </p:sp>
+      <p:sp>
+        <p:nvSpPr>
+          <p:cNvPr id="12" name="Text 10"/>
+          <p:cNvSpPr/>
+          <p:nvPr/>
+        </p:nvSpPr>
+        <p:spPr>
+          <a:xfrm>
+            <a:off x="4864608" y="1124712"/>
+            <a:ext cx="4032504" cy="1600200"/>
+          </a:xfrm>
+          <a:prstGeom prst="rect">
+            <a:avLst/>
+          </a:prstGeom>
+          <a:noFill/>
+          <a:ln/>
+        </p:spPr>
+        <p:txBody>
+          <a:bodyPr wrap="square" rtlCol="0" anchor="t"/>
+          <a:lstStyle/>
+          <a:p>
+            <a:pPr marL="342900" indent="-342900">
+              <a:buSzPct val="100000"/>
+              <a:buChar char="•"/>
+            </a:pPr>
+            <a:r>
+              <a:rPr lang="en-US" sz="950" dirty="0">
+                <a:solidFill>
+                  <a:srgbClr val="1C2120"/>
+                </a:solidFill>
+                <a:latin typeface="Calibri" pitchFamily="34" charset="0"/>
+                <a:ea typeface="Calibri" pitchFamily="34" charset="-122"/>
+                <a:cs typeface="Calibri" pitchFamily="34" charset="-120"/>
+              </a:rPr>
+              <a:t>Sequence replay buffer stores (seq_t, a_t, r_t, seq_{t+1}, done)</a:t>
+            </a:r>
+            <a:endParaRPr lang="en-US" sz="950" dirty="0"/>
+          </a:p>
+          <a:p>
+            <a:pPr marL="342900" indent="-342900">
+              <a:buSzPct val="100000"/>
+              <a:buChar char="•"/>
+            </a:pPr>
+            <a:r>
+              <a:rPr lang="en-US" sz="950" dirty="0">
+                <a:solidFill>
+                  <a:srgbClr val="1C2120"/>
+                </a:solidFill>
+                <a:latin typeface="Calibri" pitchFamily="34" charset="0"/>
+                <a:ea typeface="Calibri" pitchFamily="34" charset="-122"/>
+                <a:cs typeface="Calibri" pitchFamily="34" charset="-120"/>
+              </a:rPr>
+              <a:t>Batch size: 64, warm-up: 1000 steps before first update</a:t>
+            </a:r>
+            <a:endParaRPr lang="en-US" sz="950" dirty="0"/>
+          </a:p>
+          <a:p>
+            <a:pPr marL="342900" indent="-342900">
+              <a:buSzPct val="100000"/>
+              <a:buChar char="•"/>
+            </a:pPr>
+            <a:r>
+              <a:rPr lang="en-US" sz="950" dirty="0">
+                <a:solidFill>
+                  <a:srgbClr val="1C2120"/>
+                </a:solidFill>
+                <a:latin typeface="Calibri" pitchFamily="34" charset="0"/>
+                <a:ea typeface="Calibri" pitchFamily="34" charset="-122"/>
+                <a:cs typeface="Calibri" pitchFamily="34" charset="-120"/>
+              </a:rPr>
+              <a:t>Soft target update: τ=0.005 every step</a:t>
+            </a:r>
+            <a:endParaRPr lang="en-US" sz="950" dirty="0"/>
+          </a:p>
+          <a:p>
+            <a:pPr marL="342900" indent="-342900">
+              <a:buSzPct val="100000"/>
+              <a:buChar char="•"/>
+            </a:pPr>
+            <a:r>
+              <a:rPr lang="en-US" sz="950" dirty="0">
+                <a:solidFill>
+                  <a:srgbClr val="1C2120"/>
+                </a:solidFill>
+                <a:latin typeface="Calibri" pitchFamily="34" charset="0"/>
+                <a:ea typeface="Calibri" pitchFamily="34" charset="-122"/>
+                <a:cs typeface="Calibri" pitchFamily="34" charset="-120"/>
+              </a:rPr>
+              <a:t>Gradient clipping: max_norm=1.0 on actor and critics</a:t>
+            </a:r>
+            <a:endParaRPr lang="en-US" sz="950" dirty="0"/>
+          </a:p>
+          <a:p>
+            <a:pPr marL="342900" indent="-342900">
+              <a:buSzPct val="100000"/>
+              <a:buChar char="•"/>
+            </a:pPr>
+            <a:r>
+              <a:rPr lang="en-US" sz="950" dirty="0">
+                <a:solidFill>
+                  <a:srgbClr val="1C2120"/>
+                </a:solidFill>
+                <a:latin typeface="Calibri" pitchFamily="34" charset="0"/>
+                <a:ea typeface="Calibri" pitchFamily="34" charset="-122"/>
+                <a:cs typeface="Calibri" pitchFamily="34" charset="-120"/>
+              </a:rPr>
+              <a:t>AMP (float16) with GradScaler for memory efficiency</a:t>
+            </a:r>
+            <a:endParaRPr lang="en-US" sz="950" dirty="0"/>
+          </a:p>
+          <a:p>
+            <a:pPr marL="342900" indent="-342900">
+              <a:buSzPct val="100000"/>
+              <a:buChar char="•"/>
+            </a:pPr>
+            <a:r>
+              <a:rPr lang="en-US" sz="950" dirty="0">
+                <a:solidFill>
+                  <a:srgbClr val="1C2120"/>
+                </a:solidFill>
+                <a:latin typeface="Calibri" pitchFamily="34" charset="0"/>
+                <a:ea typeface="Calibri" pitchFamily="34" charset="-122"/>
+                <a:cs typeface="Calibri" pitchFamily="34" charset="-120"/>
+              </a:rPr>
+              <a:t>Transfer learning: freeze encoder for N epochs → unfreeze</a:t>
+            </a:r>
+            <a:endParaRPr lang="en-US" sz="950" dirty="0"/>
+          </a:p>
+        </p:txBody>
+      </p:sp>
+      <p:sp>
+        <p:nvSpPr>
+          <p:cNvPr id="13" name="Shape 11"/>
+          <p:cNvSpPr/>
+          <p:nvPr/>
+        </p:nvSpPr>
+        <p:spPr>
+          <a:xfrm>
+            <a:off x="274320" y="2971800"/>
+            <a:ext cx="4251960" cy="1965960"/>
+          </a:xfrm>
+          <a:prstGeom prst="rect">
+            <a:avLst/>
+          </a:prstGeom>
+          <a:solidFill>
+            <a:srgbClr val="FFFFFF"/>
+          </a:solidFill>
+          <a:ln w="12700">
+            <a:solidFill>
+              <a:srgbClr val="CCCCCC"/>
+            </a:solidFill>
+            <a:prstDash val="solid"/>
+          </a:ln>
+        </p:spPr>
+        <p:txBody>
+          <a:bodyPr/>
+          <a:lstStyle/>
+          <a:p>
+            <a:endParaRPr lang="en-IN"/>
+          </a:p>
+        </p:txBody>
+      </p:sp>
+      <p:sp>
+        <p:nvSpPr>
+          <p:cNvPr id="14" name="Shape 12"/>
+          <p:cNvSpPr/>
+          <p:nvPr/>
+        </p:nvSpPr>
+        <p:spPr>
+          <a:xfrm>
+            <a:off x="274320" y="2971800"/>
+            <a:ext cx="4251960" cy="274320"/>
+          </a:xfrm>
+          <a:prstGeom prst="rect">
+            <a:avLst/>
+          </a:prstGeom>
+          <a:solidFill>
+            <a:srgbClr val="006B6B"/>
+          </a:solidFill>
+          <a:ln w="12700">
+            <a:solidFill>
+              <a:srgbClr val="006B6B"/>
+            </a:solidFill>
+            <a:prstDash val="solid"/>
+          </a:ln>
+        </p:spPr>
+        <p:txBody>
+          <a:bodyPr/>
+          <a:lstStyle/>
+          <a:p>
+            <a:endParaRPr lang="en-IN"/>
+          </a:p>
+        </p:txBody>
+      </p:sp>
+      <p:sp>
+        <p:nvSpPr>
+          <p:cNvPr id="15" name="Text 13"/>
+          <p:cNvSpPr/>
+          <p:nvPr/>
+        </p:nvSpPr>
+        <p:spPr>
+          <a:xfrm>
+            <a:off x="274320" y="2971800"/>
+            <a:ext cx="4251960" cy="274320"/>
+          </a:xfrm>
+          <a:prstGeom prst="rect">
+            <a:avLst/>
+          </a:prstGeom>
+          <a:noFill/>
+          <a:ln/>
+        </p:spPr>
+        <p:txBody>
+          <a:bodyPr wrap="square" lIns="0" tIns="0" rIns="0" bIns="0" rtlCol="0" anchor="ctr"/>
+          <a:lstStyle/>
+          <a:p>
+            <a:pPr marL="0" indent="0" algn="ctr">
+              <a:buNone/>
+            </a:pPr>
+            <a:r>
+              <a:rPr lang="en-US" sz="1100" b="1" dirty="0">
+                <a:solidFill>
+                  <a:srgbClr val="FFFFFF"/>
+                </a:solidFill>
+                <a:latin typeface="Calibri" pitchFamily="34" charset="0"/>
+                <a:ea typeface="Calibri" pitchFamily="34" charset="-122"/>
+                <a:cs typeface="Calibri" pitchFamily="34" charset="-120"/>
+              </a:rPr>
+              <a:t>Baselines Implemented</a:t>
+            </a:r>
+            <a:endParaRPr lang="en-US" sz="1100" dirty="0"/>
+          </a:p>
+        </p:txBody>
+      </p:sp>
+      <p:sp>
+        <p:nvSpPr>
+          <p:cNvPr id="16" name="Text 14"/>
+          <p:cNvSpPr/>
+          <p:nvPr/>
+        </p:nvSpPr>
+        <p:spPr>
+          <a:xfrm>
+            <a:off x="384048" y="3273552"/>
+            <a:ext cx="4032504" cy="1600200"/>
+          </a:xfrm>
+          <a:prstGeom prst="rect">
+            <a:avLst/>
+          </a:prstGeom>
+          <a:noFill/>
+          <a:ln/>
+        </p:spPr>
+        <p:txBody>
+          <a:bodyPr wrap="square" rtlCol="0" anchor="t"/>
+          <a:lstStyle/>
+          <a:p>
+            <a:pPr marL="342900" indent="-342900">
+              <a:buSzPct val="100000"/>
+              <a:buChar char="•"/>
+            </a:pPr>
+            <a:r>
+              <a:rPr lang="en-US" sz="950" dirty="0">
+                <a:solidFill>
+                  <a:srgbClr val="1C2120"/>
+                </a:solidFill>
+                <a:latin typeface="Calibri" pitchFamily="34" charset="0"/>
+                <a:ea typeface="Calibri" pitchFamily="34" charset="-122"/>
+                <a:cs typeface="Calibri" pitchFamily="34" charset="-120"/>
+              </a:rPr>
+              <a:t>Random: uniform sample ∈ [0, 60]</a:t>
+            </a:r>
+            <a:endParaRPr lang="en-US" sz="950" dirty="0"/>
+          </a:p>
+          <a:p>
+            <a:pPr marL="342900" indent="-342900">
+              <a:buSzPct val="100000"/>
+              <a:buChar char="•"/>
+            </a:pPr>
+            <a:r>
+              <a:rPr lang="en-US" sz="950" dirty="0">
+                <a:solidFill>
+                  <a:srgbClr val="1C2120"/>
+                </a:solidFill>
+                <a:latin typeface="Calibri" pitchFamily="34" charset="0"/>
+                <a:ea typeface="Calibri" pitchFamily="34" charset="-122"/>
+                <a:cs typeface="Calibri" pitchFamily="34" charset="-120"/>
+              </a:rPr>
+              <a:t>Farmer (10-day fixed): 10mm every 10 days</a:t>
+            </a:r>
+            <a:endParaRPr lang="en-US" sz="950" dirty="0"/>
+          </a:p>
+          <a:p>
+            <a:pPr marL="342900" indent="-342900">
+              <a:buSzPct val="100000"/>
+              <a:buChar char="•"/>
+            </a:pPr>
+            <a:r>
+              <a:rPr lang="en-US" sz="950" dirty="0">
+                <a:solidFill>
+                  <a:srgbClr val="1C2120"/>
+                </a:solidFill>
+                <a:latin typeface="Calibri" pitchFamily="34" charset="0"/>
+                <a:ea typeface="Calibri" pitchFamily="34" charset="-122"/>
+                <a:cs typeface="Calibri" pitchFamily="34" charset="-120"/>
+              </a:rPr>
+              <a:t>Threshold (0.45): irrigate to FC when θ &lt; 0.45</a:t>
+            </a:r>
+            <a:endParaRPr lang="en-US" sz="950" dirty="0"/>
+          </a:p>
+          <a:p>
+            <a:pPr marL="342900" indent="-342900">
+              <a:buSzPct val="100000"/>
+              <a:buChar char="•"/>
+            </a:pPr>
+            <a:r>
+              <a:rPr lang="en-US" sz="950" dirty="0">
+                <a:solidFill>
+                  <a:srgbClr val="1C2120"/>
+                </a:solidFill>
+                <a:latin typeface="Calibri" pitchFamily="34" charset="0"/>
+                <a:ea typeface="Calibri" pitchFamily="34" charset="-122"/>
+                <a:cs typeface="Calibri" pitchFamily="34" charset="-120"/>
+              </a:rPr>
+              <a:t>FarmerExpert: stage-aware fixed schedule</a:t>
+            </a:r>
+            <a:endParaRPr lang="en-US" sz="950" dirty="0"/>
+          </a:p>
+          <a:p>
+            <a:pPr marL="342900" indent="-342900">
+              <a:buSzPct val="100000"/>
+              <a:buChar char="•"/>
+            </a:pPr>
+            <a:r>
+              <a:rPr lang="en-US" sz="950" dirty="0">
+                <a:solidFill>
+                  <a:srgbClr val="1C2120"/>
+                </a:solidFill>
+                <a:latin typeface="Calibri" pitchFamily="34" charset="0"/>
+                <a:ea typeface="Calibri" pitchFamily="34" charset="-122"/>
+                <a:cs typeface="Calibri" pitchFamily="34" charset="-120"/>
+              </a:rPr>
+              <a:t>PPO-MLP: on-policy, flat state (no LSTM)</a:t>
+            </a:r>
+            <a:endParaRPr lang="en-US" sz="950" dirty="0"/>
+          </a:p>
+          <a:p>
+            <a:pPr marL="342900" indent="-342900">
+              <a:buSzPct val="100000"/>
+              <a:buChar char="•"/>
+            </a:pPr>
+            <a:r>
+              <a:rPr lang="en-US" sz="950" dirty="0">
+                <a:solidFill>
+                  <a:srgbClr val="1C2120"/>
+                </a:solidFill>
+                <a:latin typeface="Calibri" pitchFamily="34" charset="0"/>
+                <a:ea typeface="Calibri" pitchFamily="34" charset="-122"/>
+                <a:cs typeface="Calibri" pitchFamily="34" charset="-120"/>
+              </a:rPr>
+              <a:t>DDPG-MLP: off-policy, flat state (no LSTM)</a:t>
+            </a:r>
+            <a:endParaRPr lang="en-US" sz="950" dirty="0"/>
+          </a:p>
+        </p:txBody>
+      </p:sp>
+      <p:sp>
+        <p:nvSpPr>
+          <p:cNvPr id="17" name="Shape 15"/>
+          <p:cNvSpPr/>
+          <p:nvPr/>
+        </p:nvSpPr>
+        <p:spPr>
+          <a:xfrm>
+            <a:off x="4754880" y="2971800"/>
+            <a:ext cx="4251960" cy="1965960"/>
+          </a:xfrm>
+          <a:prstGeom prst="rect">
+            <a:avLst/>
+          </a:prstGeom>
+          <a:solidFill>
+            <a:srgbClr val="FFFFFF"/>
+          </a:solidFill>
+          <a:ln w="12700">
+            <a:solidFill>
+              <a:srgbClr val="CCCCCC"/>
+            </a:solidFill>
+            <a:prstDash val="solid"/>
+          </a:ln>
+        </p:spPr>
+        <p:txBody>
+          <a:bodyPr/>
+          <a:lstStyle/>
+          <a:p>
+            <a:endParaRPr lang="en-IN"/>
+          </a:p>
+        </p:txBody>
+      </p:sp>
+      <p:sp>
+        <p:nvSpPr>
+          <p:cNvPr id="18" name="Shape 16"/>
+          <p:cNvSpPr/>
+          <p:nvPr/>
+        </p:nvSpPr>
+        <p:spPr>
+          <a:xfrm>
+            <a:off x="4754880" y="2971800"/>
+            <a:ext cx="4251960" cy="274320"/>
+          </a:xfrm>
+          <a:prstGeom prst="rect">
+            <a:avLst/>
+          </a:prstGeom>
+          <a:solidFill>
+            <a:srgbClr val="C00000"/>
+          </a:solidFill>
+          <a:ln w="12700">
+            <a:solidFill>
+              <a:srgbClr val="C00000"/>
+            </a:solidFill>
+            <a:prstDash val="solid"/>
+          </a:ln>
+        </p:spPr>
+        <p:txBody>
+          <a:bodyPr/>
+          <a:lstStyle/>
+          <a:p>
+            <a:endParaRPr lang="en-IN"/>
+          </a:p>
+        </p:txBody>
+      </p:sp>
+      <p:sp>
+        <p:nvSpPr>
+          <p:cNvPr id="19" name="Text 17"/>
+          <p:cNvSpPr/>
+          <p:nvPr/>
+        </p:nvSpPr>
+        <p:spPr>
+          <a:xfrm>
+            <a:off x="4754880" y="2971800"/>
+            <a:ext cx="4251960" cy="274320"/>
+          </a:xfrm>
+          <a:prstGeom prst="rect">
+            <a:avLst/>
+          </a:prstGeom>
+          <a:noFill/>
+          <a:ln/>
+        </p:spPr>
+        <p:txBody>
+          <a:bodyPr wrap="square" lIns="0" tIns="0" rIns="0" bIns="0" rtlCol="0" anchor="ctr"/>
+          <a:lstStyle/>
+          <a:p>
+            <a:pPr marL="0" indent="0" algn="ctr">
+              <a:buNone/>
+            </a:pPr>
+            <a:r>
+              <a:rPr lang="en-US" sz="1100" b="1" dirty="0">
+                <a:solidFill>
+                  <a:srgbClr val="FFFFFF"/>
+                </a:solidFill>
+                <a:latin typeface="Calibri" pitchFamily="34" charset="0"/>
+                <a:ea typeface="Calibri" pitchFamily="34" charset="-122"/>
+                <a:cs typeface="Calibri" pitchFamily="34" charset="-120"/>
+              </a:rPr>
+              <a:t>Key Libraries &amp; Tools</a:t>
+            </a:r>
+            <a:endParaRPr lang="en-US" sz="1100" dirty="0"/>
+          </a:p>
+        </p:txBody>
+      </p:sp>
+      <p:sp>
+        <p:nvSpPr>
+          <p:cNvPr id="20" name="Text 18"/>
+          <p:cNvSpPr/>
+          <p:nvPr/>
+        </p:nvSpPr>
+        <p:spPr>
+          <a:xfrm>
+            <a:off x="4864608" y="3273552"/>
+            <a:ext cx="4032504" cy="1600200"/>
+          </a:xfrm>
+          <a:prstGeom prst="rect">
+            <a:avLst/>
+          </a:prstGeom>
+          <a:noFill/>
+          <a:ln/>
+        </p:spPr>
+        <p:txBody>
+          <a:bodyPr wrap="square" rtlCol="0" anchor="t"/>
+          <a:lstStyle/>
+          <a:p>
+            <a:pPr marL="342900" indent="-342900">
+              <a:buSzPct val="100000"/>
+              <a:buChar char="•"/>
+            </a:pPr>
+            <a:r>
+              <a:rPr lang="en-US" sz="950" dirty="0">
+                <a:solidFill>
+                  <a:srgbClr val="1C2120"/>
+                </a:solidFill>
+                <a:latin typeface="Calibri" pitchFamily="34" charset="0"/>
+                <a:ea typeface="Calibri" pitchFamily="34" charset="-122"/>
+                <a:cs typeface="Calibri" pitchFamily="34" charset="-120"/>
+              </a:rPr>
+              <a:t>Python 3.10, PyTorch 2.x, Gymnasium 0.29</a:t>
+            </a:r>
+            <a:endParaRPr lang="en-US" sz="950" dirty="0"/>
+          </a:p>
+          <a:p>
+            <a:pPr marL="342900" indent="-342900">
+              <a:buSzPct val="100000"/>
+              <a:buChar char="•"/>
+            </a:pPr>
+            <a:r>
+              <a:rPr lang="en-US" sz="950" dirty="0">
+                <a:solidFill>
+                  <a:srgbClr val="1C2120"/>
+                </a:solidFill>
+                <a:latin typeface="Calibri" pitchFamily="34" charset="0"/>
+                <a:ea typeface="Calibri" pitchFamily="34" charset="-122"/>
+                <a:cs typeface="Calibri" pitchFamily="34" charset="-120"/>
+              </a:rPr>
+              <a:t>NumPy, Pandas, Matplotlib for data/viz</a:t>
+            </a:r>
+            <a:endParaRPr lang="en-US" sz="950" dirty="0"/>
+          </a:p>
+          <a:p>
+            <a:pPr marL="342900" indent="-342900">
+              <a:buSzPct val="100000"/>
+              <a:buChar char="•"/>
+            </a:pPr>
+            <a:r>
+              <a:rPr lang="en-US" sz="950" dirty="0">
+                <a:solidFill>
+                  <a:srgbClr val="1C2120"/>
+                </a:solidFill>
+                <a:latin typeface="Calibri" pitchFamily="34" charset="0"/>
+                <a:ea typeface="Calibri" pitchFamily="34" charset="-122"/>
+                <a:cs typeface="Calibri" pitchFamily="34" charset="-120"/>
+              </a:rPr>
+              <a:t>Checkpoints saved as .pt files (actor+critics+encoder)</a:t>
+            </a:r>
+            <a:endParaRPr lang="en-US" sz="950" dirty="0"/>
+          </a:p>
+          <a:p>
+            <a:pPr marL="342900" indent="-342900">
+              <a:buSzPct val="100000"/>
+              <a:buChar char="•"/>
+            </a:pPr>
+            <a:r>
+              <a:rPr lang="en-US" sz="950" dirty="0">
+                <a:solidFill>
+                  <a:srgbClr val="1C2120"/>
+                </a:solidFill>
+                <a:latin typeface="Calibri" pitchFamily="34" charset="0"/>
+                <a:ea typeface="Calibri" pitchFamily="34" charset="-122"/>
+                <a:cs typeface="Calibri" pitchFamily="34" charset="-120"/>
+              </a:rPr>
+              <a:t>Results logged as JSON: episode, reward, profit, IWUE</a:t>
+            </a:r>
+            <a:endParaRPr lang="en-US" sz="950" dirty="0"/>
+          </a:p>
+          <a:p>
+            <a:pPr marL="342900" indent="-342900">
+              <a:buSzPct val="100000"/>
+              <a:buChar char="•"/>
+            </a:pPr>
+            <a:r>
+              <a:rPr lang="en-US" sz="950" dirty="0">
+                <a:solidFill>
+                  <a:srgbClr val="1C2120"/>
+                </a:solidFill>
+                <a:latin typeface="Calibri" pitchFamily="34" charset="0"/>
+                <a:ea typeface="Calibri" pitchFamily="34" charset="-122"/>
+                <a:cs typeface="Calibri" pitchFamily="34" charset="-120"/>
+              </a:rPr>
+              <a:t>Visualize.py generates training curves + ablation plots</a:t>
+            </a:r>
+            <a:endParaRPr lang="en-US" sz="950" dirty="0"/>
+          </a:p>
+          <a:p>
+            <a:pPr marL="342900" indent="-342900">
+              <a:buSzPct val="100000"/>
+              <a:buChar char="•"/>
+            </a:pPr>
+            <a:r>
+              <a:rPr lang="en-US" sz="950" dirty="0">
+                <a:solidFill>
+                  <a:srgbClr val="1C2120"/>
+                </a:solidFill>
+                <a:latin typeface="Calibri" pitchFamily="34" charset="0"/>
+                <a:ea typeface="Calibri" pitchFamily="34" charset="-122"/>
+                <a:cs typeface="Calibri" pitchFamily="34" charset="-120"/>
+              </a:rPr>
+              <a:t>demo_app.py for interactive policy demonstration</a:t>
+            </a:r>
+            <a:endParaRPr lang="en-US" sz="950" dirty="0"/>
           </a:p>
         </p:txBody>
       </p:sp>
